--- a/presentaciones/Presentacion_01_Fundamentos_Entorno_Diagnostico.pptx
+++ b/presentaciones/Presentacion_01_Fundamentos_Entorno_Diagnostico.pptx
@@ -5,20 +5,21 @@
     <p:sldMasterId id="2147483648" r:id="rId1"/>
   </p:sldMasterIdLst>
   <p:sldIdLst>
-    <p:sldId id="256" r:id="rId7"/>
-    <p:sldId id="257" r:id="rId8"/>
-    <p:sldId id="258" r:id="rId9"/>
-    <p:sldId id="259" r:id="rId10"/>
-    <p:sldId id="260" r:id="rId11"/>
-    <p:sldId id="261" r:id="rId12"/>
-    <p:sldId id="262" r:id="rId13"/>
-    <p:sldId id="263" r:id="rId14"/>
-    <p:sldId id="264" r:id="rId15"/>
-    <p:sldId id="265" r:id="rId16"/>
-    <p:sldId id="266" r:id="rId17"/>
-    <p:sldId id="267" r:id="rId18"/>
+    <p:sldId id="363" r:id="rId2"/>
+    <p:sldId id="362" r:id="rId3"/>
+    <p:sldId id="257" r:id="rId4"/>
+    <p:sldId id="258" r:id="rId5"/>
+    <p:sldId id="259" r:id="rId6"/>
+    <p:sldId id="260" r:id="rId7"/>
+    <p:sldId id="261" r:id="rId8"/>
+    <p:sldId id="262" r:id="rId9"/>
+    <p:sldId id="263" r:id="rId10"/>
+    <p:sldId id="264" r:id="rId11"/>
+    <p:sldId id="265" r:id="rId12"/>
+    <p:sldId id="266" r:id="rId13"/>
+    <p:sldId id="267" r:id="rId14"/>
   </p:sldIdLst>
-  <p:sldSz cx="12191695" cy="6858000" type="screen4x3"/>
+  <p:sldSz cx="12192000" cy="6858000"/>
   <p:notesSz cx="6858000" cy="9144000"/>
   <p:defaultTextStyle>
     <a:defPPr>
@@ -115,7 +116,186 @@
       </a:defRPr>
     </a:lvl9pPr>
   </p:defaultTextStyle>
+  <p:extLst>
+    <p:ext uri="{EFAFB233-063F-42B5-8137-9DF3F51BA10A}">
+      <p15:sldGuideLst xmlns:p15="http://schemas.microsoft.com/office/powerpoint/2012/main">
+        <p15:guide id="1" orient="horz" pos="2160">
+          <p15:clr>
+            <a:srgbClr val="A4A3A4"/>
+          </p15:clr>
+        </p15:guide>
+        <p15:guide id="2" pos="2880">
+          <p15:clr>
+            <a:srgbClr val="A4A3A4"/>
+          </p15:clr>
+        </p15:guide>
+      </p15:sldGuideLst>
+    </p:ext>
+  </p:extLst>
 </p:presentation>
+</file>
+
+<file path=ppt/revisionInfo.xml><?xml version="1.0" encoding="utf-8"?>
+<p1510:revInfo xmlns:a="http://schemas.openxmlformats.org/drawingml/2006/main" xmlns:r="http://schemas.openxmlformats.org/officeDocument/2006/relationships" xmlns:p1510="http://schemas.microsoft.com/office/powerpoint/2015/10/main">
+  <p1510:revLst>
+    <p1510:client id="{FF9323AF-B30C-4E0B-9C83-C68CD4D98082}" v="3" dt="2026-08-21T21:18:53.721"/>
+  </p1510:revLst>
+</p1510:revInfo>
+</file>
+
+<file path=ppt/changesInfos/changesInfo1.xml><?xml version="1.0" encoding="utf-8"?>
+<pc:chgInfo xmlns:a="http://schemas.openxmlformats.org/drawingml/2006/main" xmlns:r="http://schemas.openxmlformats.org/officeDocument/2006/relationships" xmlns:ac="http://schemas.microsoft.com/office/drawing/2013/main/command" xmlns:pc="http://schemas.microsoft.com/office/powerpoint/2013/main/command">
+  <pc:docChgLst>
+    <pc:chgData name="Diego Herrera M." userId="7f434f5315031350" providerId="LiveId" clId="{0E21904C-ADBC-437A-ACA4-7BD1B7FCB9FC}"/>
+    <pc:docChg chg="undo custSel addSld delSld modSld sldOrd">
+      <pc:chgData name="Diego Herrera M." userId="7f434f5315031350" providerId="LiveId" clId="{0E21904C-ADBC-437A-ACA4-7BD1B7FCB9FC}" dt="2026-08-21T22:26:47.887" v="187" actId="207"/>
+      <pc:docMkLst>
+        <pc:docMk/>
+      </pc:docMkLst>
+      <pc:sldChg chg="delSp modSp del mod">
+        <pc:chgData name="Diego Herrera M." userId="7f434f5315031350" providerId="LiveId" clId="{0E21904C-ADBC-437A-ACA4-7BD1B7FCB9FC}" dt="2026-08-21T21:15:31.259" v="38" actId="47"/>
+        <pc:sldMkLst>
+          <pc:docMk/>
+          <pc:sldMk cId="0" sldId="256"/>
+        </pc:sldMkLst>
+        <pc:spChg chg="del">
+          <ac:chgData name="Diego Herrera M." userId="7f434f5315031350" providerId="LiveId" clId="{0E21904C-ADBC-437A-ACA4-7BD1B7FCB9FC}" dt="2026-08-21T21:11:57.041" v="6" actId="478"/>
+          <ac:spMkLst>
+            <pc:docMk/>
+            <pc:sldMk cId="0" sldId="256"/>
+            <ac:spMk id="2" creationId="{00000000-0000-0000-0000-000000000000}"/>
+          </ac:spMkLst>
+        </pc:spChg>
+        <pc:spChg chg="mod">
+          <ac:chgData name="Diego Herrera M." userId="7f434f5315031350" providerId="LiveId" clId="{0E21904C-ADBC-437A-ACA4-7BD1B7FCB9FC}" dt="2026-08-21T21:12:19.184" v="7" actId="207"/>
+          <ac:spMkLst>
+            <pc:docMk/>
+            <pc:sldMk cId="0" sldId="256"/>
+            <ac:spMk id="6" creationId="{00000000-0000-0000-0000-000000000000}"/>
+          </ac:spMkLst>
+        </pc:spChg>
+      </pc:sldChg>
+      <pc:sldChg chg="addSp modSp add mod">
+        <pc:chgData name="Diego Herrera M." userId="7f434f5315031350" providerId="LiveId" clId="{0E21904C-ADBC-437A-ACA4-7BD1B7FCB9FC}" dt="2026-08-21T22:26:47.887" v="187" actId="207"/>
+        <pc:sldMkLst>
+          <pc:docMk/>
+          <pc:sldMk cId="3378564645" sldId="362"/>
+        </pc:sldMkLst>
+        <pc:spChg chg="mod">
+          <ac:chgData name="Diego Herrera M." userId="7f434f5315031350" providerId="LiveId" clId="{0E21904C-ADBC-437A-ACA4-7BD1B7FCB9FC}" dt="2026-08-21T21:14:58.932" v="28" actId="403"/>
+          <ac:spMkLst>
+            <pc:docMk/>
+            <pc:sldMk cId="3378564645" sldId="362"/>
+            <ac:spMk id="2" creationId="{E98F2C67-FDC2-96E8-AF4B-6E24C77FC987}"/>
+          </ac:spMkLst>
+        </pc:spChg>
+        <pc:spChg chg="mod">
+          <ac:chgData name="Diego Herrera M." userId="7f434f5315031350" providerId="LiveId" clId="{0E21904C-ADBC-437A-ACA4-7BD1B7FCB9FC}" dt="2026-08-21T21:15:26.784" v="37" actId="14100"/>
+          <ac:spMkLst>
+            <pc:docMk/>
+            <pc:sldMk cId="3378564645" sldId="362"/>
+            <ac:spMk id="3" creationId="{422AC90F-5146-5F37-FA29-8F02FE4D44E5}"/>
+          </ac:spMkLst>
+        </pc:spChg>
+        <pc:spChg chg="add mod ord">
+          <ac:chgData name="Diego Herrera M." userId="7f434f5315031350" providerId="LiveId" clId="{0E21904C-ADBC-437A-ACA4-7BD1B7FCB9FC}" dt="2026-08-21T22:26:47.887" v="187" actId="207"/>
+          <ac:spMkLst>
+            <pc:docMk/>
+            <pc:sldMk cId="3378564645" sldId="362"/>
+            <ac:spMk id="14" creationId="{638461ED-8A71-BACF-91B4-3599C2EE4C56}"/>
+          </ac:spMkLst>
+        </pc:spChg>
+        <pc:spChg chg="add mod ord">
+          <ac:chgData name="Diego Herrera M." userId="7f434f5315031350" providerId="LiveId" clId="{0E21904C-ADBC-437A-ACA4-7BD1B7FCB9FC}" dt="2026-08-21T21:14:15.889" v="21" actId="14100"/>
+          <ac:spMkLst>
+            <pc:docMk/>
+            <pc:sldMk cId="3378564645" sldId="362"/>
+            <ac:spMk id="16" creationId="{F220C309-6961-697E-B3DA-2C79B4023429}"/>
+          </ac:spMkLst>
+        </pc:spChg>
+        <pc:spChg chg="add mod">
+          <ac:chgData name="Diego Herrera M." userId="7f434f5315031350" providerId="LiveId" clId="{0E21904C-ADBC-437A-ACA4-7BD1B7FCB9FC}" dt="2026-08-21T21:19:47.613" v="185" actId="20577"/>
+          <ac:spMkLst>
+            <pc:docMk/>
+            <pc:sldMk cId="3378564645" sldId="362"/>
+            <ac:spMk id="18" creationId="{FB081CC8-22B8-4ED8-E959-6BE7DA34FF2B}"/>
+          </ac:spMkLst>
+        </pc:spChg>
+      </pc:sldChg>
+      <pc:sldChg chg="addSp delSp modSp new mod ord modClrScheme chgLayout">
+        <pc:chgData name="Diego Herrera M." userId="7f434f5315031350" providerId="LiveId" clId="{0E21904C-ADBC-437A-ACA4-7BD1B7FCB9FC}" dt="2026-08-21T21:19:20.130" v="182" actId="122"/>
+        <pc:sldMkLst>
+          <pc:docMk/>
+          <pc:sldMk cId="2992239400" sldId="363"/>
+        </pc:sldMkLst>
+        <pc:spChg chg="del mod ord">
+          <ac:chgData name="Diego Herrera M." userId="7f434f5315031350" providerId="LiveId" clId="{0E21904C-ADBC-437A-ACA4-7BD1B7FCB9FC}" dt="2026-08-21T21:16:12.004" v="46" actId="700"/>
+          <ac:spMkLst>
+            <pc:docMk/>
+            <pc:sldMk cId="2992239400" sldId="363"/>
+            <ac:spMk id="2" creationId="{C1B41541-4F3A-D52E-29B2-D192159073F9}"/>
+          </ac:spMkLst>
+        </pc:spChg>
+        <pc:spChg chg="del mod ord">
+          <ac:chgData name="Diego Herrera M." userId="7f434f5315031350" providerId="LiveId" clId="{0E21904C-ADBC-437A-ACA4-7BD1B7FCB9FC}" dt="2026-08-21T21:16:12.004" v="46" actId="700"/>
+          <ac:spMkLst>
+            <pc:docMk/>
+            <pc:sldMk cId="2992239400" sldId="363"/>
+            <ac:spMk id="3" creationId="{12AFCE27-84D5-3113-E923-EA0BB6978611}"/>
+          </ac:spMkLst>
+        </pc:spChg>
+        <pc:spChg chg="add del">
+          <ac:chgData name="Diego Herrera M." userId="7f434f5315031350" providerId="LiveId" clId="{0E21904C-ADBC-437A-ACA4-7BD1B7FCB9FC}" dt="2026-08-21T21:15:53.655" v="43" actId="22"/>
+          <ac:spMkLst>
+            <pc:docMk/>
+            <pc:sldMk cId="2992239400" sldId="363"/>
+            <ac:spMk id="5" creationId="{FB8E7AA9-7C28-56AF-4084-DD735CD99812}"/>
+          </ac:spMkLst>
+        </pc:spChg>
+        <pc:spChg chg="add ord">
+          <ac:chgData name="Diego Herrera M." userId="7f434f5315031350" providerId="LiveId" clId="{0E21904C-ADBC-437A-ACA4-7BD1B7FCB9FC}" dt="2026-08-21T21:16:17.899" v="47" actId="167"/>
+          <ac:spMkLst>
+            <pc:docMk/>
+            <pc:sldMk cId="2992239400" sldId="363"/>
+            <ac:spMk id="7" creationId="{DBBE4859-49C9-ED88-BD3B-D075F3A24D55}"/>
+          </ac:spMkLst>
+        </pc:spChg>
+        <pc:spChg chg="add mod ord">
+          <ac:chgData name="Diego Herrera M." userId="7f434f5315031350" providerId="LiveId" clId="{0E21904C-ADBC-437A-ACA4-7BD1B7FCB9FC}" dt="2026-08-21T21:18:43.189" v="161" actId="313"/>
+          <ac:spMkLst>
+            <pc:docMk/>
+            <pc:sldMk cId="2992239400" sldId="363"/>
+            <ac:spMk id="8" creationId="{7EACCEB7-5963-84F6-5407-3E8C31FD4007}"/>
+          </ac:spMkLst>
+        </pc:spChg>
+        <pc:spChg chg="add mod ord">
+          <ac:chgData name="Diego Herrera M." userId="7f434f5315031350" providerId="LiveId" clId="{0E21904C-ADBC-437A-ACA4-7BD1B7FCB9FC}" dt="2026-08-21T21:18:31.350" v="148" actId="20577"/>
+          <ac:spMkLst>
+            <pc:docMk/>
+            <pc:sldMk cId="2992239400" sldId="363"/>
+            <ac:spMk id="9" creationId="{76C0A663-6C6F-9562-0D9E-5618BCC97466}"/>
+          </ac:spMkLst>
+        </pc:spChg>
+        <pc:spChg chg="add mod">
+          <ac:chgData name="Diego Herrera M." userId="7f434f5315031350" providerId="LiveId" clId="{0E21904C-ADBC-437A-ACA4-7BD1B7FCB9FC}" dt="2026-08-21T21:19:20.130" v="182" actId="122"/>
+          <ac:spMkLst>
+            <pc:docMk/>
+            <pc:sldMk cId="2992239400" sldId="363"/>
+            <ac:spMk id="11" creationId="{3872CBC3-B3C7-1D1C-DE82-837AD58F326F}"/>
+          </ac:spMkLst>
+        </pc:spChg>
+        <pc:picChg chg="add mod">
+          <ac:chgData name="Diego Herrera M." userId="7f434f5315031350" providerId="LiveId" clId="{0E21904C-ADBC-437A-ACA4-7BD1B7FCB9FC}" dt="2026-08-21T21:18:36.750" v="160" actId="1035"/>
+          <ac:picMkLst>
+            <pc:docMk/>
+            <pc:sldMk cId="2992239400" sldId="363"/>
+            <ac:picMk id="10" creationId="{54C4ABCE-91BC-071C-C03C-7DFC2A061648}"/>
+          </ac:picMkLst>
+        </pc:picChg>
+      </pc:sldChg>
+    </pc:docChg>
+  </pc:docChgLst>
+</pc:chgInfo>
 </file>
 
 <file path=ppt/slideLayouts/slideLayout1.xml><?xml version="1.0" encoding="utf-8"?>
@@ -156,10 +336,9 @@
           <a:lstStyle/>
           <a:p>
             <a:r>
-              <a:rPr lang="en-US" smtClean="0"/>
+              <a:rPr lang="en-US"/>
               <a:t>Click to edit Master title style</a:t>
             </a:r>
-            <a:endParaRPr lang="en-US"/>
           </a:p>
         </p:txBody>
       </p:sp>
@@ -275,10 +454,9 @@
           </a:lstStyle>
           <a:p>
             <a:r>
-              <a:rPr lang="en-US" smtClean="0"/>
+              <a:rPr lang="en-US"/>
               <a:t>Click to edit Master subtitle style</a:t>
             </a:r>
-            <a:endParaRPr lang="en-US"/>
           </a:p>
         </p:txBody>
       </p:sp>
@@ -299,7 +477,7 @@
           <a:p>
             <a:fld id="{5BCAD085-E8A6-8845-BD4E-CB4CCA059FC4}" type="datetimeFigureOut">
               <a:rPr lang="en-US" smtClean="0"/>
-              <a:t>1/27/13</a:t>
+              <a:t>8/21/2026</a:t>
             </a:fld>
             <a:endParaRPr lang="en-US"/>
           </a:p>
@@ -341,7 +519,7 @@
           <a:p>
             <a:fld id="{C1FF6DA9-008F-8B48-92A6-B652298478BF}" type="slidenum">
               <a:rPr lang="en-US" smtClean="0"/>
-              <a:t>‹#›</a:t>
+              <a:t>‹Nº›</a:t>
             </a:fld>
             <a:endParaRPr lang="en-US"/>
           </a:p>
@@ -393,10 +571,9 @@
           <a:lstStyle/>
           <a:p>
             <a:r>
-              <a:rPr lang="en-US" smtClean="0"/>
+              <a:rPr lang="en-US"/>
               <a:t>Click to edit Master title style</a:t>
             </a:r>
-            <a:endParaRPr lang="en-US"/>
           </a:p>
         </p:txBody>
       </p:sp>
@@ -417,38 +594,37 @@
           <a:p>
             <a:pPr lvl="0"/>
             <a:r>
-              <a:rPr lang="en-US" smtClean="0"/>
+              <a:rPr lang="en-US"/>
               <a:t>Click to edit Master text styles</a:t>
             </a:r>
           </a:p>
           <a:p>
             <a:pPr lvl="1"/>
             <a:r>
-              <a:rPr lang="en-US" smtClean="0"/>
+              <a:rPr lang="en-US"/>
               <a:t>Second level</a:t>
             </a:r>
           </a:p>
           <a:p>
             <a:pPr lvl="2"/>
             <a:r>
-              <a:rPr lang="en-US" smtClean="0"/>
+              <a:rPr lang="en-US"/>
               <a:t>Third level</a:t>
             </a:r>
           </a:p>
           <a:p>
             <a:pPr lvl="3"/>
             <a:r>
-              <a:rPr lang="en-US" smtClean="0"/>
+              <a:rPr lang="en-US"/>
               <a:t>Fourth level</a:t>
             </a:r>
           </a:p>
           <a:p>
             <a:pPr lvl="4"/>
             <a:r>
-              <a:rPr lang="en-US" smtClean="0"/>
+              <a:rPr lang="en-US"/>
               <a:t>Fifth level</a:t>
             </a:r>
-            <a:endParaRPr lang="en-US"/>
           </a:p>
         </p:txBody>
       </p:sp>
@@ -469,7 +645,7 @@
           <a:p>
             <a:fld id="{5BCAD085-E8A6-8845-BD4E-CB4CCA059FC4}" type="datetimeFigureOut">
               <a:rPr lang="en-US" smtClean="0"/>
-              <a:t>1/27/13</a:t>
+              <a:t>8/21/2026</a:t>
             </a:fld>
             <a:endParaRPr lang="en-US"/>
           </a:p>
@@ -511,7 +687,7 @@
           <a:p>
             <a:fld id="{C1FF6DA9-008F-8B48-92A6-B652298478BF}" type="slidenum">
               <a:rPr lang="en-US" smtClean="0"/>
-              <a:t>‹#›</a:t>
+              <a:t>‹Nº›</a:t>
             </a:fld>
             <a:endParaRPr lang="en-US"/>
           </a:p>
@@ -568,10 +744,9 @@
           <a:lstStyle/>
           <a:p>
             <a:r>
-              <a:rPr lang="en-US" smtClean="0"/>
+              <a:rPr lang="en-US"/>
               <a:t>Click to edit Master title style</a:t>
             </a:r>
-            <a:endParaRPr lang="en-US"/>
           </a:p>
         </p:txBody>
       </p:sp>
@@ -597,38 +772,37 @@
           <a:p>
             <a:pPr lvl="0"/>
             <a:r>
-              <a:rPr lang="en-US" smtClean="0"/>
+              <a:rPr lang="en-US"/>
               <a:t>Click to edit Master text styles</a:t>
             </a:r>
           </a:p>
           <a:p>
             <a:pPr lvl="1"/>
             <a:r>
-              <a:rPr lang="en-US" smtClean="0"/>
+              <a:rPr lang="en-US"/>
               <a:t>Second level</a:t>
             </a:r>
           </a:p>
           <a:p>
             <a:pPr lvl="2"/>
             <a:r>
-              <a:rPr lang="en-US" smtClean="0"/>
+              <a:rPr lang="en-US"/>
               <a:t>Third level</a:t>
             </a:r>
           </a:p>
           <a:p>
             <a:pPr lvl="3"/>
             <a:r>
-              <a:rPr lang="en-US" smtClean="0"/>
+              <a:rPr lang="en-US"/>
               <a:t>Fourth level</a:t>
             </a:r>
           </a:p>
           <a:p>
             <a:pPr lvl="4"/>
             <a:r>
-              <a:rPr lang="en-US" smtClean="0"/>
+              <a:rPr lang="en-US"/>
               <a:t>Fifth level</a:t>
             </a:r>
-            <a:endParaRPr lang="en-US"/>
           </a:p>
         </p:txBody>
       </p:sp>
@@ -649,7 +823,7 @@
           <a:p>
             <a:fld id="{5BCAD085-E8A6-8845-BD4E-CB4CCA059FC4}" type="datetimeFigureOut">
               <a:rPr lang="en-US" smtClean="0"/>
-              <a:t>1/27/13</a:t>
+              <a:t>8/21/2026</a:t>
             </a:fld>
             <a:endParaRPr lang="en-US"/>
           </a:p>
@@ -691,7 +865,7 @@
           <a:p>
             <a:fld id="{C1FF6DA9-008F-8B48-92A6-B652298478BF}" type="slidenum">
               <a:rPr lang="en-US" smtClean="0"/>
-              <a:t>‹#›</a:t>
+              <a:t>‹Nº›</a:t>
             </a:fld>
             <a:endParaRPr lang="en-US"/>
           </a:p>
@@ -743,10 +917,9 @@
           <a:lstStyle/>
           <a:p>
             <a:r>
-              <a:rPr lang="en-US" smtClean="0"/>
+              <a:rPr lang="en-US"/>
               <a:t>Click to edit Master title style</a:t>
             </a:r>
-            <a:endParaRPr lang="en-US"/>
           </a:p>
         </p:txBody>
       </p:sp>
@@ -767,38 +940,37 @@
           <a:p>
             <a:pPr lvl="0"/>
             <a:r>
-              <a:rPr lang="en-US" smtClean="0"/>
+              <a:rPr lang="en-US"/>
               <a:t>Click to edit Master text styles</a:t>
             </a:r>
           </a:p>
           <a:p>
             <a:pPr lvl="1"/>
             <a:r>
-              <a:rPr lang="en-US" smtClean="0"/>
+              <a:rPr lang="en-US"/>
               <a:t>Second level</a:t>
             </a:r>
           </a:p>
           <a:p>
             <a:pPr lvl="2"/>
             <a:r>
-              <a:rPr lang="en-US" smtClean="0"/>
+              <a:rPr lang="en-US"/>
               <a:t>Third level</a:t>
             </a:r>
           </a:p>
           <a:p>
             <a:pPr lvl="3"/>
             <a:r>
-              <a:rPr lang="en-US" smtClean="0"/>
+              <a:rPr lang="en-US"/>
               <a:t>Fourth level</a:t>
             </a:r>
           </a:p>
           <a:p>
             <a:pPr lvl="4"/>
             <a:r>
-              <a:rPr lang="en-US" smtClean="0"/>
+              <a:rPr lang="en-US"/>
               <a:t>Fifth level</a:t>
             </a:r>
-            <a:endParaRPr lang="en-US"/>
           </a:p>
         </p:txBody>
       </p:sp>
@@ -819,7 +991,7 @@
           <a:p>
             <a:fld id="{5BCAD085-E8A6-8845-BD4E-CB4CCA059FC4}" type="datetimeFigureOut">
               <a:rPr lang="en-US" smtClean="0"/>
-              <a:t>1/27/13</a:t>
+              <a:t>8/21/2026</a:t>
             </a:fld>
             <a:endParaRPr lang="en-US"/>
           </a:p>
@@ -861,7 +1033,7 @@
           <a:p>
             <a:fld id="{C1FF6DA9-008F-8B48-92A6-B652298478BF}" type="slidenum">
               <a:rPr lang="en-US" smtClean="0"/>
-              <a:t>‹#›</a:t>
+              <a:t>‹Nº›</a:t>
             </a:fld>
             <a:endParaRPr lang="en-US"/>
           </a:p>
@@ -922,10 +1094,9 @@
           </a:lstStyle>
           <a:p>
             <a:r>
-              <a:rPr lang="en-US" smtClean="0"/>
+              <a:rPr lang="en-US"/>
               <a:t>Click to edit Master title style</a:t>
             </a:r>
-            <a:endParaRPr lang="en-US"/>
           </a:p>
         </p:txBody>
       </p:sp>
@@ -1042,7 +1213,7 @@
           <a:p>
             <a:pPr lvl="0"/>
             <a:r>
-              <a:rPr lang="en-US" smtClean="0"/>
+              <a:rPr lang="en-US"/>
               <a:t>Click to edit Master text styles</a:t>
             </a:r>
           </a:p>
@@ -1065,7 +1236,7 @@
           <a:p>
             <a:fld id="{5BCAD085-E8A6-8845-BD4E-CB4CCA059FC4}" type="datetimeFigureOut">
               <a:rPr lang="en-US" smtClean="0"/>
-              <a:t>1/27/13</a:t>
+              <a:t>8/21/2026</a:t>
             </a:fld>
             <a:endParaRPr lang="en-US"/>
           </a:p>
@@ -1107,7 +1278,7 @@
           <a:p>
             <a:fld id="{C1FF6DA9-008F-8B48-92A6-B652298478BF}" type="slidenum">
               <a:rPr lang="en-US" smtClean="0"/>
-              <a:t>‹#›</a:t>
+              <a:t>‹Nº›</a:t>
             </a:fld>
             <a:endParaRPr lang="en-US"/>
           </a:p>
@@ -1159,10 +1330,9 @@
           <a:lstStyle/>
           <a:p>
             <a:r>
-              <a:rPr lang="en-US" smtClean="0"/>
+              <a:rPr lang="en-US"/>
               <a:t>Click to edit Master title style</a:t>
             </a:r>
-            <a:endParaRPr lang="en-US"/>
           </a:p>
         </p:txBody>
       </p:sp>
@@ -1216,38 +1386,37 @@
           <a:p>
             <a:pPr lvl="0"/>
             <a:r>
-              <a:rPr lang="en-US" smtClean="0"/>
+              <a:rPr lang="en-US"/>
               <a:t>Click to edit Master text styles</a:t>
             </a:r>
           </a:p>
           <a:p>
             <a:pPr lvl="1"/>
             <a:r>
-              <a:rPr lang="en-US" smtClean="0"/>
+              <a:rPr lang="en-US"/>
               <a:t>Second level</a:t>
             </a:r>
           </a:p>
           <a:p>
             <a:pPr lvl="2"/>
             <a:r>
-              <a:rPr lang="en-US" smtClean="0"/>
+              <a:rPr lang="en-US"/>
               <a:t>Third level</a:t>
             </a:r>
           </a:p>
           <a:p>
             <a:pPr lvl="3"/>
             <a:r>
-              <a:rPr lang="en-US" smtClean="0"/>
+              <a:rPr lang="en-US"/>
               <a:t>Fourth level</a:t>
             </a:r>
           </a:p>
           <a:p>
             <a:pPr lvl="4"/>
             <a:r>
-              <a:rPr lang="en-US" smtClean="0"/>
+              <a:rPr lang="en-US"/>
               <a:t>Fifth level</a:t>
             </a:r>
-            <a:endParaRPr lang="en-US"/>
           </a:p>
         </p:txBody>
       </p:sp>
@@ -1301,38 +1470,37 @@
           <a:p>
             <a:pPr lvl="0"/>
             <a:r>
-              <a:rPr lang="en-US" smtClean="0"/>
+              <a:rPr lang="en-US"/>
               <a:t>Click to edit Master text styles</a:t>
             </a:r>
           </a:p>
           <a:p>
             <a:pPr lvl="1"/>
             <a:r>
-              <a:rPr lang="en-US" smtClean="0"/>
+              <a:rPr lang="en-US"/>
               <a:t>Second level</a:t>
             </a:r>
           </a:p>
           <a:p>
             <a:pPr lvl="2"/>
             <a:r>
-              <a:rPr lang="en-US" smtClean="0"/>
+              <a:rPr lang="en-US"/>
               <a:t>Third level</a:t>
             </a:r>
           </a:p>
           <a:p>
             <a:pPr lvl="3"/>
             <a:r>
-              <a:rPr lang="en-US" smtClean="0"/>
+              <a:rPr lang="en-US"/>
               <a:t>Fourth level</a:t>
             </a:r>
           </a:p>
           <a:p>
             <a:pPr lvl="4"/>
             <a:r>
-              <a:rPr lang="en-US" smtClean="0"/>
+              <a:rPr lang="en-US"/>
               <a:t>Fifth level</a:t>
             </a:r>
-            <a:endParaRPr lang="en-US"/>
           </a:p>
         </p:txBody>
       </p:sp>
@@ -1353,7 +1521,7 @@
           <a:p>
             <a:fld id="{5BCAD085-E8A6-8845-BD4E-CB4CCA059FC4}" type="datetimeFigureOut">
               <a:rPr lang="en-US" smtClean="0"/>
-              <a:t>1/27/13</a:t>
+              <a:t>8/21/2026</a:t>
             </a:fld>
             <a:endParaRPr lang="en-US"/>
           </a:p>
@@ -1395,7 +1563,7 @@
           <a:p>
             <a:fld id="{C1FF6DA9-008F-8B48-92A6-B652298478BF}" type="slidenum">
               <a:rPr lang="en-US" smtClean="0"/>
-              <a:t>‹#›</a:t>
+              <a:t>‹Nº›</a:t>
             </a:fld>
             <a:endParaRPr lang="en-US"/>
           </a:p>
@@ -1451,10 +1619,9 @@
           </a:lstStyle>
           <a:p>
             <a:r>
-              <a:rPr lang="en-US" smtClean="0"/>
+              <a:rPr lang="en-US"/>
               <a:t>Click to edit Master title style</a:t>
             </a:r>
-            <a:endParaRPr lang="en-US"/>
           </a:p>
         </p:txBody>
       </p:sp>
@@ -1517,7 +1684,7 @@
           <a:p>
             <a:pPr lvl="0"/>
             <a:r>
-              <a:rPr lang="en-US" smtClean="0"/>
+              <a:rPr lang="en-US"/>
               <a:t>Click to edit Master text styles</a:t>
             </a:r>
           </a:p>
@@ -1573,38 +1740,37 @@
           <a:p>
             <a:pPr lvl="0"/>
             <a:r>
-              <a:rPr lang="en-US" smtClean="0"/>
+              <a:rPr lang="en-US"/>
               <a:t>Click to edit Master text styles</a:t>
             </a:r>
           </a:p>
           <a:p>
             <a:pPr lvl="1"/>
             <a:r>
-              <a:rPr lang="en-US" smtClean="0"/>
+              <a:rPr lang="en-US"/>
               <a:t>Second level</a:t>
             </a:r>
           </a:p>
           <a:p>
             <a:pPr lvl="2"/>
             <a:r>
-              <a:rPr lang="en-US" smtClean="0"/>
+              <a:rPr lang="en-US"/>
               <a:t>Third level</a:t>
             </a:r>
           </a:p>
           <a:p>
             <a:pPr lvl="3"/>
             <a:r>
-              <a:rPr lang="en-US" smtClean="0"/>
+              <a:rPr lang="en-US"/>
               <a:t>Fourth level</a:t>
             </a:r>
           </a:p>
           <a:p>
             <a:pPr lvl="4"/>
             <a:r>
-              <a:rPr lang="en-US" smtClean="0"/>
+              <a:rPr lang="en-US"/>
               <a:t>Fifth level</a:t>
             </a:r>
-            <a:endParaRPr lang="en-US"/>
           </a:p>
         </p:txBody>
       </p:sp>
@@ -1667,7 +1833,7 @@
           <a:p>
             <a:pPr lvl="0"/>
             <a:r>
-              <a:rPr lang="en-US" smtClean="0"/>
+              <a:rPr lang="en-US"/>
               <a:t>Click to edit Master text styles</a:t>
             </a:r>
           </a:p>
@@ -1723,38 +1889,37 @@
           <a:p>
             <a:pPr lvl="0"/>
             <a:r>
-              <a:rPr lang="en-US" smtClean="0"/>
+              <a:rPr lang="en-US"/>
               <a:t>Click to edit Master text styles</a:t>
             </a:r>
           </a:p>
           <a:p>
             <a:pPr lvl="1"/>
             <a:r>
-              <a:rPr lang="en-US" smtClean="0"/>
+              <a:rPr lang="en-US"/>
               <a:t>Second level</a:t>
             </a:r>
           </a:p>
           <a:p>
             <a:pPr lvl="2"/>
             <a:r>
-              <a:rPr lang="en-US" smtClean="0"/>
+              <a:rPr lang="en-US"/>
               <a:t>Third level</a:t>
             </a:r>
           </a:p>
           <a:p>
             <a:pPr lvl="3"/>
             <a:r>
-              <a:rPr lang="en-US" smtClean="0"/>
+              <a:rPr lang="en-US"/>
               <a:t>Fourth level</a:t>
             </a:r>
           </a:p>
           <a:p>
             <a:pPr lvl="4"/>
             <a:r>
-              <a:rPr lang="en-US" smtClean="0"/>
+              <a:rPr lang="en-US"/>
               <a:t>Fifth level</a:t>
             </a:r>
-            <a:endParaRPr lang="en-US"/>
           </a:p>
         </p:txBody>
       </p:sp>
@@ -1775,7 +1940,7 @@
           <a:p>
             <a:fld id="{5BCAD085-E8A6-8845-BD4E-CB4CCA059FC4}" type="datetimeFigureOut">
               <a:rPr lang="en-US" smtClean="0"/>
-              <a:t>1/27/13</a:t>
+              <a:t>8/21/2026</a:t>
             </a:fld>
             <a:endParaRPr lang="en-US"/>
           </a:p>
@@ -1817,7 +1982,7 @@
           <a:p>
             <a:fld id="{C1FF6DA9-008F-8B48-92A6-B652298478BF}" type="slidenum">
               <a:rPr lang="en-US" smtClean="0"/>
-              <a:t>‹#›</a:t>
+              <a:t>‹Nº›</a:t>
             </a:fld>
             <a:endParaRPr lang="en-US"/>
           </a:p>
@@ -1869,10 +2034,9 @@
           <a:lstStyle/>
           <a:p>
             <a:r>
-              <a:rPr lang="en-US" smtClean="0"/>
+              <a:rPr lang="en-US"/>
               <a:t>Click to edit Master title style</a:t>
             </a:r>
-            <a:endParaRPr lang="en-US"/>
           </a:p>
         </p:txBody>
       </p:sp>
@@ -1893,7 +2057,7 @@
           <a:p>
             <a:fld id="{5BCAD085-E8A6-8845-BD4E-CB4CCA059FC4}" type="datetimeFigureOut">
               <a:rPr lang="en-US" smtClean="0"/>
-              <a:t>1/27/13</a:t>
+              <a:t>8/21/2026</a:t>
             </a:fld>
             <a:endParaRPr lang="en-US"/>
           </a:p>
@@ -1935,7 +2099,7 @@
           <a:p>
             <a:fld id="{C1FF6DA9-008F-8B48-92A6-B652298478BF}" type="slidenum">
               <a:rPr lang="en-US" smtClean="0"/>
-              <a:t>‹#›</a:t>
+              <a:t>‹Nº›</a:t>
             </a:fld>
             <a:endParaRPr lang="en-US"/>
           </a:p>
@@ -1988,7 +2152,7 @@
           <a:p>
             <a:fld id="{5BCAD085-E8A6-8845-BD4E-CB4CCA059FC4}" type="datetimeFigureOut">
               <a:rPr lang="en-US" smtClean="0"/>
-              <a:t>1/27/13</a:t>
+              <a:t>8/21/2026</a:t>
             </a:fld>
             <a:endParaRPr lang="en-US"/>
           </a:p>
@@ -2030,7 +2194,7 @@
           <a:p>
             <a:fld id="{C1FF6DA9-008F-8B48-92A6-B652298478BF}" type="slidenum">
               <a:rPr lang="en-US" smtClean="0"/>
-              <a:t>‹#›</a:t>
+              <a:t>‹Nº›</a:t>
             </a:fld>
             <a:endParaRPr lang="en-US"/>
           </a:p>
@@ -2091,10 +2255,9 @@
           </a:lstStyle>
           <a:p>
             <a:r>
-              <a:rPr lang="en-US" smtClean="0"/>
+              <a:rPr lang="en-US"/>
               <a:t>Click to edit Master title style</a:t>
             </a:r>
-            <a:endParaRPr lang="en-US"/>
           </a:p>
         </p:txBody>
       </p:sp>
@@ -2148,38 +2311,37 @@
           <a:p>
             <a:pPr lvl="0"/>
             <a:r>
-              <a:rPr lang="en-US" smtClean="0"/>
+              <a:rPr lang="en-US"/>
               <a:t>Click to edit Master text styles</a:t>
             </a:r>
           </a:p>
           <a:p>
             <a:pPr lvl="1"/>
             <a:r>
-              <a:rPr lang="en-US" smtClean="0"/>
+              <a:rPr lang="en-US"/>
               <a:t>Second level</a:t>
             </a:r>
           </a:p>
           <a:p>
             <a:pPr lvl="2"/>
             <a:r>
-              <a:rPr lang="en-US" smtClean="0"/>
+              <a:rPr lang="en-US"/>
               <a:t>Third level</a:t>
             </a:r>
           </a:p>
           <a:p>
             <a:pPr lvl="3"/>
             <a:r>
-              <a:rPr lang="en-US" smtClean="0"/>
+              <a:rPr lang="en-US"/>
               <a:t>Fourth level</a:t>
             </a:r>
           </a:p>
           <a:p>
             <a:pPr lvl="4"/>
             <a:r>
-              <a:rPr lang="en-US" smtClean="0"/>
+              <a:rPr lang="en-US"/>
               <a:t>Fifth level</a:t>
             </a:r>
-            <a:endParaRPr lang="en-US"/>
           </a:p>
         </p:txBody>
       </p:sp>
@@ -2242,7 +2404,7 @@
           <a:p>
             <a:pPr lvl="0"/>
             <a:r>
-              <a:rPr lang="en-US" smtClean="0"/>
+              <a:rPr lang="en-US"/>
               <a:t>Click to edit Master text styles</a:t>
             </a:r>
           </a:p>
@@ -2265,7 +2427,7 @@
           <a:p>
             <a:fld id="{5BCAD085-E8A6-8845-BD4E-CB4CCA059FC4}" type="datetimeFigureOut">
               <a:rPr lang="en-US" smtClean="0"/>
-              <a:t>1/27/13</a:t>
+              <a:t>8/21/2026</a:t>
             </a:fld>
             <a:endParaRPr lang="en-US"/>
           </a:p>
@@ -2307,7 +2469,7 @@
           <a:p>
             <a:fld id="{C1FF6DA9-008F-8B48-92A6-B652298478BF}" type="slidenum">
               <a:rPr lang="en-US" smtClean="0"/>
-              <a:t>‹#›</a:t>
+              <a:t>‹Nº›</a:t>
             </a:fld>
             <a:endParaRPr lang="en-US"/>
           </a:p>
@@ -2368,10 +2530,9 @@
           </a:lstStyle>
           <a:p>
             <a:r>
-              <a:rPr lang="en-US" smtClean="0"/>
+              <a:rPr lang="en-US"/>
               <a:t>Click to edit Master title style</a:t>
             </a:r>
-            <a:endParaRPr lang="en-US"/>
           </a:p>
         </p:txBody>
       </p:sp>
@@ -2495,7 +2656,7 @@
           <a:p>
             <a:pPr lvl="0"/>
             <a:r>
-              <a:rPr lang="en-US" smtClean="0"/>
+              <a:rPr lang="en-US"/>
               <a:t>Click to edit Master text styles</a:t>
             </a:r>
           </a:p>
@@ -2518,7 +2679,7 @@
           <a:p>
             <a:fld id="{5BCAD085-E8A6-8845-BD4E-CB4CCA059FC4}" type="datetimeFigureOut">
               <a:rPr lang="en-US" smtClean="0"/>
-              <a:t>1/27/13</a:t>
+              <a:t>8/21/2026</a:t>
             </a:fld>
             <a:endParaRPr lang="en-US"/>
           </a:p>
@@ -2560,7 +2721,7 @@
           <a:p>
             <a:fld id="{C1FF6DA9-008F-8B48-92A6-B652298478BF}" type="slidenum">
               <a:rPr lang="en-US" smtClean="0"/>
-              <a:t>‹#›</a:t>
+              <a:t>‹Nº›</a:t>
             </a:fld>
             <a:endParaRPr lang="en-US"/>
           </a:p>
@@ -2627,10 +2788,9 @@
           <a:lstStyle/>
           <a:p>
             <a:r>
-              <a:rPr lang="en-US" smtClean="0"/>
+              <a:rPr lang="en-US"/>
               <a:t>Click to edit Master title style</a:t>
             </a:r>
-            <a:endParaRPr lang="en-US"/>
           </a:p>
         </p:txBody>
       </p:sp>
@@ -2661,38 +2821,37 @@
           <a:p>
             <a:pPr lvl="0"/>
             <a:r>
-              <a:rPr lang="en-US" smtClean="0"/>
+              <a:rPr lang="en-US"/>
               <a:t>Click to edit Master text styles</a:t>
             </a:r>
           </a:p>
           <a:p>
             <a:pPr lvl="1"/>
             <a:r>
-              <a:rPr lang="en-US" smtClean="0"/>
+              <a:rPr lang="en-US"/>
               <a:t>Second level</a:t>
             </a:r>
           </a:p>
           <a:p>
             <a:pPr lvl="2"/>
             <a:r>
-              <a:rPr lang="en-US" smtClean="0"/>
+              <a:rPr lang="en-US"/>
               <a:t>Third level</a:t>
             </a:r>
           </a:p>
           <a:p>
             <a:pPr lvl="3"/>
             <a:r>
-              <a:rPr lang="en-US" smtClean="0"/>
+              <a:rPr lang="en-US"/>
               <a:t>Fourth level</a:t>
             </a:r>
           </a:p>
           <a:p>
             <a:pPr lvl="4"/>
             <a:r>
-              <a:rPr lang="en-US" smtClean="0"/>
+              <a:rPr lang="en-US"/>
               <a:t>Fifth level</a:t>
             </a:r>
-            <a:endParaRPr lang="en-US"/>
           </a:p>
         </p:txBody>
       </p:sp>
@@ -2731,7 +2890,7 @@
           <a:p>
             <a:fld id="{5BCAD085-E8A6-8845-BD4E-CB4CCA059FC4}" type="datetimeFigureOut">
               <a:rPr lang="en-US" smtClean="0"/>
-              <a:t>1/27/13</a:t>
+              <a:t>8/21/2026</a:t>
             </a:fld>
             <a:endParaRPr lang="en-US"/>
           </a:p>
@@ -2809,7 +2968,7 @@
           <a:p>
             <a:fld id="{C1FF6DA9-008F-8B48-92A6-B652298478BF}" type="slidenum">
               <a:rPr lang="en-US" smtClean="0"/>
-              <a:t>‹#›</a:t>
+              <a:t>‹Nº›</a:t>
             </a:fld>
             <a:endParaRPr lang="en-US"/>
           </a:p>
@@ -3090,7 +3249,7 @@
 </file>
 
 <file path=ppt/slides/slide1.xml><?xml version="1.0" encoding="utf-8"?>
-<p:sld xmlns:a="http://schemas.openxmlformats.org/drawingml/2006/main" xmlns:p="http://schemas.openxmlformats.org/presentationml/2006/main" xmlns:r="http://schemas.openxmlformats.org/officeDocument/2006/relationships">
+<p:sld xmlns:a="http://schemas.openxmlformats.org/drawingml/2006/main" xmlns:r="http://schemas.openxmlformats.org/officeDocument/2006/relationships" xmlns:p="http://schemas.openxmlformats.org/presentationml/2006/main">
   <p:cSld>
     <p:spTree>
       <p:nvGrpSpPr>
@@ -3098,10 +3257,23 @@
         <p:cNvGrpSpPr/>
         <p:nvPr/>
       </p:nvGrpSpPr>
-      <p:grpSpPr/>
-      <p:sp>
-        <p:nvSpPr>
-          <p:cNvPr id="2" name="Rectangle 1"/>
+      <p:grpSpPr>
+        <a:xfrm>
+          <a:off x="0" y="0"/>
+          <a:ext cx="0" cy="0"/>
+          <a:chOff x="0" y="0"/>
+          <a:chExt cx="0" cy="0"/>
+        </a:xfrm>
+      </p:grpSpPr>
+      <p:sp>
+        <p:nvSpPr>
+          <p:cNvPr id="7" name="Rectangle 1">
+            <a:extLst>
+              <a:ext uri="{FF2B5EF4-FFF2-40B4-BE49-F238E27FC236}">
+                <a16:creationId xmlns:a16="http://schemas.microsoft.com/office/drawing/2014/main" id="{DBBE4859-49C9-ED88-BD3B-D075F3A24D55}"/>
+              </a:ext>
+            </a:extLst>
+          </p:cNvPr>
           <p:cNvSpPr/>
           <p:nvPr/>
         </p:nvSpPr>
@@ -3114,7 +3286,7 @@
             <a:avLst/>
           </a:prstGeom>
           <a:solidFill>
-            <a:srgbClr val="241911"/>
+            <a:srgbClr val="F5EFE4"/>
           </a:solidFill>
           <a:ln>
             <a:noFill/>
@@ -3140,19 +3312,329 @@
           <a:lstStyle/>
           <a:p>
             <a:pPr algn="ctr"/>
-          </a:p>
-        </p:txBody>
-      </p:sp>
-      <p:sp>
-        <p:nvSpPr>
-          <p:cNvPr id="3" name="Oval 2"/>
+            <a:endParaRPr/>
+          </a:p>
+        </p:txBody>
+      </p:sp>
+      <p:sp>
+        <p:nvSpPr>
+          <p:cNvPr id="8" name="Título 7">
+            <a:extLst>
+              <a:ext uri="{FF2B5EF4-FFF2-40B4-BE49-F238E27FC236}">
+                <a16:creationId xmlns:a16="http://schemas.microsoft.com/office/drawing/2014/main" id="{7EACCEB7-5963-84F6-5407-3E8C31FD4007}"/>
+              </a:ext>
+            </a:extLst>
+          </p:cNvPr>
+          <p:cNvSpPr>
+            <a:spLocks noGrp="1"/>
+          </p:cNvSpPr>
+          <p:nvPr>
+            <p:ph type="title"/>
+          </p:nvPr>
+        </p:nvSpPr>
+        <p:spPr/>
+        <p:txBody>
+          <a:bodyPr/>
+          <a:lstStyle/>
+          <a:p>
+            <a:r>
+              <a:rPr lang="es-CO" dirty="0"/>
+              <a:t>Analítica y modelamiento de datos</a:t>
+            </a:r>
+          </a:p>
+        </p:txBody>
+      </p:sp>
+      <p:sp>
+        <p:nvSpPr>
+          <p:cNvPr id="9" name="Marcador de texto 8">
+            <a:extLst>
+              <a:ext uri="{FF2B5EF4-FFF2-40B4-BE49-F238E27FC236}">
+                <a16:creationId xmlns:a16="http://schemas.microsoft.com/office/drawing/2014/main" id="{76C0A663-6C6F-9562-0D9E-5618BCC97466}"/>
+              </a:ext>
+            </a:extLst>
+          </p:cNvPr>
+          <p:cNvSpPr>
+            <a:spLocks noGrp="1"/>
+          </p:cNvSpPr>
+          <p:nvPr>
+            <p:ph type="body" idx="1"/>
+          </p:nvPr>
+        </p:nvSpPr>
+        <p:spPr/>
+        <p:txBody>
+          <a:bodyPr/>
+          <a:lstStyle/>
+          <a:p>
+            <a:r>
+              <a:rPr lang="es-ES" dirty="0"/>
+              <a:t>Especialización en Analítica de Datos</a:t>
+            </a:r>
+            <a:endParaRPr lang="es-CO" dirty="0"/>
+          </a:p>
+        </p:txBody>
+      </p:sp>
+      <p:pic>
+        <p:nvPicPr>
+          <p:cNvPr id="10" name="Gráfico 9">
+            <a:extLst>
+              <a:ext uri="{FF2B5EF4-FFF2-40B4-BE49-F238E27FC236}">
+                <a16:creationId xmlns:a16="http://schemas.microsoft.com/office/drawing/2014/main" id="{54C4ABCE-91BC-071C-C03C-7DFC2A061648}"/>
+              </a:ext>
+              <a:ext uri="{C183D7F6-B498-43B3-948B-1728B52AA6E4}">
+                <adec:decorative xmlns:adec="http://schemas.microsoft.com/office/drawing/2017/decorative" val="1"/>
+              </a:ext>
+            </a:extLst>
+          </p:cNvPr>
+          <p:cNvPicPr>
+            <a:picLocks noChangeAspect="1"/>
+          </p:cNvPicPr>
+          <p:nvPr/>
+        </p:nvPicPr>
+        <p:blipFill>
+          <a:blip>
+            <a:extLst>
+              <a:ext uri="{96DAC541-7B7A-43D3-8B79-37D633B846F1}">
+                <asvg:svgBlip xmlns:asvg="http://schemas.microsoft.com/office/drawing/2016/SVG/main" r:embed="rId2"/>
+              </a:ext>
+            </a:extLst>
+          </a:blip>
+          <a:stretch>
+            <a:fillRect/>
+          </a:stretch>
+        </p:blipFill>
+        <p:spPr>
+          <a:xfrm>
+            <a:off x="4762347" y="3560094"/>
+            <a:ext cx="2667000" cy="762000"/>
+          </a:xfrm>
+          <a:prstGeom prst="rect">
+            <a:avLst/>
+          </a:prstGeom>
+        </p:spPr>
+      </p:pic>
+      <p:sp>
+        <p:nvSpPr>
+          <p:cNvPr id="11" name="CuadroTexto 10">
+            <a:extLst>
+              <a:ext uri="{FF2B5EF4-FFF2-40B4-BE49-F238E27FC236}">
+                <a16:creationId xmlns:a16="http://schemas.microsoft.com/office/drawing/2014/main" id="{3872CBC3-B3C7-1D1C-DE82-837AD58F326F}"/>
+              </a:ext>
+            </a:extLst>
+          </p:cNvPr>
+          <p:cNvSpPr txBox="1"/>
+          <p:nvPr/>
+        </p:nvSpPr>
+        <p:spPr>
+          <a:xfrm>
+            <a:off x="11049000" y="6546998"/>
+            <a:ext cx="1143000" cy="276999"/>
+          </a:xfrm>
+          <a:prstGeom prst="rect">
+            <a:avLst/>
+          </a:prstGeom>
+          <a:noFill/>
+        </p:spPr>
+        <p:txBody>
+          <a:bodyPr wrap="square" rtlCol="0">
+            <a:spAutoFit/>
+          </a:bodyPr>
+          <a:lstStyle/>
+          <a:p>
+            <a:pPr algn="ctr"/>
+            <a:r>
+              <a:rPr lang="es-CO" sz="1200" dirty="0"/>
+              <a:t>2026.Ago.21</a:t>
+            </a:r>
+          </a:p>
+        </p:txBody>
+      </p:sp>
+    </p:spTree>
+    <p:extLst>
+      <p:ext uri="{BB962C8B-B14F-4D97-AF65-F5344CB8AC3E}">
+        <p14:creationId xmlns:p14="http://schemas.microsoft.com/office/powerpoint/2010/main" val="2992239400"/>
+      </p:ext>
+    </p:extLst>
+  </p:cSld>
+  <p:clrMapOvr>
+    <a:masterClrMapping/>
+  </p:clrMapOvr>
+</p:sld>
+</file>
+
+<file path=ppt/slides/slide10.xml><?xml version="1.0" encoding="utf-8"?>
+<p:sld xmlns:a="http://schemas.openxmlformats.org/drawingml/2006/main" xmlns:r="http://schemas.openxmlformats.org/officeDocument/2006/relationships" xmlns:p="http://schemas.openxmlformats.org/presentationml/2006/main">
+  <p:cSld>
+    <p:spTree>
+      <p:nvGrpSpPr>
+        <p:cNvPr id="1" name=""/>
+        <p:cNvGrpSpPr/>
+        <p:nvPr/>
+      </p:nvGrpSpPr>
+      <p:grpSpPr>
+        <a:xfrm>
+          <a:off x="0" y="0"/>
+          <a:ext cx="0" cy="0"/>
+          <a:chOff x="0" y="0"/>
+          <a:chExt cx="0" cy="0"/>
+        </a:xfrm>
+      </p:grpSpPr>
+      <p:sp>
+        <p:nvSpPr>
+          <p:cNvPr id="2" name="Rectangle 1"/>
           <p:cNvSpPr/>
           <p:nvPr/>
         </p:nvSpPr>
         <p:spPr>
           <a:xfrm>
-            <a:off x="640080" y="868680"/>
-            <a:ext cx="1371600" cy="1371600"/>
+            <a:off x="0" y="0"/>
+            <a:ext cx="12191695" cy="6858000"/>
+          </a:xfrm>
+          <a:prstGeom prst="rect">
+            <a:avLst/>
+          </a:prstGeom>
+          <a:solidFill>
+            <a:srgbClr val="F5EFE4"/>
+          </a:solidFill>
+          <a:ln>
+            <a:noFill/>
+          </a:ln>
+          <a:effectLst/>
+        </p:spPr>
+        <p:style>
+          <a:lnRef idx="1">
+            <a:schemeClr val="accent1"/>
+          </a:lnRef>
+          <a:fillRef idx="3">
+            <a:schemeClr val="accent1"/>
+          </a:fillRef>
+          <a:effectRef idx="2">
+            <a:schemeClr val="accent1"/>
+          </a:effectRef>
+          <a:fontRef idx="minor">
+            <a:schemeClr val="lt1"/>
+          </a:fontRef>
+        </p:style>
+        <p:txBody>
+          <a:bodyPr rtlCol="0" anchor="ctr"/>
+          <a:lstStyle/>
+          <a:p>
+            <a:pPr algn="ctr"/>
+            <a:endParaRPr/>
+          </a:p>
+        </p:txBody>
+      </p:sp>
+      <p:sp>
+        <p:nvSpPr>
+          <p:cNvPr id="3" name="TextBox 2"/>
+          <p:cNvSpPr txBox="1"/>
+          <p:nvPr/>
+        </p:nvSpPr>
+        <p:spPr>
+          <a:xfrm>
+            <a:off x="640080" y="502920"/>
+            <a:ext cx="10911535" cy="292608"/>
+          </a:xfrm>
+          <a:prstGeom prst="rect">
+            <a:avLst/>
+          </a:prstGeom>
+          <a:noFill/>
+        </p:spPr>
+        <p:txBody>
+          <a:bodyPr wrap="square" lIns="0" tIns="0" rIns="0" bIns="0" anchor="t">
+            <a:spAutoFit/>
+          </a:bodyPr>
+          <a:lstStyle/>
+          <a:p>
+            <a:r>
+              <a:rPr sz="1250" b="1" i="0" spc="160">
+                <a:solidFill>
+                  <a:srgbClr val="9C4422"/>
+                </a:solidFill>
+                <a:latin typeface="Calibri"/>
+              </a:rPr>
+              <a:t>USO DE ASSERT PARA AUTOVERIFICACIÓN SIN DEPENDENCIAS EXTERNAS</a:t>
+            </a:r>
+          </a:p>
+        </p:txBody>
+      </p:sp>
+      <p:sp>
+        <p:nvSpPr>
+          <p:cNvPr id="4" name="TextBox 3"/>
+          <p:cNvSpPr txBox="1"/>
+          <p:nvPr/>
+        </p:nvSpPr>
+        <p:spPr>
+          <a:xfrm>
+            <a:off x="640080" y="786384"/>
+            <a:ext cx="10911535" cy="822960"/>
+          </a:xfrm>
+          <a:prstGeom prst="rect">
+            <a:avLst/>
+          </a:prstGeom>
+          <a:noFill/>
+        </p:spPr>
+        <p:txBody>
+          <a:bodyPr wrap="square" lIns="0" tIns="0" rIns="0" bIns="0" anchor="t">
+            <a:spAutoFit/>
+          </a:bodyPr>
+          <a:lstStyle/>
+          <a:p>
+            <a:r>
+              <a:rPr sz="3000" b="1" i="0">
+                <a:solidFill>
+                  <a:srgbClr val="3D2B1E"/>
+                </a:solidFill>
+                <a:latin typeface="Cambria"/>
+              </a:rPr>
+              <a:t>Mecanismo de autoverificación</a:t>
+            </a:r>
+          </a:p>
+        </p:txBody>
+      </p:sp>
+      <p:sp>
+        <p:nvSpPr>
+          <p:cNvPr id="5" name="TextBox 4"/>
+          <p:cNvSpPr txBox="1"/>
+          <p:nvPr/>
+        </p:nvSpPr>
+        <p:spPr>
+          <a:xfrm>
+            <a:off x="640080" y="6473952"/>
+            <a:ext cx="7772400" cy="274320"/>
+          </a:xfrm>
+          <a:prstGeom prst="rect">
+            <a:avLst/>
+          </a:prstGeom>
+          <a:noFill/>
+        </p:spPr>
+        <p:txBody>
+          <a:bodyPr wrap="square" lIns="0" tIns="0" rIns="0" bIns="0" anchor="t">
+            <a:spAutoFit/>
+          </a:bodyPr>
+          <a:lstStyle/>
+          <a:p>
+            <a:r>
+              <a:rPr sz="1000" b="0" i="1">
+                <a:solidFill>
+                  <a:srgbClr val="6B5F4E"/>
+                </a:solidFill>
+                <a:latin typeface="Calibri"/>
+              </a:rPr>
+              <a:t>Presentación 1 · Fundamentos, Entorno y Diagnóstico</a:t>
+            </a:r>
+          </a:p>
+        </p:txBody>
+      </p:sp>
+      <p:sp>
+        <p:nvSpPr>
+          <p:cNvPr id="6" name="Oval 5"/>
+          <p:cNvSpPr/>
+          <p:nvPr/>
+        </p:nvSpPr>
+        <p:spPr>
+          <a:xfrm>
+            <a:off x="11240719" y="6419088"/>
+            <a:ext cx="310896" cy="310896"/>
           </a:xfrm>
           <a:prstGeom prst="ellipse">
             <a:avLst/>
@@ -3180,32 +3662,214 @@
           </a:fontRef>
         </p:style>
         <p:txBody>
-          <a:bodyPr rtlCol="0" anchor="ctr" wrap="none" lIns="0" rIns="0" tIns="0" bIns="0"/>
+          <a:bodyPr wrap="none" lIns="0" tIns="0" rIns="0" bIns="0" rtlCol="0" anchor="ctr"/>
           <a:lstStyle/>
           <a:p>
             <a:pPr algn="ctr"/>
             <a:r>
-              <a:rPr sz="3400" b="1" i="0">
+              <a:rPr sz="1100" b="1" i="0">
                 <a:solidFill>
                   <a:srgbClr val="241911"/>
                 </a:solidFill>
-                <a:latin typeface="Cambria"/>
-              </a:rPr>
-              <a:t>DH</a:t>
-            </a:r>
-          </a:p>
-        </p:txBody>
-      </p:sp>
-      <p:sp>
-        <p:nvSpPr>
-          <p:cNvPr id="4" name="TextBox 3"/>
+                <a:latin typeface="Calibri"/>
+              </a:rPr>
+              <a:t>09</a:t>
+            </a:r>
+          </a:p>
+        </p:txBody>
+      </p:sp>
+      <p:sp>
+        <p:nvSpPr>
+          <p:cNvPr id="7" name="Rounded Rectangle 6"/>
+          <p:cNvSpPr/>
+          <p:nvPr/>
+        </p:nvSpPr>
+        <p:spPr>
+          <a:xfrm>
+            <a:off x="640080" y="1828800"/>
+            <a:ext cx="10911535" cy="1417320"/>
+          </a:xfrm>
+          <a:prstGeom prst="roundRect">
+            <a:avLst>
+              <a:gd name="adj" fmla="val 4500"/>
+            </a:avLst>
+          </a:prstGeom>
+          <a:solidFill>
+            <a:srgbClr val="1C140F"/>
+          </a:solidFill>
+          <a:ln>
+            <a:noFill/>
+          </a:ln>
+          <a:effectLst/>
+        </p:spPr>
+        <p:style>
+          <a:lnRef idx="1">
+            <a:schemeClr val="accent1"/>
+          </a:lnRef>
+          <a:fillRef idx="3">
+            <a:schemeClr val="accent1"/>
+          </a:fillRef>
+          <a:effectRef idx="2">
+            <a:schemeClr val="accent1"/>
+          </a:effectRef>
+          <a:fontRef idx="minor">
+            <a:schemeClr val="lt1"/>
+          </a:fontRef>
+        </p:style>
+        <p:txBody>
+          <a:bodyPr rtlCol="0" anchor="ctr"/>
+          <a:lstStyle/>
+          <a:p>
+            <a:pPr algn="ctr"/>
+            <a:endParaRPr/>
+          </a:p>
+        </p:txBody>
+      </p:sp>
+      <p:sp>
+        <p:nvSpPr>
+          <p:cNvPr id="8" name="Oval 7"/>
+          <p:cNvSpPr/>
+          <p:nvPr/>
+        </p:nvSpPr>
+        <p:spPr>
+          <a:xfrm>
+            <a:off x="804672" y="1975104"/>
+            <a:ext cx="82296" cy="82296"/>
+          </a:xfrm>
+          <a:prstGeom prst="ellipse">
+            <a:avLst/>
+          </a:prstGeom>
+          <a:solidFill>
+            <a:srgbClr val="E06C5B"/>
+          </a:solidFill>
+          <a:ln>
+            <a:noFill/>
+          </a:ln>
+          <a:effectLst/>
+        </p:spPr>
+        <p:style>
+          <a:lnRef idx="1">
+            <a:schemeClr val="accent1"/>
+          </a:lnRef>
+          <a:fillRef idx="3">
+            <a:schemeClr val="accent1"/>
+          </a:fillRef>
+          <a:effectRef idx="2">
+            <a:schemeClr val="accent1"/>
+          </a:effectRef>
+          <a:fontRef idx="minor">
+            <a:schemeClr val="lt1"/>
+          </a:fontRef>
+        </p:style>
+        <p:txBody>
+          <a:bodyPr rtlCol="0" anchor="ctr"/>
+          <a:lstStyle/>
+          <a:p>
+            <a:pPr algn="ctr"/>
+            <a:endParaRPr/>
+          </a:p>
+        </p:txBody>
+      </p:sp>
+      <p:sp>
+        <p:nvSpPr>
+          <p:cNvPr id="9" name="Oval 8"/>
+          <p:cNvSpPr/>
+          <p:nvPr/>
+        </p:nvSpPr>
+        <p:spPr>
+          <a:xfrm>
+            <a:off x="950976" y="1975104"/>
+            <a:ext cx="82296" cy="82296"/>
+          </a:xfrm>
+          <a:prstGeom prst="ellipse">
+            <a:avLst/>
+          </a:prstGeom>
+          <a:solidFill>
+            <a:srgbClr val="C1592F"/>
+          </a:solidFill>
+          <a:ln>
+            <a:noFill/>
+          </a:ln>
+          <a:effectLst/>
+        </p:spPr>
+        <p:style>
+          <a:lnRef idx="1">
+            <a:schemeClr val="accent1"/>
+          </a:lnRef>
+          <a:fillRef idx="3">
+            <a:schemeClr val="accent1"/>
+          </a:fillRef>
+          <a:effectRef idx="2">
+            <a:schemeClr val="accent1"/>
+          </a:effectRef>
+          <a:fontRef idx="minor">
+            <a:schemeClr val="lt1"/>
+          </a:fontRef>
+        </p:style>
+        <p:txBody>
+          <a:bodyPr rtlCol="0" anchor="ctr"/>
+          <a:lstStyle/>
+          <a:p>
+            <a:pPr algn="ctr"/>
+            <a:endParaRPr/>
+          </a:p>
+        </p:txBody>
+      </p:sp>
+      <p:sp>
+        <p:nvSpPr>
+          <p:cNvPr id="10" name="Oval 9"/>
+          <p:cNvSpPr/>
+          <p:nvPr/>
+        </p:nvSpPr>
+        <p:spPr>
+          <a:xfrm>
+            <a:off x="1097280" y="1975104"/>
+            <a:ext cx="82296" cy="82296"/>
+          </a:xfrm>
+          <a:prstGeom prst="ellipse">
+            <a:avLst/>
+          </a:prstGeom>
+          <a:solidFill>
+            <a:srgbClr val="5BB47A"/>
+          </a:solidFill>
+          <a:ln>
+            <a:noFill/>
+          </a:ln>
+          <a:effectLst/>
+        </p:spPr>
+        <p:style>
+          <a:lnRef idx="1">
+            <a:schemeClr val="accent1"/>
+          </a:lnRef>
+          <a:fillRef idx="3">
+            <a:schemeClr val="accent1"/>
+          </a:fillRef>
+          <a:effectRef idx="2">
+            <a:schemeClr val="accent1"/>
+          </a:effectRef>
+          <a:fontRef idx="minor">
+            <a:schemeClr val="lt1"/>
+          </a:fontRef>
+        </p:style>
+        <p:txBody>
+          <a:bodyPr rtlCol="0" anchor="ctr"/>
+          <a:lstStyle/>
+          <a:p>
+            <a:pPr algn="ctr"/>
+            <a:endParaRPr/>
+          </a:p>
+        </p:txBody>
+      </p:sp>
+      <p:sp>
+        <p:nvSpPr>
+          <p:cNvPr id="11" name="TextBox 10"/>
           <p:cNvSpPr txBox="1"/>
           <p:nvPr/>
         </p:nvSpPr>
         <p:spPr>
           <a:xfrm>
-            <a:off x="640080" y="2514600"/>
-            <a:ext cx="6949440" cy="685800"/>
+            <a:off x="640080" y="1956816"/>
+            <a:ext cx="10637215" cy="201168"/>
           </a:xfrm>
           <a:prstGeom prst="rect">
             <a:avLst/>
@@ -3213,33 +3877,34 @@
           <a:noFill/>
         </p:spPr>
         <p:txBody>
-          <a:bodyPr wrap="square" anchor="t" lIns="0" rIns="0" tIns="0" bIns="0">
+          <a:bodyPr wrap="none" lIns="0" tIns="0" rIns="0" bIns="0" anchor="t">
             <a:spAutoFit/>
           </a:bodyPr>
           <a:lstStyle/>
           <a:p>
-            <a:r>
-              <a:rPr sz="3800" b="1" i="0">
-                <a:solidFill>
-                  <a:srgbClr val="FFFFFF"/>
-                </a:solidFill>
-                <a:latin typeface="Cambria"/>
-              </a:rPr>
-              <a:t>Diego Herrera</a:t>
-            </a:r>
-          </a:p>
-        </p:txBody>
-      </p:sp>
-      <p:sp>
-        <p:nvSpPr>
-          <p:cNvPr id="5" name="TextBox 4"/>
+            <a:pPr algn="r"/>
+            <a:r>
+              <a:rPr sz="1050" b="0" i="1">
+                <a:solidFill>
+                  <a:srgbClr val="CBBBA8"/>
+                </a:solidFill>
+                <a:latin typeface="Calibri"/>
+              </a:rPr>
+              <a:t>0_Diagnostic.ipynb</a:t>
+            </a:r>
+          </a:p>
+        </p:txBody>
+      </p:sp>
+      <p:sp>
+        <p:nvSpPr>
+          <p:cNvPr id="12" name="TextBox 11"/>
           <p:cNvSpPr txBox="1"/>
           <p:nvPr/>
         </p:nvSpPr>
         <p:spPr>
           <a:xfrm>
-            <a:off x="640080" y="3127248"/>
-            <a:ext cx="8778240" cy="457200"/>
+            <a:off x="877824" y="2194560"/>
+            <a:ext cx="10436047" cy="905256"/>
           </a:xfrm>
           <a:prstGeom prst="rect">
             <a:avLst/>
@@ -3247,33 +3912,54 @@
           <a:noFill/>
         </p:spPr>
         <p:txBody>
-          <a:bodyPr wrap="square" anchor="t" lIns="0" rIns="0" tIns="0" bIns="0">
+          <a:bodyPr wrap="square" lIns="0" tIns="0" rIns="0" bIns="0" anchor="t">
             <a:spAutoFit/>
           </a:bodyPr>
           <a:lstStyle/>
           <a:p>
-            <a:r>
-              <a:rPr sz="1500" b="0" i="1">
-                <a:solidFill>
-                  <a:srgbClr val="C1592F"/>
-                </a:solidFill>
-                <a:latin typeface="Calibri"/>
-              </a:rPr>
-              <a:t>Administrador de Empresas · Esp. en Gestión de Proyectos · Magíster en Estadística Aplicada</a:t>
-            </a:r>
-          </a:p>
-        </p:txBody>
-      </p:sp>
-      <p:sp>
-        <p:nvSpPr>
-          <p:cNvPr id="6" name="TextBox 5"/>
+            <a:pPr>
+              <a:spcAft>
+                <a:spcPts val="400"/>
+              </a:spcAft>
+            </a:pPr>
+            <a:r>
+              <a:rPr sz="1450" b="0" i="0">
+                <a:solidFill>
+                  <a:srgbClr val="F3ECE2"/>
+                </a:solidFill>
+                <a:latin typeface="Courier New"/>
+              </a:rPr>
+              <a:t>resultado = suma(2, 3)</a:t>
+            </a:r>
+          </a:p>
+          <a:p>
+            <a:pPr>
+              <a:spcAft>
+                <a:spcPts val="400"/>
+              </a:spcAft>
+            </a:pPr>
+            <a:r>
+              <a:rPr sz="1450" b="0" i="0">
+                <a:solidFill>
+                  <a:srgbClr val="F3ECE2"/>
+                </a:solidFill>
+                <a:latin typeface="Courier New"/>
+              </a:rPr>
+              <a:t>assert resultado == 5, "La función suma no retorna el valor esperado"</a:t>
+            </a:r>
+          </a:p>
+        </p:txBody>
+      </p:sp>
+      <p:sp>
+        <p:nvSpPr>
+          <p:cNvPr id="13" name="TextBox 12"/>
           <p:cNvSpPr txBox="1"/>
           <p:nvPr/>
         </p:nvSpPr>
         <p:spPr>
           <a:xfrm>
-            <a:off x="640080" y="3794760"/>
-            <a:ext cx="10881360" cy="2468880"/>
+            <a:off x="640080" y="3520440"/>
+            <a:ext cx="10911535" cy="2468880"/>
           </a:xfrm>
           <a:prstGeom prst="rect">
             <a:avLst/>
@@ -3281,7 +3967,7 @@
           <a:noFill/>
         </p:spPr>
         <p:txBody>
-          <a:bodyPr wrap="square" anchor="t" lIns="0" rIns="0" tIns="0" bIns="0">
+          <a:bodyPr wrap="square" lIns="0" tIns="0" rIns="0" bIns="0" anchor="t">
             <a:spAutoFit/>
           </a:bodyPr>
           <a:lstStyle/>
@@ -3297,20 +3983,29 @@
             <a:r>
               <a:rPr sz="1450" b="1" i="0">
                 <a:solidFill>
-                  <a:srgbClr val="C1592F"/>
+                  <a:srgbClr val="9C4422"/>
                 </a:solidFill>
                 <a:latin typeface="Calibri"/>
               </a:rPr>
               <a:t>▸  </a:t>
             </a:r>
             <a:r>
+              <a:rPr sz="1450" b="1" i="0">
+                <a:solidFill>
+                  <a:srgbClr val="3D2B1E"/>
+                </a:solidFill>
+                <a:latin typeface="Calibri"/>
+              </a:rPr>
+              <a:t>assert </a:t>
+            </a:r>
+            <a:r>
               <a:rPr sz="1450" b="0" i="0">
                 <a:solidFill>
-                  <a:srgbClr val="CBBBA8"/>
-                </a:solidFill>
-                <a:latin typeface="Calibri"/>
-              </a:rPr>
-              <a:t>Cerca de 12 años de trayectoria en el sector salud colombiano, liderando BI, analítica avanzada y transformación digital.</a:t>
+                  <a:srgbClr val="3D2B1E"/>
+                </a:solidFill>
+                <a:latin typeface="Calibri"/>
+              </a:rPr>
+              <a:t> permite validar resultados de forma automática, sin necesidad de un profesor revisando manualmente cada notebook.</a:t>
             </a:r>
           </a:p>
           <a:p>
@@ -3325,20 +4020,29 @@
             <a:r>
               <a:rPr sz="1450" b="1" i="0">
                 <a:solidFill>
-                  <a:srgbClr val="C1592F"/>
+                  <a:srgbClr val="9C4422"/>
                 </a:solidFill>
                 <a:latin typeface="Calibri"/>
               </a:rPr>
               <a:t>▸  </a:t>
             </a:r>
             <a:r>
+              <a:rPr sz="1450" b="1" i="0">
+                <a:solidFill>
+                  <a:srgbClr val="3D2B1E"/>
+                </a:solidFill>
+                <a:latin typeface="Calibri"/>
+              </a:rPr>
+              <a:t>Si la aserción falla, </a:t>
+            </a:r>
+            <a:r>
               <a:rPr sz="1450" b="0" i="0">
                 <a:solidFill>
-                  <a:srgbClr val="CBBBA8"/>
-                </a:solidFill>
-                <a:latin typeface="Calibri"/>
-              </a:rPr>
-              <a:t>Cargo actual: Coordinador de Seguimiento a la Red — Coosalud EPS. Lidera un equipo de 2 analistas en seguimiento contractual, indicadores de gestión y reporte a entes de control.</a:t>
+                  <a:srgbClr val="3D2B1E"/>
+                </a:solidFill>
+                <a:latin typeface="Calibri"/>
+              </a:rPr>
+              <a:t> el notebook detiene la ejecución — señal inmediata de dónde está el error.</a:t>
             </a:r>
           </a:p>
           <a:p>
@@ -3353,135 +4057,29 @@
             <a:r>
               <a:rPr sz="1450" b="1" i="0">
                 <a:solidFill>
-                  <a:srgbClr val="C1592F"/>
+                  <a:srgbClr val="9C4422"/>
                 </a:solidFill>
                 <a:latin typeface="Calibri"/>
               </a:rPr>
               <a:t>▸  </a:t>
             </a:r>
             <a:r>
+              <a:rPr sz="1450" b="1" i="0">
+                <a:solidFill>
+                  <a:srgbClr val="3D2B1E"/>
+                </a:solidFill>
+                <a:latin typeface="Calibri"/>
+              </a:rPr>
+              <a:t>Se usará el mismo mecanismo </a:t>
+            </a:r>
+            <a:r>
               <a:rPr sz="1450" b="0" i="0">
                 <a:solidFill>
-                  <a:srgbClr val="CBBBA8"/>
-                </a:solidFill>
-                <a:latin typeface="Calibri"/>
-              </a:rPr>
-              <a:t>Experiencia aplicada en ciencia de datos y machine learning para detección de anomalías, y en analítica orientada a decisiones estratégicas en redes de prestación de salud.</a:t>
-            </a:r>
-          </a:p>
-          <a:p>
-            <a:pPr>
-              <a:lnSpc>
-                <a:spcPct val="115000"/>
-              </a:lnSpc>
-              <a:spcAft>
-                <a:spcPts val="1200"/>
-              </a:spcAft>
-            </a:pPr>
-            <a:r>
-              <a:rPr sz="1450" b="1" i="0">
-                <a:solidFill>
-                  <a:srgbClr val="C1592F"/>
-                </a:solidFill>
-                <a:latin typeface="Calibri"/>
-              </a:rPr>
-              <a:t>▸  </a:t>
-            </a:r>
-            <a:r>
-              <a:rPr sz="1450" b="0" i="0">
-                <a:solidFill>
-                  <a:srgbClr val="CBBBA8"/>
-                </a:solidFill>
-                <a:latin typeface="Calibri"/>
-              </a:rPr>
-              <a:t>Docente invitado en la Especialización en Analítica de Datos, con enfoque en llevar la teoría a casos reales y multisectoriales.</a:t>
-            </a:r>
-          </a:p>
-        </p:txBody>
-      </p:sp>
-      <p:sp>
-        <p:nvSpPr>
-          <p:cNvPr id="7" name="TextBox 6"/>
-          <p:cNvSpPr txBox="1"/>
-          <p:nvPr/>
-        </p:nvSpPr>
-        <p:spPr>
-          <a:xfrm>
-            <a:off x="640080" y="6473952"/>
-            <a:ext cx="7772400" cy="274320"/>
-          </a:xfrm>
-          <a:prstGeom prst="rect">
-            <a:avLst/>
-          </a:prstGeom>
-          <a:noFill/>
-        </p:spPr>
-        <p:txBody>
-          <a:bodyPr wrap="square" anchor="t" lIns="0" rIns="0" tIns="0" bIns="0">
-            <a:spAutoFit/>
-          </a:bodyPr>
-          <a:lstStyle/>
-          <a:p>
-            <a:r>
-              <a:rPr sz="1000" b="0" i="1">
-                <a:solidFill>
-                  <a:srgbClr val="CBBBA8"/>
-                </a:solidFill>
-                <a:latin typeface="Calibri"/>
-              </a:rPr>
-              <a:t>Presentación 1 · Fundamentos, Entorno y Diagnóstico</a:t>
-            </a:r>
-          </a:p>
-        </p:txBody>
-      </p:sp>
-      <p:sp>
-        <p:nvSpPr>
-          <p:cNvPr id="8" name="Oval 7"/>
-          <p:cNvSpPr/>
-          <p:nvPr/>
-        </p:nvSpPr>
-        <p:spPr>
-          <a:xfrm>
-            <a:off x="11240719" y="6419088"/>
-            <a:ext cx="310896" cy="310896"/>
-          </a:xfrm>
-          <a:prstGeom prst="ellipse">
-            <a:avLst/>
-          </a:prstGeom>
-          <a:solidFill>
-            <a:srgbClr val="C1592F"/>
-          </a:solidFill>
-          <a:ln>
-            <a:noFill/>
-          </a:ln>
-          <a:effectLst/>
-        </p:spPr>
-        <p:style>
-          <a:lnRef idx="1">
-            <a:schemeClr val="accent1"/>
-          </a:lnRef>
-          <a:fillRef idx="3">
-            <a:schemeClr val="accent1"/>
-          </a:fillRef>
-          <a:effectRef idx="2">
-            <a:schemeClr val="accent1"/>
-          </a:effectRef>
-          <a:fontRef idx="minor">
-            <a:schemeClr val="lt1"/>
-          </a:fontRef>
-        </p:style>
-        <p:txBody>
-          <a:bodyPr rtlCol="0" anchor="ctr" wrap="none" lIns="0" rIns="0" tIns="0" bIns="0"/>
-          <a:lstStyle/>
-          <a:p>
-            <a:pPr algn="ctr"/>
-            <a:r>
-              <a:rPr sz="1100" b="1" i="0">
-                <a:solidFill>
-                  <a:srgbClr val="241911"/>
-                </a:solidFill>
-                <a:latin typeface="Calibri"/>
-              </a:rPr>
-              <a:t>01</a:t>
+                  <a:srgbClr val="3D2B1E"/>
+                </a:solidFill>
+                <a:latin typeface="Calibri"/>
+              </a:rPr>
+              <a:t> en módulos posteriores para validar transformaciones de datos y resultados de modelos.</a:t>
             </a:r>
           </a:p>
         </p:txBody>
@@ -3494,8 +4092,8 @@
 </p:sld>
 </file>
 
-<file path=ppt/slides/slide10.xml><?xml version="1.0" encoding="utf-8"?>
-<p:sld xmlns:a="http://schemas.openxmlformats.org/drawingml/2006/main" xmlns:p="http://schemas.openxmlformats.org/presentationml/2006/main" xmlns:r="http://schemas.openxmlformats.org/officeDocument/2006/relationships">
+<file path=ppt/slides/slide11.xml><?xml version="1.0" encoding="utf-8"?>
+<p:sld xmlns:a="http://schemas.openxmlformats.org/drawingml/2006/main" xmlns:r="http://schemas.openxmlformats.org/officeDocument/2006/relationships" xmlns:p="http://schemas.openxmlformats.org/presentationml/2006/main">
   <p:cSld>
     <p:spTree>
       <p:nvGrpSpPr>
@@ -3503,7 +4101,14 @@
         <p:cNvGrpSpPr/>
         <p:nvPr/>
       </p:nvGrpSpPr>
-      <p:grpSpPr/>
+      <p:grpSpPr>
+        <a:xfrm>
+          <a:off x="0" y="0"/>
+          <a:ext cx="0" cy="0"/>
+          <a:chOff x="0" y="0"/>
+          <a:chExt cx="0" cy="0"/>
+        </a:xfrm>
+      </p:grpSpPr>
       <p:sp>
         <p:nvSpPr>
           <p:cNvPr id="2" name="Rectangle 1"/>
@@ -3545,6 +4150,7 @@
           <a:lstStyle/>
           <a:p>
             <a:pPr algn="ctr"/>
+            <a:endParaRPr/>
           </a:p>
         </p:txBody>
       </p:sp>
@@ -3565,7 +4171,7 @@
           <a:noFill/>
         </p:spPr>
         <p:txBody>
-          <a:bodyPr wrap="square" anchor="t" lIns="0" rIns="0" tIns="0" bIns="0">
+          <a:bodyPr wrap="square" lIns="0" tIns="0" rIns="0" bIns="0" anchor="t">
             <a:spAutoFit/>
           </a:bodyPr>
           <a:lstStyle/>
@@ -3599,7 +4205,7 @@
           <a:noFill/>
         </p:spPr>
         <p:txBody>
-          <a:bodyPr wrap="square" anchor="t" lIns="0" rIns="0" tIns="0" bIns="0">
+          <a:bodyPr wrap="square" lIns="0" tIns="0" rIns="0" bIns="0" anchor="t">
             <a:spAutoFit/>
           </a:bodyPr>
           <a:lstStyle/>
@@ -3633,7 +4239,7 @@
           <a:noFill/>
         </p:spPr>
         <p:txBody>
-          <a:bodyPr wrap="square" anchor="t" lIns="0" rIns="0" tIns="0" bIns="0">
+          <a:bodyPr wrap="square" lIns="0" tIns="0" rIns="0" bIns="0" anchor="t">
             <a:spAutoFit/>
           </a:bodyPr>
           <a:lstStyle/>
@@ -3687,7 +4293,7 @@
           </a:fontRef>
         </p:style>
         <p:txBody>
-          <a:bodyPr rtlCol="0" anchor="ctr" wrap="none" lIns="0" rIns="0" tIns="0" bIns="0"/>
+          <a:bodyPr wrap="none" lIns="0" tIns="0" rIns="0" bIns="0" rtlCol="0" anchor="ctr"/>
           <a:lstStyle/>
           <a:p>
             <a:pPr algn="ctr"/>
@@ -3722,13 +4328,25 @@
                 <a:tableStyleId>{5C22544A-7EE6-4342-B048-85BDC9FD1C3A}</a:tableStyleId>
               </a:tblPr>
               <a:tblGrid>
-                <a:gridCol w="4364614"/>
-                <a:gridCol w="6546921"/>
+                <a:gridCol w="4364614">
+                  <a:extLst>
+                    <a:ext uri="{9D8B030D-6E8A-4147-A177-3AD203B41FA5}">
+                      <a16:colId xmlns:a16="http://schemas.microsoft.com/office/drawing/2014/main" val="20000"/>
+                    </a:ext>
+                  </a:extLst>
+                </a:gridCol>
+                <a:gridCol w="6546921">
+                  <a:extLst>
+                    <a:ext uri="{9D8B030D-6E8A-4147-A177-3AD203B41FA5}">
+                      <a16:colId xmlns:a16="http://schemas.microsoft.com/office/drawing/2014/main" val="20001"/>
+                    </a:ext>
+                  </a:extLst>
+                </a:gridCol>
               </a:tblGrid>
               <a:tr h="548640">
                 <a:tc>
                   <a:txBody>
-                    <a:bodyPr wrap="square"/>
+                    <a:bodyPr/>
                     <a:lstStyle/>
                     <a:p>
                       <a:r>
@@ -3750,7 +4368,7 @@
                 </a:tc>
                 <a:tc>
                   <a:txBody>
-                    <a:bodyPr wrap="square"/>
+                    <a:bodyPr/>
                     <a:lstStyle/>
                     <a:p>
                       <a:r>
@@ -3770,11 +4388,16 @@
                     </a:solidFill>
                   </a:tcPr>
                 </a:tc>
+                <a:extLst>
+                  <a:ext uri="{0D108BD9-81ED-4DB2-BD59-A6C34878D82A}">
+                    <a16:rowId xmlns:a16="http://schemas.microsoft.com/office/drawing/2014/main" val="10000"/>
+                  </a:ext>
+                </a:extLst>
               </a:tr>
               <a:tr h="548640">
                 <a:tc>
                   <a:txBody>
-                    <a:bodyPr wrap="square"/>
+                    <a:bodyPr/>
                     <a:lstStyle/>
                     <a:p>
                       <a:r>
@@ -3796,7 +4419,7 @@
                 </a:tc>
                 <a:tc>
                   <a:txBody>
-                    <a:bodyPr wrap="square"/>
+                    <a:bodyPr/>
                     <a:lstStyle/>
                     <a:p>
                       <a:r>
@@ -3816,11 +4439,16 @@
                     </a:solidFill>
                   </a:tcPr>
                 </a:tc>
+                <a:extLst>
+                  <a:ext uri="{0D108BD9-81ED-4DB2-BD59-A6C34878D82A}">
+                    <a16:rowId xmlns:a16="http://schemas.microsoft.com/office/drawing/2014/main" val="10001"/>
+                  </a:ext>
+                </a:extLst>
               </a:tr>
               <a:tr h="548640">
                 <a:tc>
                   <a:txBody>
-                    <a:bodyPr wrap="square"/>
+                    <a:bodyPr/>
                     <a:lstStyle/>
                     <a:p>
                       <a:r>
@@ -3842,7 +4470,7 @@
                 </a:tc>
                 <a:tc>
                   <a:txBody>
-                    <a:bodyPr wrap="square"/>
+                    <a:bodyPr/>
                     <a:lstStyle/>
                     <a:p>
                       <a:r>
@@ -3862,11 +4490,16 @@
                     </a:solidFill>
                   </a:tcPr>
                 </a:tc>
+                <a:extLst>
+                  <a:ext uri="{0D108BD9-81ED-4DB2-BD59-A6C34878D82A}">
+                    <a16:rowId xmlns:a16="http://schemas.microsoft.com/office/drawing/2014/main" val="10002"/>
+                  </a:ext>
+                </a:extLst>
               </a:tr>
               <a:tr h="548640">
                 <a:tc>
                   <a:txBody>
-                    <a:bodyPr wrap="square"/>
+                    <a:bodyPr/>
                     <a:lstStyle/>
                     <a:p>
                       <a:r>
@@ -3888,7 +4521,7 @@
                 </a:tc>
                 <a:tc>
                   <a:txBody>
-                    <a:bodyPr wrap="square"/>
+                    <a:bodyPr/>
                     <a:lstStyle/>
                     <a:p>
                       <a:r>
@@ -3908,6 +4541,11 @@
                     </a:solidFill>
                   </a:tcPr>
                 </a:tc>
+                <a:extLst>
+                  <a:ext uri="{0D108BD9-81ED-4DB2-BD59-A6C34878D82A}">
+                    <a16:rowId xmlns:a16="http://schemas.microsoft.com/office/drawing/2014/main" val="10003"/>
+                  </a:ext>
+                </a:extLst>
               </a:tr>
             </a:tbl>
           </a:graphicData>
@@ -3930,7 +4568,7 @@
           <a:noFill/>
         </p:spPr>
         <p:txBody>
-          <a:bodyPr wrap="square" anchor="t" lIns="0" rIns="0" tIns="0" bIns="0">
+          <a:bodyPr wrap="square" lIns="0" tIns="0" rIns="0" bIns="0" anchor="t">
             <a:spAutoFit/>
           </a:bodyPr>
           <a:lstStyle/>
@@ -3960,8 +4598,8 @@
 </p:sld>
 </file>
 
-<file path=ppt/slides/slide11.xml><?xml version="1.0" encoding="utf-8"?>
-<p:sld xmlns:a="http://schemas.openxmlformats.org/drawingml/2006/main" xmlns:p="http://schemas.openxmlformats.org/presentationml/2006/main" xmlns:r="http://schemas.openxmlformats.org/officeDocument/2006/relationships">
+<file path=ppt/slides/slide12.xml><?xml version="1.0" encoding="utf-8"?>
+<p:sld xmlns:a="http://schemas.openxmlformats.org/drawingml/2006/main" xmlns:r="http://schemas.openxmlformats.org/officeDocument/2006/relationships" xmlns:p="http://schemas.openxmlformats.org/presentationml/2006/main">
   <p:cSld>
     <p:spTree>
       <p:nvGrpSpPr>
@@ -3969,7 +4607,14 @@
         <p:cNvGrpSpPr/>
         <p:nvPr/>
       </p:nvGrpSpPr>
-      <p:grpSpPr/>
+      <p:grpSpPr>
+        <a:xfrm>
+          <a:off x="0" y="0"/>
+          <a:ext cx="0" cy="0"/>
+          <a:chOff x="0" y="0"/>
+          <a:chExt cx="0" cy="0"/>
+        </a:xfrm>
+      </p:grpSpPr>
       <p:sp>
         <p:nvSpPr>
           <p:cNvPr id="2" name="Rectangle 1"/>
@@ -4011,6 +4656,7 @@
           <a:lstStyle/>
           <a:p>
             <a:pPr algn="ctr"/>
+            <a:endParaRPr/>
           </a:p>
         </p:txBody>
       </p:sp>
@@ -4031,7 +4677,7 @@
           <a:noFill/>
         </p:spPr>
         <p:txBody>
-          <a:bodyPr wrap="square" anchor="t" lIns="0" rIns="0" tIns="0" bIns="0">
+          <a:bodyPr wrap="square" lIns="0" tIns="0" rIns="0" bIns="0" anchor="t">
             <a:spAutoFit/>
           </a:bodyPr>
           <a:lstStyle/>
@@ -4065,7 +4711,7 @@
           <a:noFill/>
         </p:spPr>
         <p:txBody>
-          <a:bodyPr wrap="square" anchor="t" lIns="0" rIns="0" tIns="0" bIns="0">
+          <a:bodyPr wrap="square" lIns="0" tIns="0" rIns="0" bIns="0" anchor="t">
             <a:spAutoFit/>
           </a:bodyPr>
           <a:lstStyle/>
@@ -4099,7 +4745,7 @@
           <a:noFill/>
         </p:spPr>
         <p:txBody>
-          <a:bodyPr wrap="square" anchor="t" lIns="0" rIns="0" tIns="0" bIns="0">
+          <a:bodyPr wrap="square" lIns="0" tIns="0" rIns="0" bIns="0" anchor="t">
             <a:spAutoFit/>
           </a:bodyPr>
           <a:lstStyle/>
@@ -4153,7 +4799,7 @@
           </a:fontRef>
         </p:style>
         <p:txBody>
-          <a:bodyPr rtlCol="0" anchor="ctr" wrap="none" lIns="0" rIns="0" tIns="0" bIns="0"/>
+          <a:bodyPr wrap="none" lIns="0" tIns="0" rIns="0" bIns="0" rtlCol="0" anchor="ctr"/>
           <a:lstStyle/>
           <a:p>
             <a:pPr algn="ctr"/>
@@ -4218,6 +4864,7 @@
           <a:lstStyle/>
           <a:p>
             <a:pPr algn="ctr"/>
+            <a:endParaRPr/>
           </a:p>
         </p:txBody>
       </p:sp>
@@ -4258,7 +4905,7 @@
           </a:fontRef>
         </p:style>
         <p:txBody>
-          <a:bodyPr rtlCol="0" anchor="ctr" wrap="none" lIns="0" rIns="0" tIns="0" bIns="0"/>
+          <a:bodyPr wrap="none" lIns="0" tIns="0" rIns="0" bIns="0" rtlCol="0" anchor="ctr"/>
           <a:lstStyle/>
           <a:p>
             <a:pPr algn="ctr"/>
@@ -4291,7 +4938,7 @@
           <a:noFill/>
         </p:spPr>
         <p:txBody>
-          <a:bodyPr wrap="square" anchor="t" lIns="0" rIns="0" tIns="0" bIns="0">
+          <a:bodyPr wrap="square" lIns="0" tIns="0" rIns="0" bIns="0" anchor="t">
             <a:spAutoFit/>
           </a:bodyPr>
           <a:lstStyle/>
@@ -4378,6 +5025,7 @@
           <a:lstStyle/>
           <a:p>
             <a:pPr algn="ctr"/>
+            <a:endParaRPr/>
           </a:p>
         </p:txBody>
       </p:sp>
@@ -4418,7 +5066,7 @@
           </a:fontRef>
         </p:style>
         <p:txBody>
-          <a:bodyPr rtlCol="0" anchor="ctr" wrap="none" lIns="0" rIns="0" tIns="0" bIns="0"/>
+          <a:bodyPr wrap="none" lIns="0" tIns="0" rIns="0" bIns="0" rtlCol="0" anchor="ctr"/>
           <a:lstStyle/>
           <a:p>
             <a:pPr algn="ctr"/>
@@ -4451,7 +5099,7 @@
           <a:noFill/>
         </p:spPr>
         <p:txBody>
-          <a:bodyPr wrap="square" anchor="t" lIns="0" rIns="0" tIns="0" bIns="0">
+          <a:bodyPr wrap="square" lIns="0" tIns="0" rIns="0" bIns="0" anchor="t">
             <a:spAutoFit/>
           </a:bodyPr>
           <a:lstStyle/>
@@ -4538,6 +5186,7 @@
           <a:lstStyle/>
           <a:p>
             <a:pPr algn="ctr"/>
+            <a:endParaRPr/>
           </a:p>
         </p:txBody>
       </p:sp>
@@ -4578,7 +5227,7 @@
           </a:fontRef>
         </p:style>
         <p:txBody>
-          <a:bodyPr rtlCol="0" anchor="ctr" wrap="none" lIns="0" rIns="0" tIns="0" bIns="0"/>
+          <a:bodyPr wrap="none" lIns="0" tIns="0" rIns="0" bIns="0" rtlCol="0" anchor="ctr"/>
           <a:lstStyle/>
           <a:p>
             <a:pPr algn="ctr"/>
@@ -4611,7 +5260,7 @@
           <a:noFill/>
         </p:spPr>
         <p:txBody>
-          <a:bodyPr wrap="square" anchor="t" lIns="0" rIns="0" tIns="0" bIns="0">
+          <a:bodyPr wrap="square" lIns="0" tIns="0" rIns="0" bIns="0" anchor="t">
             <a:spAutoFit/>
           </a:bodyPr>
           <a:lstStyle/>
@@ -4698,6 +5347,7 @@
           <a:lstStyle/>
           <a:p>
             <a:pPr algn="ctr"/>
+            <a:endParaRPr/>
           </a:p>
         </p:txBody>
       </p:sp>
@@ -4718,7 +5368,7 @@
           <a:noFill/>
         </p:spPr>
         <p:txBody>
-          <a:bodyPr wrap="square" anchor="ctr" lIns="0" rIns="0" tIns="0" bIns="0">
+          <a:bodyPr wrap="square" lIns="0" tIns="0" rIns="0" bIns="0" anchor="ctr">
             <a:spAutoFit/>
           </a:bodyPr>
           <a:lstStyle/>
@@ -4743,8 +5393,8 @@
 </p:sld>
 </file>
 
-<file path=ppt/slides/slide12.xml><?xml version="1.0" encoding="utf-8"?>
-<p:sld xmlns:a="http://schemas.openxmlformats.org/drawingml/2006/main" xmlns:p="http://schemas.openxmlformats.org/presentationml/2006/main" xmlns:r="http://schemas.openxmlformats.org/officeDocument/2006/relationships">
+<file path=ppt/slides/slide13.xml><?xml version="1.0" encoding="utf-8"?>
+<p:sld xmlns:a="http://schemas.openxmlformats.org/drawingml/2006/main" xmlns:r="http://schemas.openxmlformats.org/officeDocument/2006/relationships" xmlns:p="http://schemas.openxmlformats.org/presentationml/2006/main">
   <p:cSld>
     <p:spTree>
       <p:nvGrpSpPr>
@@ -4752,7 +5402,14 @@
         <p:cNvGrpSpPr/>
         <p:nvPr/>
       </p:nvGrpSpPr>
-      <p:grpSpPr/>
+      <p:grpSpPr>
+        <a:xfrm>
+          <a:off x="0" y="0"/>
+          <a:ext cx="0" cy="0"/>
+          <a:chOff x="0" y="0"/>
+          <a:chExt cx="0" cy="0"/>
+        </a:xfrm>
+      </p:grpSpPr>
       <p:sp>
         <p:nvSpPr>
           <p:cNvPr id="2" name="Rectangle 1"/>
@@ -4794,6 +5451,7 @@
           <a:lstStyle/>
           <a:p>
             <a:pPr algn="ctr"/>
+            <a:endParaRPr/>
           </a:p>
         </p:txBody>
       </p:sp>
@@ -4814,7 +5472,7 @@
           <a:noFill/>
         </p:spPr>
         <p:txBody>
-          <a:bodyPr wrap="square" anchor="t" lIns="0" rIns="0" tIns="0" bIns="0">
+          <a:bodyPr wrap="square" lIns="0" tIns="0" rIns="0" bIns="0" anchor="t">
             <a:spAutoFit/>
           </a:bodyPr>
           <a:lstStyle/>
@@ -4848,7 +5506,7 @@
           <a:noFill/>
         </p:spPr>
         <p:txBody>
-          <a:bodyPr wrap="square" anchor="t" lIns="0" rIns="0" tIns="0" bIns="0">
+          <a:bodyPr wrap="square" lIns="0" tIns="0" rIns="0" bIns="0" anchor="t">
             <a:spAutoFit/>
           </a:bodyPr>
           <a:lstStyle/>
@@ -4882,7 +5540,7 @@
           <a:noFill/>
         </p:spPr>
         <p:txBody>
-          <a:bodyPr wrap="square" anchor="t" lIns="0" rIns="0" tIns="0" bIns="0">
+          <a:bodyPr wrap="square" lIns="0" tIns="0" rIns="0" bIns="0" anchor="t">
             <a:spAutoFit/>
           </a:bodyPr>
           <a:lstStyle/>
@@ -4936,7 +5594,7 @@
           </a:fontRef>
         </p:style>
         <p:txBody>
-          <a:bodyPr rtlCol="0" anchor="ctr" wrap="none" lIns="0" rIns="0" tIns="0" bIns="0"/>
+          <a:bodyPr wrap="none" lIns="0" tIns="0" rIns="0" bIns="0" rtlCol="0" anchor="ctr"/>
           <a:lstStyle/>
           <a:p>
             <a:pPr algn="ctr"/>
@@ -4989,7 +5647,7 @@
           </a:fontRef>
         </p:style>
         <p:txBody>
-          <a:bodyPr rtlCol="0" anchor="ctr" wrap="none" lIns="0" rIns="0" tIns="0" bIns="0"/>
+          <a:bodyPr wrap="none" lIns="0" tIns="0" rIns="0" bIns="0" rtlCol="0" anchor="ctr"/>
           <a:lstStyle/>
           <a:p>
             <a:pPr algn="ctr"/>
@@ -5022,7 +5680,7 @@
           <a:noFill/>
         </p:spPr>
         <p:txBody>
-          <a:bodyPr wrap="square" anchor="ctr" lIns="0" rIns="0" tIns="0" bIns="0">
+          <a:bodyPr wrap="square" lIns="0" tIns="0" rIns="0" bIns="0" anchor="ctr">
             <a:spAutoFit/>
           </a:bodyPr>
           <a:lstStyle/>
@@ -5081,7 +5739,7 @@
           </a:fontRef>
         </p:style>
         <p:txBody>
-          <a:bodyPr rtlCol="0" anchor="ctr" wrap="none" lIns="0" rIns="0" tIns="0" bIns="0"/>
+          <a:bodyPr wrap="none" lIns="0" tIns="0" rIns="0" bIns="0" rtlCol="0" anchor="ctr"/>
           <a:lstStyle/>
           <a:p>
             <a:pPr algn="ctr"/>
@@ -5114,7 +5772,7 @@
           <a:noFill/>
         </p:spPr>
         <p:txBody>
-          <a:bodyPr wrap="square" anchor="ctr" lIns="0" rIns="0" tIns="0" bIns="0">
+          <a:bodyPr wrap="square" lIns="0" tIns="0" rIns="0" bIns="0" anchor="ctr">
             <a:spAutoFit/>
           </a:bodyPr>
           <a:lstStyle/>
@@ -5173,7 +5831,7 @@
           </a:fontRef>
         </p:style>
         <p:txBody>
-          <a:bodyPr rtlCol="0" anchor="ctr" wrap="none" lIns="0" rIns="0" tIns="0" bIns="0"/>
+          <a:bodyPr wrap="none" lIns="0" tIns="0" rIns="0" bIns="0" rtlCol="0" anchor="ctr"/>
           <a:lstStyle/>
           <a:p>
             <a:pPr algn="ctr"/>
@@ -5206,7 +5864,7 @@
           <a:noFill/>
         </p:spPr>
         <p:txBody>
-          <a:bodyPr wrap="square" anchor="ctr" lIns="0" rIns="0" tIns="0" bIns="0">
+          <a:bodyPr wrap="square" lIns="0" tIns="0" rIns="0" bIns="0" anchor="ctr">
             <a:spAutoFit/>
           </a:bodyPr>
           <a:lstStyle/>
@@ -5271,6 +5929,7 @@
           <a:lstStyle/>
           <a:p>
             <a:pPr algn="ctr"/>
+            <a:endParaRPr/>
           </a:p>
         </p:txBody>
       </p:sp>
@@ -5291,7 +5950,7 @@
           <a:noFill/>
         </p:spPr>
         <p:txBody>
-          <a:bodyPr wrap="square" anchor="ctr" lIns="0" rIns="0" tIns="0" bIns="0">
+          <a:bodyPr wrap="square" lIns="0" tIns="0" rIns="0" bIns="0" anchor="ctr">
             <a:spAutoFit/>
           </a:bodyPr>
           <a:lstStyle/>
@@ -5326,7 +5985,7 @@
 </file>
 
 <file path=ppt/slides/slide2.xml><?xml version="1.0" encoding="utf-8"?>
-<p:sld xmlns:a="http://schemas.openxmlformats.org/drawingml/2006/main" xmlns:p="http://schemas.openxmlformats.org/presentationml/2006/main" xmlns:r="http://schemas.openxmlformats.org/officeDocument/2006/relationships">
+<p:sld xmlns:a="http://schemas.openxmlformats.org/drawingml/2006/main" xmlns:r="http://schemas.openxmlformats.org/officeDocument/2006/relationships" xmlns:p="http://schemas.openxmlformats.org/presentationml/2006/main">
   <p:cSld>
     <p:spTree>
       <p:nvGrpSpPr>
@@ -5334,7 +5993,771 @@
         <p:cNvGrpSpPr/>
         <p:nvPr/>
       </p:nvGrpSpPr>
-      <p:grpSpPr/>
+      <p:grpSpPr>
+        <a:xfrm>
+          <a:off x="0" y="0"/>
+          <a:ext cx="0" cy="0"/>
+          <a:chOff x="0" y="0"/>
+          <a:chExt cx="0" cy="0"/>
+        </a:xfrm>
+      </p:grpSpPr>
+      <p:sp>
+        <p:nvSpPr>
+          <p:cNvPr id="14" name="Rectangle 1">
+            <a:extLst>
+              <a:ext uri="{FF2B5EF4-FFF2-40B4-BE49-F238E27FC236}">
+                <a16:creationId xmlns:a16="http://schemas.microsoft.com/office/drawing/2014/main" id="{638461ED-8A71-BACF-91B4-3599C2EE4C56}"/>
+              </a:ext>
+            </a:extLst>
+          </p:cNvPr>
+          <p:cNvSpPr/>
+          <p:nvPr/>
+        </p:nvSpPr>
+        <p:spPr>
+          <a:xfrm>
+            <a:off x="0" y="0"/>
+            <a:ext cx="12191695" cy="6858000"/>
+          </a:xfrm>
+          <a:prstGeom prst="rect">
+            <a:avLst/>
+          </a:prstGeom>
+          <a:solidFill>
+            <a:schemeClr val="accent6">
+              <a:lumMod val="40000"/>
+              <a:lumOff val="60000"/>
+            </a:schemeClr>
+          </a:solidFill>
+          <a:ln>
+            <a:noFill/>
+          </a:ln>
+          <a:effectLst/>
+        </p:spPr>
+        <p:style>
+          <a:lnRef idx="1">
+            <a:schemeClr val="accent1"/>
+          </a:lnRef>
+          <a:fillRef idx="3">
+            <a:schemeClr val="accent1"/>
+          </a:fillRef>
+          <a:effectRef idx="2">
+            <a:schemeClr val="accent1"/>
+          </a:effectRef>
+          <a:fontRef idx="minor">
+            <a:schemeClr val="lt1"/>
+          </a:fontRef>
+        </p:style>
+        <p:txBody>
+          <a:bodyPr rtlCol="0" anchor="ctr"/>
+          <a:lstStyle/>
+          <a:p>
+            <a:pPr algn="ctr"/>
+            <a:endParaRPr/>
+          </a:p>
+        </p:txBody>
+      </p:sp>
+      <p:sp>
+        <p:nvSpPr>
+          <p:cNvPr id="2" name="Título 1">
+            <a:extLst>
+              <a:ext uri="{FF2B5EF4-FFF2-40B4-BE49-F238E27FC236}">
+                <a16:creationId xmlns:a16="http://schemas.microsoft.com/office/drawing/2014/main" id="{E98F2C67-FDC2-96E8-AF4B-6E24C77FC987}"/>
+              </a:ext>
+            </a:extLst>
+          </p:cNvPr>
+          <p:cNvSpPr>
+            <a:spLocks noGrp="1"/>
+          </p:cNvSpPr>
+          <p:nvPr>
+            <p:ph type="title"/>
+          </p:nvPr>
+        </p:nvSpPr>
+        <p:spPr>
+          <a:xfrm>
+            <a:off x="3083218" y="609600"/>
+            <a:ext cx="7935303" cy="1356360"/>
+          </a:xfrm>
+        </p:spPr>
+        <p:txBody>
+          <a:bodyPr>
+            <a:normAutofit/>
+          </a:bodyPr>
+          <a:lstStyle/>
+          <a:p>
+            <a:r>
+              <a:rPr lang="es-CO" sz="3600" b="1" dirty="0">
+                <a:solidFill>
+                  <a:srgbClr val="3D2B1E"/>
+                </a:solidFill>
+                <a:latin typeface="Cambria"/>
+                <a:ea typeface="+mn-ea"/>
+                <a:cs typeface="+mn-cs"/>
+              </a:rPr>
+              <a:t>Diego Herrera Malambo </a:t>
+            </a:r>
+          </a:p>
+        </p:txBody>
+      </p:sp>
+      <p:sp>
+        <p:nvSpPr>
+          <p:cNvPr id="3" name="Marcador de contenido 2">
+            <a:extLst>
+              <a:ext uri="{FF2B5EF4-FFF2-40B4-BE49-F238E27FC236}">
+                <a16:creationId xmlns:a16="http://schemas.microsoft.com/office/drawing/2014/main" id="{422AC90F-5146-5F37-FA29-8F02FE4D44E5}"/>
+              </a:ext>
+            </a:extLst>
+          </p:cNvPr>
+          <p:cNvSpPr>
+            <a:spLocks noGrp="1"/>
+          </p:cNvSpPr>
+          <p:nvPr>
+            <p:ph idx="1"/>
+          </p:nvPr>
+        </p:nvSpPr>
+        <p:spPr>
+          <a:xfrm>
+            <a:off x="3553095" y="2242038"/>
+            <a:ext cx="7462778" cy="3853962"/>
+          </a:xfrm>
+        </p:spPr>
+        <p:txBody>
+          <a:bodyPr>
+            <a:normAutofit/>
+          </a:bodyPr>
+          <a:lstStyle/>
+          <a:p>
+            <a:pPr marL="0" indent="0" algn="just">
+              <a:buNone/>
+            </a:pPr>
+            <a:r>
+              <a:rPr lang="es-ES" sz="2100" dirty="0">
+                <a:solidFill>
+                  <a:srgbClr val="3D2B1E"/>
+                </a:solidFill>
+                <a:latin typeface="Calibri"/>
+              </a:rPr>
+              <a:t>Más de 12 años de experiencia en el sector salud liderando iniciativas de Business </a:t>
+            </a:r>
+            <a:r>
+              <a:rPr lang="es-ES" sz="2100" dirty="0" err="1">
+                <a:solidFill>
+                  <a:srgbClr val="3D2B1E"/>
+                </a:solidFill>
+                <a:latin typeface="Calibri"/>
+              </a:rPr>
+              <a:t>Intelligence</a:t>
+            </a:r>
+            <a:r>
+              <a:rPr lang="es-ES" sz="2100" dirty="0">
+                <a:solidFill>
+                  <a:srgbClr val="3D2B1E"/>
+                </a:solidFill>
+                <a:latin typeface="Calibri"/>
+              </a:rPr>
+              <a:t>, Analítica Avanzada y Transformación Digital, transformando datos en información estratégica para la toma de decisiones y la generación de valor organizacional.</a:t>
+            </a:r>
+          </a:p>
+          <a:p>
+            <a:pPr marL="0" indent="0" algn="just">
+              <a:buNone/>
+            </a:pPr>
+            <a:endParaRPr lang="es-ES" sz="2100" dirty="0">
+              <a:solidFill>
+                <a:srgbClr val="3D2B1E"/>
+              </a:solidFill>
+              <a:latin typeface="Calibri"/>
+            </a:endParaRPr>
+          </a:p>
+          <a:p>
+            <a:pPr marL="0" algn="just"/>
+            <a:r>
+              <a:rPr lang="es-ES" sz="1600" dirty="0">
+                <a:solidFill>
+                  <a:srgbClr val="3D2B1E"/>
+                </a:solidFill>
+                <a:latin typeface="Calibri"/>
+              </a:rPr>
+              <a:t>Planeación estratégica y gestión de redes de prestación en salud.</a:t>
+            </a:r>
+          </a:p>
+          <a:p>
+            <a:pPr marL="0" algn="just"/>
+            <a:r>
+              <a:rPr lang="es-ES" sz="1600" dirty="0">
+                <a:solidFill>
+                  <a:srgbClr val="3D2B1E"/>
+                </a:solidFill>
+                <a:latin typeface="Calibri"/>
+              </a:rPr>
+              <a:t>Ciencia de Datos y Machine </a:t>
+            </a:r>
+            <a:r>
+              <a:rPr lang="es-ES" sz="1600" dirty="0" err="1">
+                <a:solidFill>
+                  <a:srgbClr val="3D2B1E"/>
+                </a:solidFill>
+                <a:latin typeface="Calibri"/>
+              </a:rPr>
+              <a:t>Learning</a:t>
+            </a:r>
+            <a:r>
+              <a:rPr lang="es-ES" sz="1600" dirty="0">
+                <a:solidFill>
+                  <a:srgbClr val="3D2B1E"/>
+                </a:solidFill>
+                <a:latin typeface="Calibri"/>
+              </a:rPr>
+              <a:t> aplicado a la detección de anomalías.</a:t>
+            </a:r>
+          </a:p>
+          <a:p>
+            <a:pPr marL="0" algn="just"/>
+            <a:r>
+              <a:rPr lang="es-ES" sz="1600" dirty="0">
+                <a:solidFill>
+                  <a:srgbClr val="3D2B1E"/>
+                </a:solidFill>
+                <a:latin typeface="Calibri"/>
+              </a:rPr>
+              <a:t>Business </a:t>
+            </a:r>
+            <a:r>
+              <a:rPr lang="es-ES" sz="1600" dirty="0" err="1">
+                <a:solidFill>
+                  <a:srgbClr val="3D2B1E"/>
+                </a:solidFill>
+                <a:latin typeface="Calibri"/>
+              </a:rPr>
+              <a:t>Intelligence</a:t>
+            </a:r>
+            <a:r>
+              <a:rPr lang="es-ES" sz="1600" dirty="0">
+                <a:solidFill>
+                  <a:srgbClr val="3D2B1E"/>
+                </a:solidFill>
+                <a:latin typeface="Calibri"/>
+              </a:rPr>
+              <a:t> &amp; </a:t>
+            </a:r>
+            <a:r>
+              <a:rPr lang="es-ES" sz="1600" dirty="0" err="1">
+                <a:solidFill>
+                  <a:srgbClr val="3D2B1E"/>
+                </a:solidFill>
+                <a:latin typeface="Calibri"/>
+              </a:rPr>
+              <a:t>Analytics</a:t>
+            </a:r>
+            <a:r>
+              <a:rPr lang="es-ES" sz="1600" dirty="0">
+                <a:solidFill>
+                  <a:srgbClr val="3D2B1E"/>
+                </a:solidFill>
+                <a:latin typeface="Calibri"/>
+              </a:rPr>
+              <a:t> (</a:t>
+            </a:r>
+            <a:r>
+              <a:rPr lang="es-ES" sz="1600" dirty="0" err="1">
+                <a:solidFill>
+                  <a:srgbClr val="3D2B1E"/>
+                </a:solidFill>
+                <a:latin typeface="Calibri"/>
+              </a:rPr>
+              <a:t>PowerBi</a:t>
+            </a:r>
+            <a:r>
+              <a:rPr lang="es-ES" sz="1600" dirty="0">
+                <a:solidFill>
+                  <a:srgbClr val="3D2B1E"/>
+                </a:solidFill>
+                <a:latin typeface="Calibri"/>
+              </a:rPr>
+              <a:t>, SQL, Data </a:t>
+            </a:r>
+            <a:r>
+              <a:rPr lang="es-ES" sz="1600" dirty="0" err="1">
+                <a:solidFill>
+                  <a:srgbClr val="3D2B1E"/>
+                </a:solidFill>
+                <a:latin typeface="Calibri"/>
+              </a:rPr>
+              <a:t>Warehouse</a:t>
+            </a:r>
+            <a:r>
+              <a:rPr lang="es-ES" sz="1600" dirty="0">
+                <a:solidFill>
+                  <a:srgbClr val="3D2B1E"/>
+                </a:solidFill>
+                <a:latin typeface="Calibri"/>
+              </a:rPr>
+              <a:t> y Data Lake)</a:t>
+            </a:r>
+          </a:p>
+          <a:p>
+            <a:pPr marL="0" algn="just"/>
+            <a:r>
+              <a:rPr lang="es-ES" sz="1600" dirty="0">
+                <a:solidFill>
+                  <a:srgbClr val="3D2B1E"/>
+                </a:solidFill>
+                <a:latin typeface="Calibri"/>
+              </a:rPr>
+              <a:t>Gestión de riesgos y cumplimiento regulatorio.</a:t>
+            </a:r>
+          </a:p>
+          <a:p>
+            <a:pPr marL="45719" indent="0">
+              <a:buNone/>
+            </a:pPr>
+            <a:endParaRPr lang="es-CO" dirty="0"/>
+          </a:p>
+        </p:txBody>
+      </p:sp>
+      <p:sp>
+        <p:nvSpPr>
+          <p:cNvPr id="4" name="Marcador de número de diapositiva 3">
+            <a:extLst>
+              <a:ext uri="{FF2B5EF4-FFF2-40B4-BE49-F238E27FC236}">
+                <a16:creationId xmlns:a16="http://schemas.microsoft.com/office/drawing/2014/main" id="{91062C56-4695-5648-5D89-4B3894112F6F}"/>
+              </a:ext>
+            </a:extLst>
+          </p:cNvPr>
+          <p:cNvSpPr>
+            <a:spLocks noGrp="1"/>
+          </p:cNvSpPr>
+          <p:nvPr>
+            <p:ph type="sldNum" sz="quarter" idx="12"/>
+          </p:nvPr>
+        </p:nvSpPr>
+        <p:spPr/>
+        <p:txBody>
+          <a:bodyPr/>
+          <a:lstStyle/>
+          <a:p>
+            <a:fld id="{00000000-1234-1234-1234-123412341234}" type="slidenum">
+              <a:rPr lang="es-CO" smtClean="0"/>
+              <a:pPr/>
+              <a:t>2</a:t>
+            </a:fld>
+            <a:endParaRPr lang="es-CO"/>
+          </a:p>
+        </p:txBody>
+      </p:sp>
+      <p:sp>
+        <p:nvSpPr>
+          <p:cNvPr id="16" name="Oval 2">
+            <a:extLst>
+              <a:ext uri="{FF2B5EF4-FFF2-40B4-BE49-F238E27FC236}">
+                <a16:creationId xmlns:a16="http://schemas.microsoft.com/office/drawing/2014/main" id="{F220C309-6961-697E-B3DA-2C79B4023429}"/>
+              </a:ext>
+            </a:extLst>
+          </p:cNvPr>
+          <p:cNvSpPr/>
+          <p:nvPr/>
+        </p:nvSpPr>
+        <p:spPr>
+          <a:xfrm>
+            <a:off x="465993" y="800100"/>
+            <a:ext cx="2497016" cy="2449176"/>
+          </a:xfrm>
+          <a:prstGeom prst="ellipse">
+            <a:avLst/>
+          </a:prstGeom>
+          <a:solidFill>
+            <a:srgbClr val="C1592F"/>
+          </a:solidFill>
+          <a:ln>
+            <a:noFill/>
+          </a:ln>
+          <a:effectLst/>
+        </p:spPr>
+        <p:style>
+          <a:lnRef idx="1">
+            <a:schemeClr val="accent1"/>
+          </a:lnRef>
+          <a:fillRef idx="3">
+            <a:schemeClr val="accent1"/>
+          </a:fillRef>
+          <a:effectRef idx="2">
+            <a:schemeClr val="accent1"/>
+          </a:effectRef>
+          <a:fontRef idx="minor">
+            <a:schemeClr val="lt1"/>
+          </a:fontRef>
+        </p:style>
+        <p:txBody>
+          <a:bodyPr wrap="none" lIns="0" tIns="0" rIns="0" bIns="0" rtlCol="0" anchor="ctr"/>
+          <a:lstStyle/>
+          <a:p>
+            <a:pPr algn="ctr"/>
+            <a:r>
+              <a:rPr sz="3400" b="1" i="0">
+                <a:solidFill>
+                  <a:srgbClr val="241911"/>
+                </a:solidFill>
+                <a:latin typeface="Cambria"/>
+              </a:rPr>
+              <a:t>DH</a:t>
+            </a:r>
+          </a:p>
+        </p:txBody>
+      </p:sp>
+      <p:grpSp>
+        <p:nvGrpSpPr>
+          <p:cNvPr id="12" name="Grupo 11">
+            <a:extLst>
+              <a:ext uri="{FF2B5EF4-FFF2-40B4-BE49-F238E27FC236}">
+                <a16:creationId xmlns:a16="http://schemas.microsoft.com/office/drawing/2014/main" id="{DAE564BF-2DB1-3063-3204-A20350D8EBA2}"/>
+              </a:ext>
+            </a:extLst>
+          </p:cNvPr>
+          <p:cNvGrpSpPr/>
+          <p:nvPr/>
+        </p:nvGrpSpPr>
+        <p:grpSpPr>
+          <a:xfrm>
+            <a:off x="600473" y="912628"/>
+            <a:ext cx="2258164" cy="5032745"/>
+            <a:chOff x="264087" y="585940"/>
+            <a:chExt cx="1693623" cy="3774559"/>
+          </a:xfrm>
+        </p:grpSpPr>
+        <p:pic>
+          <p:nvPicPr>
+            <p:cNvPr id="5" name="Imagen 4">
+              <a:extLst>
+                <a:ext uri="{FF2B5EF4-FFF2-40B4-BE49-F238E27FC236}">
+                  <a16:creationId xmlns:a16="http://schemas.microsoft.com/office/drawing/2014/main" id="{FDD125C0-6914-445E-3D1F-D336FF7B0D46}"/>
+                </a:ext>
+              </a:extLst>
+            </p:cNvPr>
+            <p:cNvPicPr>
+              <a:picLocks noChangeAspect="1"/>
+            </p:cNvPicPr>
+            <p:nvPr/>
+          </p:nvPicPr>
+          <p:blipFill>
+            <a:blip r:embed="rId2"/>
+            <a:srcRect l="6197" t="16101" r="42296" b="15548"/>
+            <a:stretch>
+              <a:fillRect/>
+            </a:stretch>
+          </p:blipFill>
+          <p:spPr>
+            <a:xfrm rot="5400000">
+              <a:off x="268088" y="581939"/>
+              <a:ext cx="1685622" cy="1693623"/>
+            </a:xfrm>
+            <a:prstGeom prst="flowChartConnector">
+              <a:avLst/>
+            </a:prstGeom>
+            <a:ln>
+              <a:solidFill>
+                <a:schemeClr val="accent6">
+                  <a:lumMod val="50000"/>
+                </a:schemeClr>
+              </a:solidFill>
+            </a:ln>
+          </p:spPr>
+        </p:pic>
+        <p:grpSp>
+          <p:nvGrpSpPr>
+            <p:cNvPr id="6" name="Grupo 5">
+              <a:extLst>
+                <a:ext uri="{FF2B5EF4-FFF2-40B4-BE49-F238E27FC236}">
+                  <a16:creationId xmlns:a16="http://schemas.microsoft.com/office/drawing/2014/main" id="{00D95496-F26B-E6F9-E4C0-60C436B1D849}"/>
+                </a:ext>
+              </a:extLst>
+            </p:cNvPr>
+            <p:cNvGrpSpPr/>
+            <p:nvPr/>
+          </p:nvGrpSpPr>
+          <p:grpSpPr>
+            <a:xfrm>
+              <a:off x="386999" y="2384665"/>
+              <a:ext cx="1447800" cy="616606"/>
+              <a:chOff x="6781801" y="4066446"/>
+              <a:chExt cx="1842653" cy="784770"/>
+            </a:xfrm>
+          </p:grpSpPr>
+          <p:pic>
+            <p:nvPicPr>
+              <p:cNvPr id="7" name="Imagen 6" descr="Forma&#10;&#10;Descripción generada automáticamente con confianza media">
+                <a:hlinkClick r:id="rId3"/>
+                <a:extLst>
+                  <a:ext uri="{FF2B5EF4-FFF2-40B4-BE49-F238E27FC236}">
+                    <a16:creationId xmlns:a16="http://schemas.microsoft.com/office/drawing/2014/main" id="{4250C34E-B45A-FBCA-76D9-4F831C030B2D}"/>
+                  </a:ext>
+                </a:extLst>
+              </p:cNvPr>
+              <p:cNvPicPr>
+                <a:picLocks noChangeAspect="1"/>
+              </p:cNvPicPr>
+              <p:nvPr/>
+            </p:nvPicPr>
+            <p:blipFill rotWithShape="1">
+              <a:blip r:embed="rId4"/>
+              <a:srcRect l="28157" r="29409" b="31515"/>
+              <a:stretch/>
+            </p:blipFill>
+            <p:spPr>
+              <a:xfrm>
+                <a:off x="8092535" y="4421299"/>
+                <a:ext cx="450692" cy="409142"/>
+              </a:xfrm>
+              <a:prstGeom prst="rect">
+                <a:avLst/>
+              </a:prstGeom>
+            </p:spPr>
+          </p:pic>
+          <p:sp>
+            <p:nvSpPr>
+              <p:cNvPr id="8" name="CuadroTexto 7">
+                <a:extLst>
+                  <a:ext uri="{FF2B5EF4-FFF2-40B4-BE49-F238E27FC236}">
+                    <a16:creationId xmlns:a16="http://schemas.microsoft.com/office/drawing/2014/main" id="{432088CF-128E-9384-95FD-271449F227FF}"/>
+                  </a:ext>
+                </a:extLst>
+              </p:cNvPr>
+              <p:cNvSpPr txBox="1"/>
+              <p:nvPr/>
+            </p:nvSpPr>
+            <p:spPr>
+              <a:xfrm>
+                <a:off x="6781801" y="4066446"/>
+                <a:ext cx="1842653" cy="303641"/>
+              </a:xfrm>
+              <a:prstGeom prst="rect">
+                <a:avLst/>
+              </a:prstGeom>
+              <a:noFill/>
+            </p:spPr>
+            <p:txBody>
+              <a:bodyPr wrap="square" rtlCol="0">
+                <a:spAutoFit/>
+              </a:bodyPr>
+              <a:lstStyle/>
+              <a:p>
+                <a:pPr algn="ctr"/>
+                <a:r>
+                  <a:rPr lang="es-CO" sz="1467" b="1" i="1" dirty="0">
+                    <a:latin typeface="Lora" pitchFamily="2" charset="0"/>
+                  </a:rPr>
+                  <a:t>--- </a:t>
+                </a:r>
+                <a:r>
+                  <a:rPr lang="es-CO" sz="1467" b="1" i="1" dirty="0" err="1">
+                    <a:latin typeface="Lora" pitchFamily="2" charset="0"/>
+                  </a:rPr>
+                  <a:t>dherrerambo</a:t>
+                </a:r>
+                <a:r>
+                  <a:rPr lang="es-CO" sz="1467" b="1" i="1" dirty="0">
+                    <a:latin typeface="Lora" pitchFamily="2" charset="0"/>
+                  </a:rPr>
+                  <a:t> ---</a:t>
+                </a:r>
+              </a:p>
+            </p:txBody>
+          </p:sp>
+          <p:pic>
+            <p:nvPicPr>
+              <p:cNvPr id="9" name="Imagen 8" descr="Forma&#10;&#10;Descripción generada automáticamente con confianza baja">
+                <a:hlinkClick r:id="rId5"/>
+                <a:extLst>
+                  <a:ext uri="{FF2B5EF4-FFF2-40B4-BE49-F238E27FC236}">
+                    <a16:creationId xmlns:a16="http://schemas.microsoft.com/office/drawing/2014/main" id="{94C97CC8-BFCB-6B65-A535-6C033D1700A6}"/>
+                  </a:ext>
+                </a:extLst>
+              </p:cNvPr>
+              <p:cNvPicPr>
+                <a:picLocks noChangeAspect="1"/>
+              </p:cNvPicPr>
+              <p:nvPr/>
+            </p:nvPicPr>
+            <p:blipFill>
+              <a:blip r:embed="rId6"/>
+              <a:stretch>
+                <a:fillRect/>
+              </a:stretch>
+            </p:blipFill>
+            <p:spPr>
+              <a:xfrm>
+                <a:off x="7551050" y="4428936"/>
+                <a:ext cx="393868" cy="393868"/>
+              </a:xfrm>
+              <a:prstGeom prst="rect">
+                <a:avLst/>
+              </a:prstGeom>
+            </p:spPr>
+          </p:pic>
+          <p:pic>
+            <p:nvPicPr>
+              <p:cNvPr id="10" name="Imagen 9" descr="Forma&#10;&#10;Descripción generada automáticamente con confianza baja">
+                <a:hlinkClick r:id="rId7"/>
+                <a:extLst>
+                  <a:ext uri="{FF2B5EF4-FFF2-40B4-BE49-F238E27FC236}">
+                    <a16:creationId xmlns:a16="http://schemas.microsoft.com/office/drawing/2014/main" id="{461ACEF7-8EDD-977A-FF20-53F9193C9482}"/>
+                  </a:ext>
+                </a:extLst>
+              </p:cNvPr>
+              <p:cNvPicPr>
+                <a:picLocks noChangeAspect="1"/>
+              </p:cNvPicPr>
+              <p:nvPr/>
+            </p:nvPicPr>
+            <p:blipFill>
+              <a:blip r:embed="rId8"/>
+              <a:stretch>
+                <a:fillRect/>
+              </a:stretch>
+            </p:blipFill>
+            <p:spPr>
+              <a:xfrm>
+                <a:off x="6952742" y="4400524"/>
+                <a:ext cx="450692" cy="450692"/>
+              </a:xfrm>
+              <a:prstGeom prst="rect">
+                <a:avLst/>
+              </a:prstGeom>
+            </p:spPr>
+          </p:pic>
+        </p:grpSp>
+        <p:pic>
+          <p:nvPicPr>
+            <p:cNvPr id="11" name="Imagen 10">
+              <a:extLst>
+                <a:ext uri="{FF2B5EF4-FFF2-40B4-BE49-F238E27FC236}">
+                  <a16:creationId xmlns:a16="http://schemas.microsoft.com/office/drawing/2014/main" id="{4435C12D-F8A2-1DBC-26ED-E578897648B1}"/>
+                </a:ext>
+              </a:extLst>
+            </p:cNvPr>
+            <p:cNvPicPr>
+              <a:picLocks noChangeAspect="1"/>
+            </p:cNvPicPr>
+            <p:nvPr/>
+          </p:nvPicPr>
+          <p:blipFill>
+            <a:blip r:embed="rId9"/>
+            <a:stretch>
+              <a:fillRect/>
+            </a:stretch>
+          </p:blipFill>
+          <p:spPr>
+            <a:xfrm>
+              <a:off x="521309" y="3114373"/>
+              <a:ext cx="1249667" cy="1246126"/>
+            </a:xfrm>
+            <a:prstGeom prst="rect">
+              <a:avLst/>
+            </a:prstGeom>
+          </p:spPr>
+        </p:pic>
+      </p:grpSp>
+      <p:sp>
+        <p:nvSpPr>
+          <p:cNvPr id="18" name="Oval 5">
+            <a:extLst>
+              <a:ext uri="{FF2B5EF4-FFF2-40B4-BE49-F238E27FC236}">
+                <a16:creationId xmlns:a16="http://schemas.microsoft.com/office/drawing/2014/main" id="{FB081CC8-22B8-4ED8-E959-6BE7DA34FF2B}"/>
+              </a:ext>
+            </a:extLst>
+          </p:cNvPr>
+          <p:cNvSpPr/>
+          <p:nvPr/>
+        </p:nvSpPr>
+        <p:spPr>
+          <a:xfrm>
+            <a:off x="11240719" y="6419088"/>
+            <a:ext cx="310896" cy="310896"/>
+          </a:xfrm>
+          <a:prstGeom prst="ellipse">
+            <a:avLst/>
+          </a:prstGeom>
+          <a:solidFill>
+            <a:srgbClr val="C1592F"/>
+          </a:solidFill>
+          <a:ln>
+            <a:noFill/>
+          </a:ln>
+          <a:effectLst/>
+        </p:spPr>
+        <p:style>
+          <a:lnRef idx="1">
+            <a:schemeClr val="accent1"/>
+          </a:lnRef>
+          <a:fillRef idx="3">
+            <a:schemeClr val="accent1"/>
+          </a:fillRef>
+          <a:effectRef idx="2">
+            <a:schemeClr val="accent1"/>
+          </a:effectRef>
+          <a:fontRef idx="minor">
+            <a:schemeClr val="lt1"/>
+          </a:fontRef>
+        </p:style>
+        <p:txBody>
+          <a:bodyPr wrap="none" lIns="0" tIns="0" rIns="0" bIns="0" rtlCol="0" anchor="ctr"/>
+          <a:lstStyle/>
+          <a:p>
+            <a:pPr algn="ctr"/>
+            <a:r>
+              <a:rPr sz="1100" b="1" i="0" dirty="0">
+                <a:solidFill>
+                  <a:srgbClr val="241911"/>
+                </a:solidFill>
+                <a:latin typeface="Calibri"/>
+              </a:rPr>
+              <a:t>0</a:t>
+            </a:r>
+            <a:r>
+              <a:rPr lang="es-CO" sz="1100" b="1" i="0" dirty="0">
+                <a:solidFill>
+                  <a:srgbClr val="241911"/>
+                </a:solidFill>
+                <a:latin typeface="Calibri"/>
+              </a:rPr>
+              <a:t>1</a:t>
+            </a:r>
+            <a:endParaRPr sz="1100" b="1" i="0" dirty="0">
+              <a:solidFill>
+                <a:srgbClr val="241911"/>
+              </a:solidFill>
+              <a:latin typeface="Calibri"/>
+            </a:endParaRPr>
+          </a:p>
+        </p:txBody>
+      </p:sp>
+    </p:spTree>
+    <p:extLst>
+      <p:ext uri="{BB962C8B-B14F-4D97-AF65-F5344CB8AC3E}">
+        <p14:creationId xmlns:p14="http://schemas.microsoft.com/office/powerpoint/2010/main" val="3378564645"/>
+      </p:ext>
+    </p:extLst>
+  </p:cSld>
+  <p:clrMapOvr>
+    <a:masterClrMapping/>
+  </p:clrMapOvr>
+</p:sld>
+</file>
+
+<file path=ppt/slides/slide3.xml><?xml version="1.0" encoding="utf-8"?>
+<p:sld xmlns:a="http://schemas.openxmlformats.org/drawingml/2006/main" xmlns:r="http://schemas.openxmlformats.org/officeDocument/2006/relationships" xmlns:p="http://schemas.openxmlformats.org/presentationml/2006/main">
+  <p:cSld>
+    <p:spTree>
+      <p:nvGrpSpPr>
+        <p:cNvPr id="1" name=""/>
+        <p:cNvGrpSpPr/>
+        <p:nvPr/>
+      </p:nvGrpSpPr>
+      <p:grpSpPr>
+        <a:xfrm>
+          <a:off x="0" y="0"/>
+          <a:ext cx="0" cy="0"/>
+          <a:chOff x="0" y="0"/>
+          <a:chExt cx="0" cy="0"/>
+        </a:xfrm>
+      </p:grpSpPr>
       <p:sp>
         <p:nvSpPr>
           <p:cNvPr id="2" name="Rectangle 1"/>
@@ -5376,6 +6799,7 @@
           <a:lstStyle/>
           <a:p>
             <a:pPr algn="ctr"/>
+            <a:endParaRPr/>
           </a:p>
         </p:txBody>
       </p:sp>
@@ -5396,7 +6820,7 @@
           <a:noFill/>
         </p:spPr>
         <p:txBody>
-          <a:bodyPr wrap="square" anchor="t" lIns="0" rIns="0" tIns="0" bIns="0">
+          <a:bodyPr wrap="square" lIns="0" tIns="0" rIns="0" bIns="0" anchor="t">
             <a:spAutoFit/>
           </a:bodyPr>
           <a:lstStyle/>
@@ -5430,20 +6854,62 @@
           <a:noFill/>
         </p:spPr>
         <p:txBody>
-          <a:bodyPr wrap="square" anchor="t" lIns="0" rIns="0" tIns="0" bIns="0">
+          <a:bodyPr wrap="square" lIns="0" tIns="0" rIns="0" bIns="0" anchor="t">
             <a:spAutoFit/>
           </a:bodyPr>
           <a:lstStyle/>
           <a:p>
             <a:r>
-              <a:rPr sz="3000" b="1" i="0">
+              <a:rPr sz="3000" b="1" i="0" dirty="0" err="1">
                 <a:solidFill>
                   <a:srgbClr val="3D2B1E"/>
                 </a:solidFill>
                 <a:latin typeface="Cambria"/>
               </a:rPr>
-              <a:t>Fundamentos, Entorno y Diagnóstico</a:t>
-            </a:r>
+              <a:t>Fundamentos</a:t>
+            </a:r>
+            <a:r>
+              <a:rPr sz="3000" b="1" i="0" dirty="0">
+                <a:solidFill>
+                  <a:srgbClr val="3D2B1E"/>
+                </a:solidFill>
+                <a:latin typeface="Cambria"/>
+              </a:rPr>
+              <a:t>, </a:t>
+            </a:r>
+            <a:r>
+              <a:rPr sz="3000" b="1" i="0" dirty="0" err="1">
+                <a:solidFill>
+                  <a:srgbClr val="3D2B1E"/>
+                </a:solidFill>
+                <a:latin typeface="Cambria"/>
+              </a:rPr>
+              <a:t>Entorno</a:t>
+            </a:r>
+            <a:r>
+              <a:rPr sz="3000" b="1" i="0" dirty="0">
+                <a:solidFill>
+                  <a:srgbClr val="3D2B1E"/>
+                </a:solidFill>
+                <a:latin typeface="Cambria"/>
+              </a:rPr>
+              <a:t> y </a:t>
+            </a:r>
+            <a:r>
+              <a:rPr sz="3000" b="1" i="0" dirty="0" err="1">
+                <a:solidFill>
+                  <a:srgbClr val="3D2B1E"/>
+                </a:solidFill>
+                <a:latin typeface="Cambria"/>
+              </a:rPr>
+              <a:t>Diagnóstico</a:t>
+            </a:r>
+            <a:endParaRPr sz="3000" b="1" i="0" dirty="0">
+              <a:solidFill>
+                <a:srgbClr val="3D2B1E"/>
+              </a:solidFill>
+              <a:latin typeface="Cambria"/>
+            </a:endParaRPr>
           </a:p>
         </p:txBody>
       </p:sp>
@@ -5464,7 +6930,7 @@
           <a:noFill/>
         </p:spPr>
         <p:txBody>
-          <a:bodyPr wrap="square" anchor="t" lIns="0" rIns="0" tIns="0" bIns="0">
+          <a:bodyPr wrap="square" lIns="0" tIns="0" rIns="0" bIns="0" anchor="t">
             <a:spAutoFit/>
           </a:bodyPr>
           <a:lstStyle/>
@@ -5518,12 +6984,12 @@
           </a:fontRef>
         </p:style>
         <p:txBody>
-          <a:bodyPr rtlCol="0" anchor="ctr" wrap="none" lIns="0" rIns="0" tIns="0" bIns="0"/>
+          <a:bodyPr wrap="none" lIns="0" tIns="0" rIns="0" bIns="0" rtlCol="0" anchor="ctr"/>
           <a:lstStyle/>
           <a:p>
             <a:pPr algn="ctr"/>
             <a:r>
-              <a:rPr sz="1100" b="1" i="0">
+              <a:rPr sz="1100" b="1" i="0" dirty="0">
                 <a:solidFill>
                   <a:srgbClr val="241911"/>
                 </a:solidFill>
@@ -5583,6 +7049,7 @@
           <a:lstStyle/>
           <a:p>
             <a:pPr algn="ctr"/>
+            <a:endParaRPr/>
           </a:p>
         </p:txBody>
       </p:sp>
@@ -5623,7 +7090,7 @@
           </a:fontRef>
         </p:style>
         <p:txBody>
-          <a:bodyPr rtlCol="0" anchor="ctr" wrap="none" lIns="0" rIns="0" tIns="0" bIns="0"/>
+          <a:bodyPr wrap="none" lIns="0" tIns="0" rIns="0" bIns="0" rtlCol="0" anchor="ctr"/>
           <a:lstStyle/>
           <a:p>
             <a:pPr algn="ctr"/>
@@ -5656,7 +7123,7 @@
           <a:noFill/>
         </p:spPr>
         <p:txBody>
-          <a:bodyPr wrap="square" anchor="t" lIns="0" rIns="0" tIns="0" bIns="0">
+          <a:bodyPr wrap="square" lIns="0" tIns="0" rIns="0" bIns="0" anchor="t">
             <a:spAutoFit/>
           </a:bodyPr>
           <a:lstStyle/>
@@ -5667,14 +7134,38 @@
               </a:spcAft>
             </a:pPr>
             <a:r>
-              <a:rPr sz="1450" b="1" i="0">
+              <a:rPr sz="1450" b="1" i="0" dirty="0" err="1">
                 <a:solidFill>
                   <a:srgbClr val="3D2B1E"/>
                 </a:solidFill>
                 <a:latin typeface="Calibri"/>
               </a:rPr>
-              <a:t>Objetivo del módulo</a:t>
-            </a:r>
+              <a:t>Objetivo</a:t>
+            </a:r>
+            <a:r>
+              <a:rPr sz="1450" b="1" i="0" dirty="0">
+                <a:solidFill>
+                  <a:srgbClr val="3D2B1E"/>
+                </a:solidFill>
+                <a:latin typeface="Calibri"/>
+              </a:rPr>
+              <a:t> del </a:t>
+            </a:r>
+            <a:r>
+              <a:rPr sz="1450" b="1" i="0" dirty="0" err="1">
+                <a:solidFill>
+                  <a:srgbClr val="3D2B1E"/>
+                </a:solidFill>
+                <a:latin typeface="Calibri"/>
+              </a:rPr>
+              <a:t>módulo</a:t>
+            </a:r>
+            <a:endParaRPr sz="1450" b="1" i="0" dirty="0">
+              <a:solidFill>
+                <a:srgbClr val="3D2B1E"/>
+              </a:solidFill>
+              <a:latin typeface="Calibri"/>
+            </a:endParaRPr>
           </a:p>
           <a:p>
             <a:pPr>
@@ -5683,13 +7174,256 @@
               </a:lnSpc>
             </a:pPr>
             <a:r>
-              <a:rPr sz="1250" b="0" i="0">
+              <a:rPr sz="1250" b="0" i="0" dirty="0" err="1">
                 <a:solidFill>
                   <a:srgbClr val="6B5F4E"/>
                 </a:solidFill>
                 <a:latin typeface="Calibri"/>
               </a:rPr>
-              <a:t>Establecer las reglas de trabajo, verificar el entorno técnico en Python y ubicar el punto de partida de cada estudiante mediante un diagnóstico inicial.</a:t>
+              <a:t>Establecer</a:t>
+            </a:r>
+            <a:r>
+              <a:rPr sz="1250" b="0" i="0" dirty="0">
+                <a:solidFill>
+                  <a:srgbClr val="6B5F4E"/>
+                </a:solidFill>
+                <a:latin typeface="Calibri"/>
+              </a:rPr>
+              <a:t> las </a:t>
+            </a:r>
+            <a:r>
+              <a:rPr sz="1250" b="0" i="0" dirty="0" err="1">
+                <a:solidFill>
+                  <a:srgbClr val="6B5F4E"/>
+                </a:solidFill>
+                <a:latin typeface="Calibri"/>
+              </a:rPr>
+              <a:t>reglas</a:t>
+            </a:r>
+            <a:r>
+              <a:rPr sz="1250" b="0" i="0" dirty="0">
+                <a:solidFill>
+                  <a:srgbClr val="6B5F4E"/>
+                </a:solidFill>
+                <a:latin typeface="Calibri"/>
+              </a:rPr>
+              <a:t> de </a:t>
+            </a:r>
+            <a:r>
+              <a:rPr sz="1250" b="0" i="0" dirty="0" err="1">
+                <a:solidFill>
+                  <a:srgbClr val="6B5F4E"/>
+                </a:solidFill>
+                <a:latin typeface="Calibri"/>
+              </a:rPr>
+              <a:t>trabajo</a:t>
+            </a:r>
+            <a:r>
+              <a:rPr sz="1250" b="0" i="0" dirty="0">
+                <a:solidFill>
+                  <a:srgbClr val="6B5F4E"/>
+                </a:solidFill>
+                <a:latin typeface="Calibri"/>
+              </a:rPr>
+              <a:t>, </a:t>
+            </a:r>
+            <a:r>
+              <a:rPr sz="1250" b="0" i="0" dirty="0" err="1">
+                <a:solidFill>
+                  <a:srgbClr val="6B5F4E"/>
+                </a:solidFill>
+                <a:latin typeface="Calibri"/>
+              </a:rPr>
+              <a:t>verificar</a:t>
+            </a:r>
+            <a:r>
+              <a:rPr sz="1250" b="0" i="0" dirty="0">
+                <a:solidFill>
+                  <a:srgbClr val="6B5F4E"/>
+                </a:solidFill>
+                <a:latin typeface="Calibri"/>
+              </a:rPr>
+              <a:t> el </a:t>
+            </a:r>
+            <a:r>
+              <a:rPr sz="1250" b="0" i="0" dirty="0" err="1">
+                <a:solidFill>
+                  <a:srgbClr val="6B5F4E"/>
+                </a:solidFill>
+                <a:latin typeface="Calibri"/>
+              </a:rPr>
+              <a:t>entorno</a:t>
+            </a:r>
+            <a:r>
+              <a:rPr sz="1250" b="0" i="0" dirty="0">
+                <a:solidFill>
+                  <a:srgbClr val="6B5F4E"/>
+                </a:solidFill>
+                <a:latin typeface="Calibri"/>
+              </a:rPr>
+              <a:t> </a:t>
+            </a:r>
+            <a:r>
+              <a:rPr sz="1250" b="0" i="0" dirty="0" err="1">
+                <a:solidFill>
+                  <a:srgbClr val="6B5F4E"/>
+                </a:solidFill>
+                <a:latin typeface="Calibri"/>
+              </a:rPr>
+              <a:t>técnico</a:t>
+            </a:r>
+            <a:r>
+              <a:rPr sz="1250" b="0" i="0" dirty="0">
+                <a:solidFill>
+                  <a:srgbClr val="6B5F4E"/>
+                </a:solidFill>
+                <a:latin typeface="Calibri"/>
+              </a:rPr>
+              <a:t> </a:t>
+            </a:r>
+            <a:r>
+              <a:rPr sz="1250" b="0" i="0" dirty="0" err="1">
+                <a:solidFill>
+                  <a:srgbClr val="6B5F4E"/>
+                </a:solidFill>
+                <a:latin typeface="Calibri"/>
+              </a:rPr>
+              <a:t>en</a:t>
+            </a:r>
+            <a:r>
+              <a:rPr sz="1250" b="0" i="0" dirty="0">
+                <a:solidFill>
+                  <a:srgbClr val="6B5F4E"/>
+                </a:solidFill>
+                <a:latin typeface="Calibri"/>
+              </a:rPr>
+              <a:t> Python y </a:t>
+            </a:r>
+            <a:r>
+              <a:rPr sz="1250" b="0" i="0" dirty="0" err="1">
+                <a:solidFill>
+                  <a:srgbClr val="6B5F4E"/>
+                </a:solidFill>
+                <a:latin typeface="Calibri"/>
+              </a:rPr>
+              <a:t>ubicar</a:t>
+            </a:r>
+            <a:r>
+              <a:rPr sz="1250" b="0" i="0" dirty="0">
+                <a:solidFill>
+                  <a:srgbClr val="6B5F4E"/>
+                </a:solidFill>
+                <a:latin typeface="Calibri"/>
+              </a:rPr>
+              <a:t> el punto de </a:t>
+            </a:r>
+            <a:r>
+              <a:rPr sz="1250" b="0" i="0" dirty="0" err="1">
+                <a:solidFill>
+                  <a:srgbClr val="6B5F4E"/>
+                </a:solidFill>
+                <a:latin typeface="Calibri"/>
+              </a:rPr>
+              <a:t>partida</a:t>
+            </a:r>
+            <a:r>
+              <a:rPr sz="1250" b="0" i="0" dirty="0">
+                <a:solidFill>
+                  <a:srgbClr val="6B5F4E"/>
+                </a:solidFill>
+                <a:latin typeface="Calibri"/>
+              </a:rPr>
+              <a:t> de </a:t>
+            </a:r>
+            <a:r>
+              <a:rPr sz="1250" b="0" i="0" dirty="0" err="1">
+                <a:solidFill>
+                  <a:srgbClr val="6B5F4E"/>
+                </a:solidFill>
+                <a:latin typeface="Calibri"/>
+              </a:rPr>
+              <a:t>cada</a:t>
+            </a:r>
+            <a:r>
+              <a:rPr sz="1250" b="0" i="0" dirty="0">
+                <a:solidFill>
+                  <a:srgbClr val="6B5F4E"/>
+                </a:solidFill>
+                <a:latin typeface="Calibri"/>
+              </a:rPr>
+              <a:t> </a:t>
+            </a:r>
+            <a:r>
+              <a:rPr sz="1250" b="0" i="0" dirty="0" err="1">
+                <a:solidFill>
+                  <a:srgbClr val="6B5F4E"/>
+                </a:solidFill>
+                <a:latin typeface="Calibri"/>
+              </a:rPr>
+              <a:t>estudiante</a:t>
+            </a:r>
+            <a:r>
+              <a:rPr sz="1250" b="0" i="0" dirty="0">
+                <a:solidFill>
+                  <a:srgbClr val="6B5F4E"/>
+                </a:solidFill>
+                <a:latin typeface="Calibri"/>
+              </a:rPr>
+              <a:t> </a:t>
+            </a:r>
+            <a:r>
+              <a:rPr sz="1250" b="0" i="0" dirty="0" err="1">
+                <a:solidFill>
+                  <a:srgbClr val="6B5F4E"/>
+                </a:solidFill>
+                <a:latin typeface="Calibri"/>
+              </a:rPr>
+              <a:t>mediante</a:t>
+            </a:r>
+            <a:r>
+              <a:rPr sz="1250" b="0" i="0" dirty="0">
+                <a:solidFill>
+                  <a:srgbClr val="6B5F4E"/>
+                </a:solidFill>
+                <a:latin typeface="Calibri"/>
+              </a:rPr>
+              <a:t> un </a:t>
+            </a:r>
+            <a:r>
+              <a:rPr sz="1250" b="0" i="0" dirty="0" err="1">
+                <a:solidFill>
+                  <a:srgbClr val="6B5F4E"/>
+                </a:solidFill>
+                <a:latin typeface="Calibri"/>
+              </a:rPr>
+              <a:t>diagnóstico</a:t>
+            </a:r>
+            <a:r>
+              <a:rPr sz="1250" b="0" i="0" dirty="0">
+                <a:solidFill>
+                  <a:srgbClr val="6B5F4E"/>
+                </a:solidFill>
+                <a:latin typeface="Calibri"/>
+              </a:rPr>
+              <a:t> </a:t>
+            </a:r>
+            <a:r>
+              <a:rPr sz="1250" b="0" i="0" dirty="0" err="1">
+                <a:solidFill>
+                  <a:srgbClr val="6B5F4E"/>
+                </a:solidFill>
+                <a:latin typeface="Calibri"/>
+              </a:rPr>
+              <a:t>inicial</a:t>
+            </a:r>
+            <a:r>
+              <a:rPr sz="1250" b="0" i="0" dirty="0">
+                <a:solidFill>
+                  <a:srgbClr val="6B5F4E"/>
+                </a:solidFill>
+                <a:latin typeface="Calibri"/>
+              </a:rPr>
+              <a:t>.</a:t>
             </a:r>
           </a:p>
         </p:txBody>
@@ -5743,6 +7477,7 @@
           <a:lstStyle/>
           <a:p>
             <a:pPr algn="ctr"/>
+            <a:endParaRPr/>
           </a:p>
         </p:txBody>
       </p:sp>
@@ -5783,7 +7518,7 @@
           </a:fontRef>
         </p:style>
         <p:txBody>
-          <a:bodyPr rtlCol="0" anchor="ctr" wrap="none" lIns="0" rIns="0" tIns="0" bIns="0"/>
+          <a:bodyPr wrap="none" lIns="0" tIns="0" rIns="0" bIns="0" rtlCol="0" anchor="ctr"/>
           <a:lstStyle/>
           <a:p>
             <a:pPr algn="ctr"/>
@@ -5816,7 +7551,7 @@
           <a:noFill/>
         </p:spPr>
         <p:txBody>
-          <a:bodyPr wrap="square" anchor="t" lIns="0" rIns="0" tIns="0" bIns="0">
+          <a:bodyPr wrap="square" lIns="0" tIns="0" rIns="0" bIns="0" anchor="t">
             <a:spAutoFit/>
           </a:bodyPr>
           <a:lstStyle/>
@@ -5903,6 +7638,7 @@
           <a:lstStyle/>
           <a:p>
             <a:pPr algn="ctr"/>
+            <a:endParaRPr/>
           </a:p>
         </p:txBody>
       </p:sp>
@@ -5943,7 +7679,7 @@
           </a:fontRef>
         </p:style>
         <p:txBody>
-          <a:bodyPr rtlCol="0" anchor="ctr" wrap="none" lIns="0" rIns="0" tIns="0" bIns="0"/>
+          <a:bodyPr wrap="none" lIns="0" tIns="0" rIns="0" bIns="0" rtlCol="0" anchor="ctr"/>
           <a:lstStyle/>
           <a:p>
             <a:pPr algn="ctr"/>
@@ -5976,7 +7712,7 @@
           <a:noFill/>
         </p:spPr>
         <p:txBody>
-          <a:bodyPr wrap="square" anchor="t" lIns="0" rIns="0" tIns="0" bIns="0">
+          <a:bodyPr wrap="square" lIns="0" tIns="0" rIns="0" bIns="0" anchor="t">
             <a:spAutoFit/>
           </a:bodyPr>
           <a:lstStyle/>
@@ -6063,6 +7799,7 @@
           <a:lstStyle/>
           <a:p>
             <a:pPr algn="ctr"/>
+            <a:endParaRPr/>
           </a:p>
         </p:txBody>
       </p:sp>
@@ -6103,7 +7840,7 @@
           </a:fontRef>
         </p:style>
         <p:txBody>
-          <a:bodyPr rtlCol="0" anchor="ctr" wrap="none" lIns="0" rIns="0" tIns="0" bIns="0"/>
+          <a:bodyPr wrap="none" lIns="0" tIns="0" rIns="0" bIns="0" rtlCol="0" anchor="ctr"/>
           <a:lstStyle/>
           <a:p>
             <a:pPr algn="ctr"/>
@@ -6136,7 +7873,7 @@
           <a:noFill/>
         </p:spPr>
         <p:txBody>
-          <a:bodyPr wrap="square" anchor="t" lIns="0" rIns="0" tIns="0" bIns="0">
+          <a:bodyPr wrap="square" lIns="0" tIns="0" rIns="0" bIns="0" anchor="t">
             <a:spAutoFit/>
           </a:bodyPr>
           <a:lstStyle/>
@@ -6182,8 +7919,8 @@
 </p:sld>
 </file>
 
-<file path=ppt/slides/slide3.xml><?xml version="1.0" encoding="utf-8"?>
-<p:sld xmlns:a="http://schemas.openxmlformats.org/drawingml/2006/main" xmlns:p="http://schemas.openxmlformats.org/presentationml/2006/main" xmlns:r="http://schemas.openxmlformats.org/officeDocument/2006/relationships">
+<file path=ppt/slides/slide4.xml><?xml version="1.0" encoding="utf-8"?>
+<p:sld xmlns:a="http://schemas.openxmlformats.org/drawingml/2006/main" xmlns:r="http://schemas.openxmlformats.org/officeDocument/2006/relationships" xmlns:p="http://schemas.openxmlformats.org/presentationml/2006/main">
   <p:cSld>
     <p:spTree>
       <p:nvGrpSpPr>
@@ -6191,7 +7928,14 @@
         <p:cNvGrpSpPr/>
         <p:nvPr/>
       </p:nvGrpSpPr>
-      <p:grpSpPr/>
+      <p:grpSpPr>
+        <a:xfrm>
+          <a:off x="0" y="0"/>
+          <a:ext cx="0" cy="0"/>
+          <a:chOff x="0" y="0"/>
+          <a:chExt cx="0" cy="0"/>
+        </a:xfrm>
+      </p:grpSpPr>
       <p:sp>
         <p:nvSpPr>
           <p:cNvPr id="2" name="Rectangle 1"/>
@@ -6233,6 +7977,7 @@
           <a:lstStyle/>
           <a:p>
             <a:pPr algn="ctr"/>
+            <a:endParaRPr/>
           </a:p>
         </p:txBody>
       </p:sp>
@@ -6253,7 +7998,7 @@
           <a:noFill/>
         </p:spPr>
         <p:txBody>
-          <a:bodyPr wrap="square" anchor="t" lIns="0" rIns="0" tIns="0" bIns="0">
+          <a:bodyPr wrap="square" lIns="0" tIns="0" rIns="0" bIns="0" anchor="t">
             <a:spAutoFit/>
           </a:bodyPr>
           <a:lstStyle/>
@@ -6287,7 +8032,7 @@
           <a:noFill/>
         </p:spPr>
         <p:txBody>
-          <a:bodyPr wrap="square" anchor="t" lIns="0" rIns="0" tIns="0" bIns="0">
+          <a:bodyPr wrap="square" lIns="0" tIns="0" rIns="0" bIns="0" anchor="t">
             <a:spAutoFit/>
           </a:bodyPr>
           <a:lstStyle/>
@@ -6321,7 +8066,7 @@
           <a:noFill/>
         </p:spPr>
         <p:txBody>
-          <a:bodyPr wrap="square" anchor="t" lIns="0" rIns="0" tIns="0" bIns="0">
+          <a:bodyPr wrap="square" lIns="0" tIns="0" rIns="0" bIns="0" anchor="t">
             <a:spAutoFit/>
           </a:bodyPr>
           <a:lstStyle/>
@@ -6375,7 +8120,7 @@
           </a:fontRef>
         </p:style>
         <p:txBody>
-          <a:bodyPr rtlCol="0" anchor="ctr" wrap="none" lIns="0" rIns="0" tIns="0" bIns="0"/>
+          <a:bodyPr wrap="none" lIns="0" tIns="0" rIns="0" bIns="0" rtlCol="0" anchor="ctr"/>
           <a:lstStyle/>
           <a:p>
             <a:pPr algn="ctr"/>
@@ -6410,13 +8155,25 @@
                 <a:tableStyleId>{5C22544A-7EE6-4342-B048-85BDC9FD1C3A}</a:tableStyleId>
               </a:tblPr>
               <a:tblGrid>
-                <a:gridCol w="3273460"/>
-                <a:gridCol w="7638074"/>
+                <a:gridCol w="3273460">
+                  <a:extLst>
+                    <a:ext uri="{9D8B030D-6E8A-4147-A177-3AD203B41FA5}">
+                      <a16:colId xmlns:a16="http://schemas.microsoft.com/office/drawing/2014/main" val="20000"/>
+                    </a:ext>
+                  </a:extLst>
+                </a:gridCol>
+                <a:gridCol w="7638074">
+                  <a:extLst>
+                    <a:ext uri="{9D8B030D-6E8A-4147-A177-3AD203B41FA5}">
+                      <a16:colId xmlns:a16="http://schemas.microsoft.com/office/drawing/2014/main" val="20001"/>
+                    </a:ext>
+                  </a:extLst>
+                </a:gridCol>
               </a:tblGrid>
               <a:tr h="475488">
                 <a:tc>
                   <a:txBody>
-                    <a:bodyPr wrap="square"/>
+                    <a:bodyPr/>
                     <a:lstStyle/>
                     <a:p>
                       <a:r>
@@ -6438,7 +8195,7 @@
                 </a:tc>
                 <a:tc>
                   <a:txBody>
-                    <a:bodyPr wrap="square"/>
+                    <a:bodyPr/>
                     <a:lstStyle/>
                     <a:p>
                       <a:r>
@@ -6458,11 +8215,16 @@
                     </a:solidFill>
                   </a:tcPr>
                 </a:tc>
+                <a:extLst>
+                  <a:ext uri="{0D108BD9-81ED-4DB2-BD59-A6C34878D82A}">
+                    <a16:rowId xmlns:a16="http://schemas.microsoft.com/office/drawing/2014/main" val="10000"/>
+                  </a:ext>
+                </a:extLst>
               </a:tr>
               <a:tr h="475488">
                 <a:tc>
                   <a:txBody>
-                    <a:bodyPr wrap="square"/>
+                    <a:bodyPr/>
                     <a:lstStyle/>
                     <a:p>
                       <a:r>
@@ -6484,7 +8246,7 @@
                 </a:tc>
                 <a:tc>
                   <a:txBody>
-                    <a:bodyPr wrap="square"/>
+                    <a:bodyPr/>
                     <a:lstStyle/>
                     <a:p>
                       <a:r>
@@ -6504,11 +8266,16 @@
                     </a:solidFill>
                   </a:tcPr>
                 </a:tc>
+                <a:extLst>
+                  <a:ext uri="{0D108BD9-81ED-4DB2-BD59-A6C34878D82A}">
+                    <a16:rowId xmlns:a16="http://schemas.microsoft.com/office/drawing/2014/main" val="10001"/>
+                  </a:ext>
+                </a:extLst>
               </a:tr>
               <a:tr h="475488">
                 <a:tc>
                   <a:txBody>
-                    <a:bodyPr wrap="square"/>
+                    <a:bodyPr/>
                     <a:lstStyle/>
                     <a:p>
                       <a:r>
@@ -6530,7 +8297,7 @@
                 </a:tc>
                 <a:tc>
                   <a:txBody>
-                    <a:bodyPr wrap="square"/>
+                    <a:bodyPr/>
                     <a:lstStyle/>
                     <a:p>
                       <a:r>
@@ -6550,11 +8317,16 @@
                     </a:solidFill>
                   </a:tcPr>
                 </a:tc>
+                <a:extLst>
+                  <a:ext uri="{0D108BD9-81ED-4DB2-BD59-A6C34878D82A}">
+                    <a16:rowId xmlns:a16="http://schemas.microsoft.com/office/drawing/2014/main" val="10002"/>
+                  </a:ext>
+                </a:extLst>
               </a:tr>
               <a:tr h="475488">
                 <a:tc>
                   <a:txBody>
-                    <a:bodyPr wrap="square"/>
+                    <a:bodyPr/>
                     <a:lstStyle/>
                     <a:p>
                       <a:r>
@@ -6576,7 +8348,7 @@
                 </a:tc>
                 <a:tc>
                   <a:txBody>
-                    <a:bodyPr wrap="square"/>
+                    <a:bodyPr/>
                     <a:lstStyle/>
                     <a:p>
                       <a:r>
@@ -6596,11 +8368,16 @@
                     </a:solidFill>
                   </a:tcPr>
                 </a:tc>
+                <a:extLst>
+                  <a:ext uri="{0D108BD9-81ED-4DB2-BD59-A6C34878D82A}">
+                    <a16:rowId xmlns:a16="http://schemas.microsoft.com/office/drawing/2014/main" val="10003"/>
+                  </a:ext>
+                </a:extLst>
               </a:tr>
               <a:tr h="475488">
                 <a:tc>
                   <a:txBody>
-                    <a:bodyPr wrap="square"/>
+                    <a:bodyPr/>
                     <a:lstStyle/>
                     <a:p>
                       <a:r>
@@ -6622,7 +8399,7 @@
                 </a:tc>
                 <a:tc>
                   <a:txBody>
-                    <a:bodyPr wrap="square"/>
+                    <a:bodyPr/>
                     <a:lstStyle/>
                     <a:p>
                       <a:r>
@@ -6642,6 +8419,11 @@
                     </a:solidFill>
                   </a:tcPr>
                 </a:tc>
+                <a:extLst>
+                  <a:ext uri="{0D108BD9-81ED-4DB2-BD59-A6C34878D82A}">
+                    <a16:rowId xmlns:a16="http://schemas.microsoft.com/office/drawing/2014/main" val="10004"/>
+                  </a:ext>
+                </a:extLst>
               </a:tr>
             </a:tbl>
           </a:graphicData>
@@ -6664,7 +8446,7 @@
           <a:noFill/>
         </p:spPr>
         <p:txBody>
-          <a:bodyPr wrap="square" anchor="t" lIns="0" rIns="0" tIns="0" bIns="0">
+          <a:bodyPr wrap="square" lIns="0" tIns="0" rIns="0" bIns="0" anchor="t">
             <a:spAutoFit/>
           </a:bodyPr>
           <a:lstStyle/>
@@ -6682,656 +8464,6 @@
                 <a:latin typeface="Calibri"/>
               </a:rPr>
               <a:t>El seminario evalúa la capacidad de producir un flujo de trabajo reproducible — no de recitar teoría — porque eso es lo que un equipo espera al recibir un proyecto analítico.</a:t>
-            </a:r>
-          </a:p>
-        </p:txBody>
-      </p:sp>
-    </p:spTree>
-  </p:cSld>
-  <p:clrMapOvr>
-    <a:masterClrMapping/>
-  </p:clrMapOvr>
-</p:sld>
-</file>
-
-<file path=ppt/slides/slide4.xml><?xml version="1.0" encoding="utf-8"?>
-<p:sld xmlns:a="http://schemas.openxmlformats.org/drawingml/2006/main" xmlns:p="http://schemas.openxmlformats.org/presentationml/2006/main" xmlns:r="http://schemas.openxmlformats.org/officeDocument/2006/relationships">
-  <p:cSld>
-    <p:spTree>
-      <p:nvGrpSpPr>
-        <p:cNvPr id="1" name=""/>
-        <p:cNvGrpSpPr/>
-        <p:nvPr/>
-      </p:nvGrpSpPr>
-      <p:grpSpPr/>
-      <p:sp>
-        <p:nvSpPr>
-          <p:cNvPr id="2" name="Rectangle 1"/>
-          <p:cNvSpPr/>
-          <p:nvPr/>
-        </p:nvSpPr>
-        <p:spPr>
-          <a:xfrm>
-            <a:off x="0" y="0"/>
-            <a:ext cx="12191695" cy="6858000"/>
-          </a:xfrm>
-          <a:prstGeom prst="rect">
-            <a:avLst/>
-          </a:prstGeom>
-          <a:solidFill>
-            <a:srgbClr val="F5EFE4"/>
-          </a:solidFill>
-          <a:ln>
-            <a:noFill/>
-          </a:ln>
-          <a:effectLst/>
-        </p:spPr>
-        <p:style>
-          <a:lnRef idx="1">
-            <a:schemeClr val="accent1"/>
-          </a:lnRef>
-          <a:fillRef idx="3">
-            <a:schemeClr val="accent1"/>
-          </a:fillRef>
-          <a:effectRef idx="2">
-            <a:schemeClr val="accent1"/>
-          </a:effectRef>
-          <a:fontRef idx="minor">
-            <a:schemeClr val="lt1"/>
-          </a:fontRef>
-        </p:style>
-        <p:txBody>
-          <a:bodyPr rtlCol="0" anchor="ctr"/>
-          <a:lstStyle/>
-          <a:p>
-            <a:pPr algn="ctr"/>
-          </a:p>
-        </p:txBody>
-      </p:sp>
-      <p:sp>
-        <p:nvSpPr>
-          <p:cNvPr id="3" name="TextBox 2"/>
-          <p:cNvSpPr txBox="1"/>
-          <p:nvPr/>
-        </p:nvSpPr>
-        <p:spPr>
-          <a:xfrm>
-            <a:off x="640080" y="502920"/>
-            <a:ext cx="10911535" cy="292608"/>
-          </a:xfrm>
-          <a:prstGeom prst="rect">
-            <a:avLst/>
-          </a:prstGeom>
-          <a:noFill/>
-        </p:spPr>
-        <p:txBody>
-          <a:bodyPr wrap="square" anchor="t" lIns="0" rIns="0" tIns="0" bIns="0">
-            <a:spAutoFit/>
-          </a:bodyPr>
-          <a:lstStyle/>
-          <a:p>
-            <a:r>
-              <a:rPr sz="1250" b="1" i="0" spc="160">
-                <a:solidFill>
-                  <a:srgbClr val="9C4422"/>
-                </a:solidFill>
-                <a:latin typeface="Calibri"/>
-              </a:rPr>
-              <a:t>¿POR QUÉ USAMOS ENTORNOS VIRTUALES (.VENV)?</a:t>
-            </a:r>
-          </a:p>
-        </p:txBody>
-      </p:sp>
-      <p:sp>
-        <p:nvSpPr>
-          <p:cNvPr id="4" name="TextBox 3"/>
-          <p:cNvSpPr txBox="1"/>
-          <p:nvPr/>
-        </p:nvSpPr>
-        <p:spPr>
-          <a:xfrm>
-            <a:off x="640080" y="786384"/>
-            <a:ext cx="10911535" cy="822960"/>
-          </a:xfrm>
-          <a:prstGeom prst="rect">
-            <a:avLst/>
-          </a:prstGeom>
-          <a:noFill/>
-        </p:spPr>
-        <p:txBody>
-          <a:bodyPr wrap="square" anchor="t" lIns="0" rIns="0" tIns="0" bIns="0">
-            <a:spAutoFit/>
-          </a:bodyPr>
-          <a:lstStyle/>
-          <a:p>
-            <a:r>
-              <a:rPr sz="3000" b="1" i="0">
-                <a:solidFill>
-                  <a:srgbClr val="3D2B1E"/>
-                </a:solidFill>
-                <a:latin typeface="Cambria"/>
-              </a:rPr>
-              <a:t>Aislamiento de entornos</a:t>
-            </a:r>
-          </a:p>
-        </p:txBody>
-      </p:sp>
-      <p:sp>
-        <p:nvSpPr>
-          <p:cNvPr id="5" name="TextBox 4"/>
-          <p:cNvSpPr txBox="1"/>
-          <p:nvPr/>
-        </p:nvSpPr>
-        <p:spPr>
-          <a:xfrm>
-            <a:off x="640080" y="6473952"/>
-            <a:ext cx="7772400" cy="274320"/>
-          </a:xfrm>
-          <a:prstGeom prst="rect">
-            <a:avLst/>
-          </a:prstGeom>
-          <a:noFill/>
-        </p:spPr>
-        <p:txBody>
-          <a:bodyPr wrap="square" anchor="t" lIns="0" rIns="0" tIns="0" bIns="0">
-            <a:spAutoFit/>
-          </a:bodyPr>
-          <a:lstStyle/>
-          <a:p>
-            <a:r>
-              <a:rPr sz="1000" b="0" i="1">
-                <a:solidFill>
-                  <a:srgbClr val="6B5F4E"/>
-                </a:solidFill>
-                <a:latin typeface="Calibri"/>
-              </a:rPr>
-              <a:t>Presentación 1 · Fundamentos, Entorno y Diagnóstico</a:t>
-            </a:r>
-          </a:p>
-        </p:txBody>
-      </p:sp>
-      <p:sp>
-        <p:nvSpPr>
-          <p:cNvPr id="6" name="Oval 5"/>
-          <p:cNvSpPr/>
-          <p:nvPr/>
-        </p:nvSpPr>
-        <p:spPr>
-          <a:xfrm>
-            <a:off x="11240719" y="6419088"/>
-            <a:ext cx="310896" cy="310896"/>
-          </a:xfrm>
-          <a:prstGeom prst="ellipse">
-            <a:avLst/>
-          </a:prstGeom>
-          <a:solidFill>
-            <a:srgbClr val="C1592F"/>
-          </a:solidFill>
-          <a:ln>
-            <a:noFill/>
-          </a:ln>
-          <a:effectLst/>
-        </p:spPr>
-        <p:style>
-          <a:lnRef idx="1">
-            <a:schemeClr val="accent1"/>
-          </a:lnRef>
-          <a:fillRef idx="3">
-            <a:schemeClr val="accent1"/>
-          </a:fillRef>
-          <a:effectRef idx="2">
-            <a:schemeClr val="accent1"/>
-          </a:effectRef>
-          <a:fontRef idx="minor">
-            <a:schemeClr val="lt1"/>
-          </a:fontRef>
-        </p:style>
-        <p:txBody>
-          <a:bodyPr rtlCol="0" anchor="ctr" wrap="none" lIns="0" rIns="0" tIns="0" bIns="0"/>
-          <a:lstStyle/>
-          <a:p>
-            <a:pPr algn="ctr"/>
-            <a:r>
-              <a:rPr sz="1100" b="1" i="0">
-                <a:solidFill>
-                  <a:srgbClr val="241911"/>
-                </a:solidFill>
-                <a:latin typeface="Calibri"/>
-              </a:rPr>
-              <a:t>04</a:t>
-            </a:r>
-          </a:p>
-        </p:txBody>
-      </p:sp>
-      <p:sp>
-        <p:nvSpPr>
-          <p:cNvPr id="7" name="TextBox 6"/>
-          <p:cNvSpPr txBox="1"/>
-          <p:nvPr/>
-        </p:nvSpPr>
-        <p:spPr>
-          <a:xfrm>
-            <a:off x="640080" y="1783080"/>
-            <a:ext cx="10911535" cy="1737360"/>
-          </a:xfrm>
-          <a:prstGeom prst="rect">
-            <a:avLst/>
-          </a:prstGeom>
-          <a:noFill/>
-        </p:spPr>
-        <p:txBody>
-          <a:bodyPr wrap="square" anchor="t" lIns="0" rIns="0" tIns="0" bIns="0">
-            <a:spAutoFit/>
-          </a:bodyPr>
-          <a:lstStyle/>
-          <a:p>
-            <a:pPr>
-              <a:lnSpc>
-                <a:spcPct val="115000"/>
-              </a:lnSpc>
-              <a:spcAft>
-                <a:spcPts val="1200"/>
-              </a:spcAft>
-            </a:pPr>
-            <a:r>
-              <a:rPr sz="1500" b="1" i="0">
-                <a:solidFill>
-                  <a:srgbClr val="9C4422"/>
-                </a:solidFill>
-                <a:latin typeface="Calibri"/>
-              </a:rPr>
-              <a:t>▸  </a:t>
-            </a:r>
-            <a:r>
-              <a:rPr sz="1500" b="1" i="0">
-                <a:solidFill>
-                  <a:srgbClr val="3D2B1E"/>
-                </a:solidFill>
-                <a:latin typeface="Calibri"/>
-              </a:rPr>
-              <a:t>Sin aislamiento, </a:t>
-            </a:r>
-            <a:r>
-              <a:rPr sz="1500" b="0" i="0">
-                <a:solidFill>
-                  <a:srgbClr val="3D2B1E"/>
-                </a:solidFill>
-                <a:latin typeface="Calibri"/>
-              </a:rPr>
-              <a:t> cada proyecto comparte las mismas versiones de librerías del sistema — un cambio en un proyecto puede romper otro.</a:t>
-            </a:r>
-          </a:p>
-          <a:p>
-            <a:pPr>
-              <a:lnSpc>
-                <a:spcPct val="115000"/>
-              </a:lnSpc>
-              <a:spcAft>
-                <a:spcPts val="1200"/>
-              </a:spcAft>
-            </a:pPr>
-            <a:r>
-              <a:rPr sz="1500" b="1" i="0">
-                <a:solidFill>
-                  <a:srgbClr val="9C4422"/>
-                </a:solidFill>
-                <a:latin typeface="Calibri"/>
-              </a:rPr>
-              <a:t>▸  </a:t>
-            </a:r>
-            <a:r>
-              <a:rPr sz="1500" b="1" i="0">
-                <a:solidFill>
-                  <a:srgbClr val="3D2B1E"/>
-                </a:solidFill>
-                <a:latin typeface="Calibri"/>
-              </a:rPr>
-              <a:t>.venv evita conflictos </a:t>
-            </a:r>
-            <a:r>
-              <a:rPr sz="1500" b="0" i="0">
-                <a:solidFill>
-                  <a:srgbClr val="3D2B1E"/>
-                </a:solidFill>
-                <a:latin typeface="Calibri"/>
-              </a:rPr>
-              <a:t> de dependencias entre el seminario y otros entornos ya instalados en el equipo del estudiante.</a:t>
-            </a:r>
-          </a:p>
-        </p:txBody>
-      </p:sp>
-      <p:sp>
-        <p:nvSpPr>
-          <p:cNvPr id="8" name="Rounded Rectangle 7"/>
-          <p:cNvSpPr/>
-          <p:nvPr/>
-        </p:nvSpPr>
-        <p:spPr>
-          <a:xfrm>
-            <a:off x="640080" y="3703320"/>
-            <a:ext cx="10911535" cy="2148840"/>
-          </a:xfrm>
-          <a:prstGeom prst="roundRect">
-            <a:avLst>
-              <a:gd name="adj" fmla="val 4500"/>
-            </a:avLst>
-          </a:prstGeom>
-          <a:solidFill>
-            <a:srgbClr val="1C140F"/>
-          </a:solidFill>
-          <a:ln>
-            <a:noFill/>
-          </a:ln>
-          <a:effectLst/>
-        </p:spPr>
-        <p:style>
-          <a:lnRef idx="1">
-            <a:schemeClr val="accent1"/>
-          </a:lnRef>
-          <a:fillRef idx="3">
-            <a:schemeClr val="accent1"/>
-          </a:fillRef>
-          <a:effectRef idx="2">
-            <a:schemeClr val="accent1"/>
-          </a:effectRef>
-          <a:fontRef idx="minor">
-            <a:schemeClr val="lt1"/>
-          </a:fontRef>
-        </p:style>
-        <p:txBody>
-          <a:bodyPr rtlCol="0" anchor="ctr"/>
-          <a:lstStyle/>
-          <a:p>
-            <a:pPr algn="ctr"/>
-          </a:p>
-        </p:txBody>
-      </p:sp>
-      <p:sp>
-        <p:nvSpPr>
-          <p:cNvPr id="9" name="Oval 8"/>
-          <p:cNvSpPr/>
-          <p:nvPr/>
-        </p:nvSpPr>
-        <p:spPr>
-          <a:xfrm>
-            <a:off x="804672" y="3849624"/>
-            <a:ext cx="82296" cy="82296"/>
-          </a:xfrm>
-          <a:prstGeom prst="ellipse">
-            <a:avLst/>
-          </a:prstGeom>
-          <a:solidFill>
-            <a:srgbClr val="E06C5B"/>
-          </a:solidFill>
-          <a:ln>
-            <a:noFill/>
-          </a:ln>
-          <a:effectLst/>
-        </p:spPr>
-        <p:style>
-          <a:lnRef idx="1">
-            <a:schemeClr val="accent1"/>
-          </a:lnRef>
-          <a:fillRef idx="3">
-            <a:schemeClr val="accent1"/>
-          </a:fillRef>
-          <a:effectRef idx="2">
-            <a:schemeClr val="accent1"/>
-          </a:effectRef>
-          <a:fontRef idx="minor">
-            <a:schemeClr val="lt1"/>
-          </a:fontRef>
-        </p:style>
-        <p:txBody>
-          <a:bodyPr rtlCol="0" anchor="ctr"/>
-          <a:lstStyle/>
-          <a:p>
-            <a:pPr algn="ctr"/>
-          </a:p>
-        </p:txBody>
-      </p:sp>
-      <p:sp>
-        <p:nvSpPr>
-          <p:cNvPr id="10" name="Oval 9"/>
-          <p:cNvSpPr/>
-          <p:nvPr/>
-        </p:nvSpPr>
-        <p:spPr>
-          <a:xfrm>
-            <a:off x="950976" y="3849624"/>
-            <a:ext cx="82296" cy="82296"/>
-          </a:xfrm>
-          <a:prstGeom prst="ellipse">
-            <a:avLst/>
-          </a:prstGeom>
-          <a:solidFill>
-            <a:srgbClr val="C1592F"/>
-          </a:solidFill>
-          <a:ln>
-            <a:noFill/>
-          </a:ln>
-          <a:effectLst/>
-        </p:spPr>
-        <p:style>
-          <a:lnRef idx="1">
-            <a:schemeClr val="accent1"/>
-          </a:lnRef>
-          <a:fillRef idx="3">
-            <a:schemeClr val="accent1"/>
-          </a:fillRef>
-          <a:effectRef idx="2">
-            <a:schemeClr val="accent1"/>
-          </a:effectRef>
-          <a:fontRef idx="minor">
-            <a:schemeClr val="lt1"/>
-          </a:fontRef>
-        </p:style>
-        <p:txBody>
-          <a:bodyPr rtlCol="0" anchor="ctr"/>
-          <a:lstStyle/>
-          <a:p>
-            <a:pPr algn="ctr"/>
-          </a:p>
-        </p:txBody>
-      </p:sp>
-      <p:sp>
-        <p:nvSpPr>
-          <p:cNvPr id="11" name="Oval 10"/>
-          <p:cNvSpPr/>
-          <p:nvPr/>
-        </p:nvSpPr>
-        <p:spPr>
-          <a:xfrm>
-            <a:off x="1097280" y="3849624"/>
-            <a:ext cx="82296" cy="82296"/>
-          </a:xfrm>
-          <a:prstGeom prst="ellipse">
-            <a:avLst/>
-          </a:prstGeom>
-          <a:solidFill>
-            <a:srgbClr val="5BB47A"/>
-          </a:solidFill>
-          <a:ln>
-            <a:noFill/>
-          </a:ln>
-          <a:effectLst/>
-        </p:spPr>
-        <p:style>
-          <a:lnRef idx="1">
-            <a:schemeClr val="accent1"/>
-          </a:lnRef>
-          <a:fillRef idx="3">
-            <a:schemeClr val="accent1"/>
-          </a:fillRef>
-          <a:effectRef idx="2">
-            <a:schemeClr val="accent1"/>
-          </a:effectRef>
-          <a:fontRef idx="minor">
-            <a:schemeClr val="lt1"/>
-          </a:fontRef>
-        </p:style>
-        <p:txBody>
-          <a:bodyPr rtlCol="0" anchor="ctr"/>
-          <a:lstStyle/>
-          <a:p>
-            <a:pPr algn="ctr"/>
-          </a:p>
-        </p:txBody>
-      </p:sp>
-      <p:sp>
-        <p:nvSpPr>
-          <p:cNvPr id="12" name="TextBox 11"/>
-          <p:cNvSpPr txBox="1"/>
-          <p:nvPr/>
-        </p:nvSpPr>
-        <p:spPr>
-          <a:xfrm>
-            <a:off x="640080" y="3831336"/>
-            <a:ext cx="10637215" cy="201168"/>
-          </a:xfrm>
-          <a:prstGeom prst="rect">
-            <a:avLst/>
-          </a:prstGeom>
-          <a:noFill/>
-        </p:spPr>
-        <p:txBody>
-          <a:bodyPr wrap="none" anchor="t" lIns="0" rIns="0" tIns="0" bIns="0">
-            <a:spAutoFit/>
-          </a:bodyPr>
-          <a:lstStyle/>
-          <a:p>
-            <a:pPr algn="r"/>
-            <a:r>
-              <a:rPr sz="1050" b="0" i="1">
-                <a:solidFill>
-                  <a:srgbClr val="CBBBA8"/>
-                </a:solidFill>
-                <a:latin typeface="Calibri"/>
-              </a:rPr>
-              <a:t>terminal</a:t>
-            </a:r>
-          </a:p>
-        </p:txBody>
-      </p:sp>
-      <p:sp>
-        <p:nvSpPr>
-          <p:cNvPr id="13" name="TextBox 12"/>
-          <p:cNvSpPr txBox="1"/>
-          <p:nvPr/>
-        </p:nvSpPr>
-        <p:spPr>
-          <a:xfrm>
-            <a:off x="877824" y="4069080"/>
-            <a:ext cx="10436047" cy="1636776"/>
-          </a:xfrm>
-          <a:prstGeom prst="rect">
-            <a:avLst/>
-          </a:prstGeom>
-          <a:noFill/>
-        </p:spPr>
-        <p:txBody>
-          <a:bodyPr wrap="square" anchor="t" lIns="0" rIns="0" tIns="0" bIns="0">
-            <a:spAutoFit/>
-          </a:bodyPr>
-          <a:lstStyle/>
-          <a:p>
-            <a:pPr>
-              <a:spcAft>
-                <a:spcPts val="400"/>
-              </a:spcAft>
-            </a:pPr>
-            <a:r>
-              <a:rPr sz="1350" b="1" i="0">
-                <a:solidFill>
-                  <a:srgbClr val="C1592F"/>
-                </a:solidFill>
-                <a:latin typeface="Courier New"/>
-              </a:rPr>
-              <a:t>$ </a:t>
-            </a:r>
-            <a:r>
-              <a:rPr sz="1350" b="0" i="0">
-                <a:solidFill>
-                  <a:srgbClr val="F3ECE2"/>
-                </a:solidFill>
-                <a:latin typeface="Courier New"/>
-              </a:rPr>
-              <a:t> python -m venv .venv</a:t>
-            </a:r>
-          </a:p>
-          <a:p>
-            <a:pPr>
-              <a:spcAft>
-                <a:spcPts val="400"/>
-              </a:spcAft>
-            </a:pPr>
-            <a:r>
-              <a:rPr sz="1350" b="1" i="0">
-                <a:solidFill>
-                  <a:srgbClr val="C1592F"/>
-                </a:solidFill>
-                <a:latin typeface="Courier New"/>
-              </a:rPr>
-              <a:t>$ </a:t>
-            </a:r>
-            <a:r>
-              <a:rPr sz="1350" b="0" i="0">
-                <a:solidFill>
-                  <a:srgbClr val="F3ECE2"/>
-                </a:solidFill>
-                <a:latin typeface="Courier New"/>
-              </a:rPr>
-              <a:t> source .venv/bin/activate      # Linux/Mac</a:t>
-            </a:r>
-          </a:p>
-          <a:p>
-            <a:pPr>
-              <a:spcAft>
-                <a:spcPts val="400"/>
-              </a:spcAft>
-            </a:pPr>
-            <a:r>
-              <a:rPr sz="1350" b="1" i="0">
-                <a:solidFill>
-                  <a:srgbClr val="C1592F"/>
-                </a:solidFill>
-                <a:latin typeface="Courier New"/>
-              </a:rPr>
-              <a:t>$ </a:t>
-            </a:r>
-            <a:r>
-              <a:rPr sz="1350" b="0" i="0">
-                <a:solidFill>
-                  <a:srgbClr val="F3ECE2"/>
-                </a:solidFill>
-                <a:latin typeface="Courier New"/>
-              </a:rPr>
-              <a:t> .venv\Scripts\activate         # Windows</a:t>
-            </a:r>
-          </a:p>
-          <a:p>
-            <a:pPr>
-              <a:spcAft>
-                <a:spcPts val="400"/>
-              </a:spcAft>
-            </a:pPr>
-            <a:r>
-              <a:rPr sz="1350" b="1" i="0">
-                <a:solidFill>
-                  <a:srgbClr val="C1592F"/>
-                </a:solidFill>
-                <a:latin typeface="Courier New"/>
-              </a:rPr>
-              <a:t>$ </a:t>
-            </a:r>
-            <a:r>
-              <a:rPr sz="1350" b="0" i="0">
-                <a:solidFill>
-                  <a:srgbClr val="F3ECE2"/>
-                </a:solidFill>
-                <a:latin typeface="Courier New"/>
-              </a:rPr>
-              <a:t> pip install -r requirements.txt</a:t>
             </a:r>
           </a:p>
         </p:txBody>
@@ -7345,7 +8477,7 @@
 </file>
 
 <file path=ppt/slides/slide5.xml><?xml version="1.0" encoding="utf-8"?>
-<p:sld xmlns:a="http://schemas.openxmlformats.org/drawingml/2006/main" xmlns:p="http://schemas.openxmlformats.org/presentationml/2006/main" xmlns:r="http://schemas.openxmlformats.org/officeDocument/2006/relationships">
+<p:sld xmlns:a="http://schemas.openxmlformats.org/drawingml/2006/main" xmlns:r="http://schemas.openxmlformats.org/officeDocument/2006/relationships" xmlns:p="http://schemas.openxmlformats.org/presentationml/2006/main">
   <p:cSld>
     <p:spTree>
       <p:nvGrpSpPr>
@@ -7353,7 +8485,14 @@
         <p:cNvGrpSpPr/>
         <p:nvPr/>
       </p:nvGrpSpPr>
-      <p:grpSpPr/>
+      <p:grpSpPr>
+        <a:xfrm>
+          <a:off x="0" y="0"/>
+          <a:ext cx="0" cy="0"/>
+          <a:chOff x="0" y="0"/>
+          <a:chExt cx="0" cy="0"/>
+        </a:xfrm>
+      </p:grpSpPr>
       <p:sp>
         <p:nvSpPr>
           <p:cNvPr id="2" name="Rectangle 1"/>
@@ -7395,6 +8534,7 @@
           <a:lstStyle/>
           <a:p>
             <a:pPr algn="ctr"/>
+            <a:endParaRPr/>
           </a:p>
         </p:txBody>
       </p:sp>
@@ -7415,7 +8555,7 @@
           <a:noFill/>
         </p:spPr>
         <p:txBody>
-          <a:bodyPr wrap="square" anchor="t" lIns="0" rIns="0" tIns="0" bIns="0">
+          <a:bodyPr wrap="square" lIns="0" tIns="0" rIns="0" bIns="0" anchor="t">
             <a:spAutoFit/>
           </a:bodyPr>
           <a:lstStyle/>
@@ -7427,7 +8567,7 @@
                 </a:solidFill>
                 <a:latin typeface="Calibri"/>
               </a:rPr>
-              <a:t>LIBRERÍAS CORE Y SU ROL</a:t>
+              <a:t>¿POR QUÉ USAMOS ENTORNOS VIRTUALES (.VENV)?</a:t>
             </a:r>
           </a:p>
         </p:txBody>
@@ -7449,7 +8589,7 @@
           <a:noFill/>
         </p:spPr>
         <p:txBody>
-          <a:bodyPr wrap="square" anchor="t" lIns="0" rIns="0" tIns="0" bIns="0">
+          <a:bodyPr wrap="square" lIns="0" tIns="0" rIns="0" bIns="0" anchor="t">
             <a:spAutoFit/>
           </a:bodyPr>
           <a:lstStyle/>
@@ -7461,7 +8601,7 @@
                 </a:solidFill>
                 <a:latin typeface="Cambria"/>
               </a:rPr>
-              <a:t>Stack tecnológico del curso</a:t>
+              <a:t>Aislamiento de entornos</a:t>
             </a:r>
           </a:p>
         </p:txBody>
@@ -7483,7 +8623,7 @@
           <a:noFill/>
         </p:spPr>
         <p:txBody>
-          <a:bodyPr wrap="square" anchor="t" lIns="0" rIns="0" tIns="0" bIns="0">
+          <a:bodyPr wrap="square" lIns="0" tIns="0" rIns="0" bIns="0" anchor="t">
             <a:spAutoFit/>
           </a:bodyPr>
           <a:lstStyle/>
@@ -7537,7 +8677,669 @@
           </a:fontRef>
         </p:style>
         <p:txBody>
-          <a:bodyPr rtlCol="0" anchor="ctr" wrap="none" lIns="0" rIns="0" tIns="0" bIns="0"/>
+          <a:bodyPr wrap="none" lIns="0" tIns="0" rIns="0" bIns="0" rtlCol="0" anchor="ctr"/>
+          <a:lstStyle/>
+          <a:p>
+            <a:pPr algn="ctr"/>
+            <a:r>
+              <a:rPr sz="1100" b="1" i="0">
+                <a:solidFill>
+                  <a:srgbClr val="241911"/>
+                </a:solidFill>
+                <a:latin typeface="Calibri"/>
+              </a:rPr>
+              <a:t>04</a:t>
+            </a:r>
+          </a:p>
+        </p:txBody>
+      </p:sp>
+      <p:sp>
+        <p:nvSpPr>
+          <p:cNvPr id="7" name="TextBox 6"/>
+          <p:cNvSpPr txBox="1"/>
+          <p:nvPr/>
+        </p:nvSpPr>
+        <p:spPr>
+          <a:xfrm>
+            <a:off x="640080" y="1783080"/>
+            <a:ext cx="10911535" cy="1737360"/>
+          </a:xfrm>
+          <a:prstGeom prst="rect">
+            <a:avLst/>
+          </a:prstGeom>
+          <a:noFill/>
+        </p:spPr>
+        <p:txBody>
+          <a:bodyPr wrap="square" lIns="0" tIns="0" rIns="0" bIns="0" anchor="t">
+            <a:spAutoFit/>
+          </a:bodyPr>
+          <a:lstStyle/>
+          <a:p>
+            <a:pPr>
+              <a:lnSpc>
+                <a:spcPct val="115000"/>
+              </a:lnSpc>
+              <a:spcAft>
+                <a:spcPts val="1200"/>
+              </a:spcAft>
+            </a:pPr>
+            <a:r>
+              <a:rPr sz="1500" b="1" i="0">
+                <a:solidFill>
+                  <a:srgbClr val="9C4422"/>
+                </a:solidFill>
+                <a:latin typeface="Calibri"/>
+              </a:rPr>
+              <a:t>▸  </a:t>
+            </a:r>
+            <a:r>
+              <a:rPr sz="1500" b="1" i="0">
+                <a:solidFill>
+                  <a:srgbClr val="3D2B1E"/>
+                </a:solidFill>
+                <a:latin typeface="Calibri"/>
+              </a:rPr>
+              <a:t>Sin aislamiento, </a:t>
+            </a:r>
+            <a:r>
+              <a:rPr sz="1500" b="0" i="0">
+                <a:solidFill>
+                  <a:srgbClr val="3D2B1E"/>
+                </a:solidFill>
+                <a:latin typeface="Calibri"/>
+              </a:rPr>
+              <a:t> cada proyecto comparte las mismas versiones de librerías del sistema — un cambio en un proyecto puede romper otro.</a:t>
+            </a:r>
+          </a:p>
+          <a:p>
+            <a:pPr>
+              <a:lnSpc>
+                <a:spcPct val="115000"/>
+              </a:lnSpc>
+              <a:spcAft>
+                <a:spcPts val="1200"/>
+              </a:spcAft>
+            </a:pPr>
+            <a:r>
+              <a:rPr sz="1500" b="1" i="0">
+                <a:solidFill>
+                  <a:srgbClr val="9C4422"/>
+                </a:solidFill>
+                <a:latin typeface="Calibri"/>
+              </a:rPr>
+              <a:t>▸  </a:t>
+            </a:r>
+            <a:r>
+              <a:rPr sz="1500" b="1" i="0">
+                <a:solidFill>
+                  <a:srgbClr val="3D2B1E"/>
+                </a:solidFill>
+                <a:latin typeface="Calibri"/>
+              </a:rPr>
+              <a:t>.venv evita conflictos </a:t>
+            </a:r>
+            <a:r>
+              <a:rPr sz="1500" b="0" i="0">
+                <a:solidFill>
+                  <a:srgbClr val="3D2B1E"/>
+                </a:solidFill>
+                <a:latin typeface="Calibri"/>
+              </a:rPr>
+              <a:t> de dependencias entre el seminario y otros entornos ya instalados en el equipo del estudiante.</a:t>
+            </a:r>
+          </a:p>
+        </p:txBody>
+      </p:sp>
+      <p:sp>
+        <p:nvSpPr>
+          <p:cNvPr id="8" name="Rounded Rectangle 7"/>
+          <p:cNvSpPr/>
+          <p:nvPr/>
+        </p:nvSpPr>
+        <p:spPr>
+          <a:xfrm>
+            <a:off x="640080" y="3703320"/>
+            <a:ext cx="10911535" cy="2148840"/>
+          </a:xfrm>
+          <a:prstGeom prst="roundRect">
+            <a:avLst>
+              <a:gd name="adj" fmla="val 4500"/>
+            </a:avLst>
+          </a:prstGeom>
+          <a:solidFill>
+            <a:srgbClr val="1C140F"/>
+          </a:solidFill>
+          <a:ln>
+            <a:noFill/>
+          </a:ln>
+          <a:effectLst/>
+        </p:spPr>
+        <p:style>
+          <a:lnRef idx="1">
+            <a:schemeClr val="accent1"/>
+          </a:lnRef>
+          <a:fillRef idx="3">
+            <a:schemeClr val="accent1"/>
+          </a:fillRef>
+          <a:effectRef idx="2">
+            <a:schemeClr val="accent1"/>
+          </a:effectRef>
+          <a:fontRef idx="minor">
+            <a:schemeClr val="lt1"/>
+          </a:fontRef>
+        </p:style>
+        <p:txBody>
+          <a:bodyPr rtlCol="0" anchor="ctr"/>
+          <a:lstStyle/>
+          <a:p>
+            <a:pPr algn="ctr"/>
+            <a:endParaRPr/>
+          </a:p>
+        </p:txBody>
+      </p:sp>
+      <p:sp>
+        <p:nvSpPr>
+          <p:cNvPr id="9" name="Oval 8"/>
+          <p:cNvSpPr/>
+          <p:nvPr/>
+        </p:nvSpPr>
+        <p:spPr>
+          <a:xfrm>
+            <a:off x="804672" y="3849624"/>
+            <a:ext cx="82296" cy="82296"/>
+          </a:xfrm>
+          <a:prstGeom prst="ellipse">
+            <a:avLst/>
+          </a:prstGeom>
+          <a:solidFill>
+            <a:srgbClr val="E06C5B"/>
+          </a:solidFill>
+          <a:ln>
+            <a:noFill/>
+          </a:ln>
+          <a:effectLst/>
+        </p:spPr>
+        <p:style>
+          <a:lnRef idx="1">
+            <a:schemeClr val="accent1"/>
+          </a:lnRef>
+          <a:fillRef idx="3">
+            <a:schemeClr val="accent1"/>
+          </a:fillRef>
+          <a:effectRef idx="2">
+            <a:schemeClr val="accent1"/>
+          </a:effectRef>
+          <a:fontRef idx="minor">
+            <a:schemeClr val="lt1"/>
+          </a:fontRef>
+        </p:style>
+        <p:txBody>
+          <a:bodyPr rtlCol="0" anchor="ctr"/>
+          <a:lstStyle/>
+          <a:p>
+            <a:pPr algn="ctr"/>
+            <a:endParaRPr/>
+          </a:p>
+        </p:txBody>
+      </p:sp>
+      <p:sp>
+        <p:nvSpPr>
+          <p:cNvPr id="10" name="Oval 9"/>
+          <p:cNvSpPr/>
+          <p:nvPr/>
+        </p:nvSpPr>
+        <p:spPr>
+          <a:xfrm>
+            <a:off x="950976" y="3849624"/>
+            <a:ext cx="82296" cy="82296"/>
+          </a:xfrm>
+          <a:prstGeom prst="ellipse">
+            <a:avLst/>
+          </a:prstGeom>
+          <a:solidFill>
+            <a:srgbClr val="C1592F"/>
+          </a:solidFill>
+          <a:ln>
+            <a:noFill/>
+          </a:ln>
+          <a:effectLst/>
+        </p:spPr>
+        <p:style>
+          <a:lnRef idx="1">
+            <a:schemeClr val="accent1"/>
+          </a:lnRef>
+          <a:fillRef idx="3">
+            <a:schemeClr val="accent1"/>
+          </a:fillRef>
+          <a:effectRef idx="2">
+            <a:schemeClr val="accent1"/>
+          </a:effectRef>
+          <a:fontRef idx="minor">
+            <a:schemeClr val="lt1"/>
+          </a:fontRef>
+        </p:style>
+        <p:txBody>
+          <a:bodyPr rtlCol="0" anchor="ctr"/>
+          <a:lstStyle/>
+          <a:p>
+            <a:pPr algn="ctr"/>
+            <a:endParaRPr/>
+          </a:p>
+        </p:txBody>
+      </p:sp>
+      <p:sp>
+        <p:nvSpPr>
+          <p:cNvPr id="11" name="Oval 10"/>
+          <p:cNvSpPr/>
+          <p:nvPr/>
+        </p:nvSpPr>
+        <p:spPr>
+          <a:xfrm>
+            <a:off x="1097280" y="3849624"/>
+            <a:ext cx="82296" cy="82296"/>
+          </a:xfrm>
+          <a:prstGeom prst="ellipse">
+            <a:avLst/>
+          </a:prstGeom>
+          <a:solidFill>
+            <a:srgbClr val="5BB47A"/>
+          </a:solidFill>
+          <a:ln>
+            <a:noFill/>
+          </a:ln>
+          <a:effectLst/>
+        </p:spPr>
+        <p:style>
+          <a:lnRef idx="1">
+            <a:schemeClr val="accent1"/>
+          </a:lnRef>
+          <a:fillRef idx="3">
+            <a:schemeClr val="accent1"/>
+          </a:fillRef>
+          <a:effectRef idx="2">
+            <a:schemeClr val="accent1"/>
+          </a:effectRef>
+          <a:fontRef idx="minor">
+            <a:schemeClr val="lt1"/>
+          </a:fontRef>
+        </p:style>
+        <p:txBody>
+          <a:bodyPr rtlCol="0" anchor="ctr"/>
+          <a:lstStyle/>
+          <a:p>
+            <a:pPr algn="ctr"/>
+            <a:endParaRPr/>
+          </a:p>
+        </p:txBody>
+      </p:sp>
+      <p:sp>
+        <p:nvSpPr>
+          <p:cNvPr id="12" name="TextBox 11"/>
+          <p:cNvSpPr txBox="1"/>
+          <p:nvPr/>
+        </p:nvSpPr>
+        <p:spPr>
+          <a:xfrm>
+            <a:off x="640080" y="3831336"/>
+            <a:ext cx="10637215" cy="201168"/>
+          </a:xfrm>
+          <a:prstGeom prst="rect">
+            <a:avLst/>
+          </a:prstGeom>
+          <a:noFill/>
+        </p:spPr>
+        <p:txBody>
+          <a:bodyPr wrap="none" lIns="0" tIns="0" rIns="0" bIns="0" anchor="t">
+            <a:spAutoFit/>
+          </a:bodyPr>
+          <a:lstStyle/>
+          <a:p>
+            <a:pPr algn="r"/>
+            <a:r>
+              <a:rPr sz="1050" b="0" i="1">
+                <a:solidFill>
+                  <a:srgbClr val="CBBBA8"/>
+                </a:solidFill>
+                <a:latin typeface="Calibri"/>
+              </a:rPr>
+              <a:t>terminal</a:t>
+            </a:r>
+          </a:p>
+        </p:txBody>
+      </p:sp>
+      <p:sp>
+        <p:nvSpPr>
+          <p:cNvPr id="13" name="TextBox 12"/>
+          <p:cNvSpPr txBox="1"/>
+          <p:nvPr/>
+        </p:nvSpPr>
+        <p:spPr>
+          <a:xfrm>
+            <a:off x="877824" y="4069080"/>
+            <a:ext cx="10436047" cy="1636776"/>
+          </a:xfrm>
+          <a:prstGeom prst="rect">
+            <a:avLst/>
+          </a:prstGeom>
+          <a:noFill/>
+        </p:spPr>
+        <p:txBody>
+          <a:bodyPr wrap="square" lIns="0" tIns="0" rIns="0" bIns="0" anchor="t">
+            <a:spAutoFit/>
+          </a:bodyPr>
+          <a:lstStyle/>
+          <a:p>
+            <a:pPr>
+              <a:spcAft>
+                <a:spcPts val="400"/>
+              </a:spcAft>
+            </a:pPr>
+            <a:r>
+              <a:rPr sz="1350" b="1" i="0">
+                <a:solidFill>
+                  <a:srgbClr val="C1592F"/>
+                </a:solidFill>
+                <a:latin typeface="Courier New"/>
+              </a:rPr>
+              <a:t>$ </a:t>
+            </a:r>
+            <a:r>
+              <a:rPr sz="1350" b="0" i="0">
+                <a:solidFill>
+                  <a:srgbClr val="F3ECE2"/>
+                </a:solidFill>
+                <a:latin typeface="Courier New"/>
+              </a:rPr>
+              <a:t> python -m venv .venv</a:t>
+            </a:r>
+          </a:p>
+          <a:p>
+            <a:pPr>
+              <a:spcAft>
+                <a:spcPts val="400"/>
+              </a:spcAft>
+            </a:pPr>
+            <a:r>
+              <a:rPr sz="1350" b="1" i="0">
+                <a:solidFill>
+                  <a:srgbClr val="C1592F"/>
+                </a:solidFill>
+                <a:latin typeface="Courier New"/>
+              </a:rPr>
+              <a:t>$ </a:t>
+            </a:r>
+            <a:r>
+              <a:rPr sz="1350" b="0" i="0">
+                <a:solidFill>
+                  <a:srgbClr val="F3ECE2"/>
+                </a:solidFill>
+                <a:latin typeface="Courier New"/>
+              </a:rPr>
+              <a:t> source .venv/bin/activate      # Linux/Mac</a:t>
+            </a:r>
+          </a:p>
+          <a:p>
+            <a:pPr>
+              <a:spcAft>
+                <a:spcPts val="400"/>
+              </a:spcAft>
+            </a:pPr>
+            <a:r>
+              <a:rPr sz="1350" b="1" i="0">
+                <a:solidFill>
+                  <a:srgbClr val="C1592F"/>
+                </a:solidFill>
+                <a:latin typeface="Courier New"/>
+              </a:rPr>
+              <a:t>$ </a:t>
+            </a:r>
+            <a:r>
+              <a:rPr sz="1350" b="0" i="0">
+                <a:solidFill>
+                  <a:srgbClr val="F3ECE2"/>
+                </a:solidFill>
+                <a:latin typeface="Courier New"/>
+              </a:rPr>
+              <a:t> .venv\Scripts\activate         # Windows</a:t>
+            </a:r>
+          </a:p>
+          <a:p>
+            <a:pPr>
+              <a:spcAft>
+                <a:spcPts val="400"/>
+              </a:spcAft>
+            </a:pPr>
+            <a:r>
+              <a:rPr sz="1350" b="1" i="0">
+                <a:solidFill>
+                  <a:srgbClr val="C1592F"/>
+                </a:solidFill>
+                <a:latin typeface="Courier New"/>
+              </a:rPr>
+              <a:t>$ </a:t>
+            </a:r>
+            <a:r>
+              <a:rPr sz="1350" b="0" i="0">
+                <a:solidFill>
+                  <a:srgbClr val="F3ECE2"/>
+                </a:solidFill>
+                <a:latin typeface="Courier New"/>
+              </a:rPr>
+              <a:t> pip install -r requirements.txt</a:t>
+            </a:r>
+          </a:p>
+        </p:txBody>
+      </p:sp>
+    </p:spTree>
+  </p:cSld>
+  <p:clrMapOvr>
+    <a:masterClrMapping/>
+  </p:clrMapOvr>
+</p:sld>
+</file>
+
+<file path=ppt/slides/slide6.xml><?xml version="1.0" encoding="utf-8"?>
+<p:sld xmlns:a="http://schemas.openxmlformats.org/drawingml/2006/main" xmlns:r="http://schemas.openxmlformats.org/officeDocument/2006/relationships" xmlns:p="http://schemas.openxmlformats.org/presentationml/2006/main">
+  <p:cSld>
+    <p:spTree>
+      <p:nvGrpSpPr>
+        <p:cNvPr id="1" name=""/>
+        <p:cNvGrpSpPr/>
+        <p:nvPr/>
+      </p:nvGrpSpPr>
+      <p:grpSpPr>
+        <a:xfrm>
+          <a:off x="0" y="0"/>
+          <a:ext cx="0" cy="0"/>
+          <a:chOff x="0" y="0"/>
+          <a:chExt cx="0" cy="0"/>
+        </a:xfrm>
+      </p:grpSpPr>
+      <p:sp>
+        <p:nvSpPr>
+          <p:cNvPr id="2" name="Rectangle 1"/>
+          <p:cNvSpPr/>
+          <p:nvPr/>
+        </p:nvSpPr>
+        <p:spPr>
+          <a:xfrm>
+            <a:off x="0" y="0"/>
+            <a:ext cx="12191695" cy="6858000"/>
+          </a:xfrm>
+          <a:prstGeom prst="rect">
+            <a:avLst/>
+          </a:prstGeom>
+          <a:solidFill>
+            <a:srgbClr val="F5EFE4"/>
+          </a:solidFill>
+          <a:ln>
+            <a:noFill/>
+          </a:ln>
+          <a:effectLst/>
+        </p:spPr>
+        <p:style>
+          <a:lnRef idx="1">
+            <a:schemeClr val="accent1"/>
+          </a:lnRef>
+          <a:fillRef idx="3">
+            <a:schemeClr val="accent1"/>
+          </a:fillRef>
+          <a:effectRef idx="2">
+            <a:schemeClr val="accent1"/>
+          </a:effectRef>
+          <a:fontRef idx="minor">
+            <a:schemeClr val="lt1"/>
+          </a:fontRef>
+        </p:style>
+        <p:txBody>
+          <a:bodyPr rtlCol="0" anchor="ctr"/>
+          <a:lstStyle/>
+          <a:p>
+            <a:pPr algn="ctr"/>
+            <a:endParaRPr/>
+          </a:p>
+        </p:txBody>
+      </p:sp>
+      <p:sp>
+        <p:nvSpPr>
+          <p:cNvPr id="3" name="TextBox 2"/>
+          <p:cNvSpPr txBox="1"/>
+          <p:nvPr/>
+        </p:nvSpPr>
+        <p:spPr>
+          <a:xfrm>
+            <a:off x="640080" y="502920"/>
+            <a:ext cx="10911535" cy="292608"/>
+          </a:xfrm>
+          <a:prstGeom prst="rect">
+            <a:avLst/>
+          </a:prstGeom>
+          <a:noFill/>
+        </p:spPr>
+        <p:txBody>
+          <a:bodyPr wrap="square" lIns="0" tIns="0" rIns="0" bIns="0" anchor="t">
+            <a:spAutoFit/>
+          </a:bodyPr>
+          <a:lstStyle/>
+          <a:p>
+            <a:r>
+              <a:rPr sz="1250" b="1" i="0" spc="160">
+                <a:solidFill>
+                  <a:srgbClr val="9C4422"/>
+                </a:solidFill>
+                <a:latin typeface="Calibri"/>
+              </a:rPr>
+              <a:t>LIBRERÍAS CORE Y SU ROL</a:t>
+            </a:r>
+          </a:p>
+        </p:txBody>
+      </p:sp>
+      <p:sp>
+        <p:nvSpPr>
+          <p:cNvPr id="4" name="TextBox 3"/>
+          <p:cNvSpPr txBox="1"/>
+          <p:nvPr/>
+        </p:nvSpPr>
+        <p:spPr>
+          <a:xfrm>
+            <a:off x="640080" y="786384"/>
+            <a:ext cx="10911535" cy="822960"/>
+          </a:xfrm>
+          <a:prstGeom prst="rect">
+            <a:avLst/>
+          </a:prstGeom>
+          <a:noFill/>
+        </p:spPr>
+        <p:txBody>
+          <a:bodyPr wrap="square" lIns="0" tIns="0" rIns="0" bIns="0" anchor="t">
+            <a:spAutoFit/>
+          </a:bodyPr>
+          <a:lstStyle/>
+          <a:p>
+            <a:r>
+              <a:rPr sz="3000" b="1" i="0">
+                <a:solidFill>
+                  <a:srgbClr val="3D2B1E"/>
+                </a:solidFill>
+                <a:latin typeface="Cambria"/>
+              </a:rPr>
+              <a:t>Stack tecnológico del curso</a:t>
+            </a:r>
+          </a:p>
+        </p:txBody>
+      </p:sp>
+      <p:sp>
+        <p:nvSpPr>
+          <p:cNvPr id="5" name="TextBox 4"/>
+          <p:cNvSpPr txBox="1"/>
+          <p:nvPr/>
+        </p:nvSpPr>
+        <p:spPr>
+          <a:xfrm>
+            <a:off x="640080" y="6473952"/>
+            <a:ext cx="7772400" cy="274320"/>
+          </a:xfrm>
+          <a:prstGeom prst="rect">
+            <a:avLst/>
+          </a:prstGeom>
+          <a:noFill/>
+        </p:spPr>
+        <p:txBody>
+          <a:bodyPr wrap="square" lIns="0" tIns="0" rIns="0" bIns="0" anchor="t">
+            <a:spAutoFit/>
+          </a:bodyPr>
+          <a:lstStyle/>
+          <a:p>
+            <a:r>
+              <a:rPr sz="1000" b="0" i="1">
+                <a:solidFill>
+                  <a:srgbClr val="6B5F4E"/>
+                </a:solidFill>
+                <a:latin typeface="Calibri"/>
+              </a:rPr>
+              <a:t>Presentación 1 · Fundamentos, Entorno y Diagnóstico</a:t>
+            </a:r>
+          </a:p>
+        </p:txBody>
+      </p:sp>
+      <p:sp>
+        <p:nvSpPr>
+          <p:cNvPr id="6" name="Oval 5"/>
+          <p:cNvSpPr/>
+          <p:nvPr/>
+        </p:nvSpPr>
+        <p:spPr>
+          <a:xfrm>
+            <a:off x="11240719" y="6419088"/>
+            <a:ext cx="310896" cy="310896"/>
+          </a:xfrm>
+          <a:prstGeom prst="ellipse">
+            <a:avLst/>
+          </a:prstGeom>
+          <a:solidFill>
+            <a:srgbClr val="C1592F"/>
+          </a:solidFill>
+          <a:ln>
+            <a:noFill/>
+          </a:ln>
+          <a:effectLst/>
+        </p:spPr>
+        <p:style>
+          <a:lnRef idx="1">
+            <a:schemeClr val="accent1"/>
+          </a:lnRef>
+          <a:fillRef idx="3">
+            <a:schemeClr val="accent1"/>
+          </a:fillRef>
+          <a:effectRef idx="2">
+            <a:schemeClr val="accent1"/>
+          </a:effectRef>
+          <a:fontRef idx="minor">
+            <a:schemeClr val="lt1"/>
+          </a:fontRef>
+        </p:style>
+        <p:txBody>
+          <a:bodyPr wrap="none" lIns="0" tIns="0" rIns="0" bIns="0" rtlCol="0" anchor="ctr"/>
           <a:lstStyle/>
           <a:p>
             <a:pPr algn="ctr"/>
@@ -7572,13 +9374,25 @@
                 <a:tableStyleId>{5C22544A-7EE6-4342-B048-85BDC9FD1C3A}</a:tableStyleId>
               </a:tblPr>
               <a:tblGrid>
-                <a:gridCol w="3273460"/>
-                <a:gridCol w="7638074"/>
+                <a:gridCol w="3273460">
+                  <a:extLst>
+                    <a:ext uri="{9D8B030D-6E8A-4147-A177-3AD203B41FA5}">
+                      <a16:colId xmlns:a16="http://schemas.microsoft.com/office/drawing/2014/main" val="20000"/>
+                    </a:ext>
+                  </a:extLst>
+                </a:gridCol>
+                <a:gridCol w="7638074">
+                  <a:extLst>
+                    <a:ext uri="{9D8B030D-6E8A-4147-A177-3AD203B41FA5}">
+                      <a16:colId xmlns:a16="http://schemas.microsoft.com/office/drawing/2014/main" val="20001"/>
+                    </a:ext>
+                  </a:extLst>
+                </a:gridCol>
               </a:tblGrid>
               <a:tr h="594360">
                 <a:tc>
                   <a:txBody>
-                    <a:bodyPr wrap="square"/>
+                    <a:bodyPr/>
                     <a:lstStyle/>
                     <a:p>
                       <a:r>
@@ -7600,7 +9414,7 @@
                 </a:tc>
                 <a:tc>
                   <a:txBody>
-                    <a:bodyPr wrap="square"/>
+                    <a:bodyPr/>
                     <a:lstStyle/>
                     <a:p>
                       <a:r>
@@ -7620,11 +9434,16 @@
                     </a:solidFill>
                   </a:tcPr>
                 </a:tc>
+                <a:extLst>
+                  <a:ext uri="{0D108BD9-81ED-4DB2-BD59-A6C34878D82A}">
+                    <a16:rowId xmlns:a16="http://schemas.microsoft.com/office/drawing/2014/main" val="10000"/>
+                  </a:ext>
+                </a:extLst>
               </a:tr>
               <a:tr h="594360">
                 <a:tc>
                   <a:txBody>
-                    <a:bodyPr wrap="square"/>
+                    <a:bodyPr/>
                     <a:lstStyle/>
                     <a:p>
                       <a:r>
@@ -7646,7 +9465,7 @@
                 </a:tc>
                 <a:tc>
                   <a:txBody>
-                    <a:bodyPr wrap="square"/>
+                    <a:bodyPr/>
                     <a:lstStyle/>
                     <a:p>
                       <a:r>
@@ -7666,11 +9485,16 @@
                     </a:solidFill>
                   </a:tcPr>
                 </a:tc>
+                <a:extLst>
+                  <a:ext uri="{0D108BD9-81ED-4DB2-BD59-A6C34878D82A}">
+                    <a16:rowId xmlns:a16="http://schemas.microsoft.com/office/drawing/2014/main" val="10001"/>
+                  </a:ext>
+                </a:extLst>
               </a:tr>
               <a:tr h="594360">
                 <a:tc>
                   <a:txBody>
-                    <a:bodyPr wrap="square"/>
+                    <a:bodyPr/>
                     <a:lstStyle/>
                     <a:p>
                       <a:r>
@@ -7692,7 +9516,7 @@
                 </a:tc>
                 <a:tc>
                   <a:txBody>
-                    <a:bodyPr wrap="square"/>
+                    <a:bodyPr/>
                     <a:lstStyle/>
                     <a:p>
                       <a:r>
@@ -7712,11 +9536,16 @@
                     </a:solidFill>
                   </a:tcPr>
                 </a:tc>
+                <a:extLst>
+                  <a:ext uri="{0D108BD9-81ED-4DB2-BD59-A6C34878D82A}">
+                    <a16:rowId xmlns:a16="http://schemas.microsoft.com/office/drawing/2014/main" val="10002"/>
+                  </a:ext>
+                </a:extLst>
               </a:tr>
               <a:tr h="594360">
                 <a:tc>
                   <a:txBody>
-                    <a:bodyPr wrap="square"/>
+                    <a:bodyPr/>
                     <a:lstStyle/>
                     <a:p>
                       <a:r>
@@ -7738,7 +9567,7 @@
                 </a:tc>
                 <a:tc>
                   <a:txBody>
-                    <a:bodyPr wrap="square"/>
+                    <a:bodyPr/>
                     <a:lstStyle/>
                     <a:p>
                       <a:r>
@@ -7758,11 +9587,16 @@
                     </a:solidFill>
                   </a:tcPr>
                 </a:tc>
+                <a:extLst>
+                  <a:ext uri="{0D108BD9-81ED-4DB2-BD59-A6C34878D82A}">
+                    <a16:rowId xmlns:a16="http://schemas.microsoft.com/office/drawing/2014/main" val="10003"/>
+                  </a:ext>
+                </a:extLst>
               </a:tr>
               <a:tr h="594360">
                 <a:tc>
                   <a:txBody>
-                    <a:bodyPr wrap="square"/>
+                    <a:bodyPr/>
                     <a:lstStyle/>
                     <a:p>
                       <a:r>
@@ -7784,7 +9618,7 @@
                 </a:tc>
                 <a:tc>
                   <a:txBody>
-                    <a:bodyPr wrap="square"/>
+                    <a:bodyPr/>
                     <a:lstStyle/>
                     <a:p>
                       <a:r>
@@ -7804,11 +9638,16 @@
                     </a:solidFill>
                   </a:tcPr>
                 </a:tc>
+                <a:extLst>
+                  <a:ext uri="{0D108BD9-81ED-4DB2-BD59-A6C34878D82A}">
+                    <a16:rowId xmlns:a16="http://schemas.microsoft.com/office/drawing/2014/main" val="10004"/>
+                  </a:ext>
+                </a:extLst>
               </a:tr>
               <a:tr h="594360">
                 <a:tc>
                   <a:txBody>
-                    <a:bodyPr wrap="square"/>
+                    <a:bodyPr/>
                     <a:lstStyle/>
                     <a:p>
                       <a:r>
@@ -7830,7 +9669,7 @@
                 </a:tc>
                 <a:tc>
                   <a:txBody>
-                    <a:bodyPr wrap="square"/>
+                    <a:bodyPr/>
                     <a:lstStyle/>
                     <a:p>
                       <a:r>
@@ -7850,6 +9689,11 @@
                     </a:solidFill>
                   </a:tcPr>
                 </a:tc>
+                <a:extLst>
+                  <a:ext uri="{0D108BD9-81ED-4DB2-BD59-A6C34878D82A}">
+                    <a16:rowId xmlns:a16="http://schemas.microsoft.com/office/drawing/2014/main" val="10005"/>
+                  </a:ext>
+                </a:extLst>
               </a:tr>
             </a:tbl>
           </a:graphicData>
@@ -7863,8 +9707,8 @@
 </p:sld>
 </file>
 
-<file path=ppt/slides/slide6.xml><?xml version="1.0" encoding="utf-8"?>
-<p:sld xmlns:a="http://schemas.openxmlformats.org/drawingml/2006/main" xmlns:p="http://schemas.openxmlformats.org/presentationml/2006/main" xmlns:r="http://schemas.openxmlformats.org/officeDocument/2006/relationships">
+<file path=ppt/slides/slide7.xml><?xml version="1.0" encoding="utf-8"?>
+<p:sld xmlns:a="http://schemas.openxmlformats.org/drawingml/2006/main" xmlns:r="http://schemas.openxmlformats.org/officeDocument/2006/relationships" xmlns:p="http://schemas.openxmlformats.org/presentationml/2006/main">
   <p:cSld>
     <p:spTree>
       <p:nvGrpSpPr>
@@ -7872,7 +9716,14 @@
         <p:cNvGrpSpPr/>
         <p:nvPr/>
       </p:nvGrpSpPr>
-      <p:grpSpPr/>
+      <p:grpSpPr>
+        <a:xfrm>
+          <a:off x="0" y="0"/>
+          <a:ext cx="0" cy="0"/>
+          <a:chOff x="0" y="0"/>
+          <a:chExt cx="0" cy="0"/>
+        </a:xfrm>
+      </p:grpSpPr>
       <p:sp>
         <p:nvSpPr>
           <p:cNvPr id="2" name="Rectangle 1"/>
@@ -7914,6 +9765,7 @@
           <a:lstStyle/>
           <a:p>
             <a:pPr algn="ctr"/>
+            <a:endParaRPr/>
           </a:p>
         </p:txBody>
       </p:sp>
@@ -7934,7 +9786,7 @@
           <a:noFill/>
         </p:spPr>
         <p:txBody>
-          <a:bodyPr wrap="square" anchor="t" lIns="0" rIns="0" tIns="0" bIns="0">
+          <a:bodyPr wrap="square" lIns="0" tIns="0" rIns="0" bIns="0" anchor="t">
             <a:spAutoFit/>
           </a:bodyPr>
           <a:lstStyle/>
@@ -7968,7 +9820,7 @@
           <a:noFill/>
         </p:spPr>
         <p:txBody>
-          <a:bodyPr wrap="square" anchor="t" lIns="0" rIns="0" tIns="0" bIns="0">
+          <a:bodyPr wrap="square" lIns="0" tIns="0" rIns="0" bIns="0" anchor="t">
             <a:spAutoFit/>
           </a:bodyPr>
           <a:lstStyle/>
@@ -8002,7 +9854,7 @@
           <a:noFill/>
         </p:spPr>
         <p:txBody>
-          <a:bodyPr wrap="square" anchor="t" lIns="0" rIns="0" tIns="0" bIns="0">
+          <a:bodyPr wrap="square" lIns="0" tIns="0" rIns="0" bIns="0" anchor="t">
             <a:spAutoFit/>
           </a:bodyPr>
           <a:lstStyle/>
@@ -8056,7 +9908,7 @@
           </a:fontRef>
         </p:style>
         <p:txBody>
-          <a:bodyPr rtlCol="0" anchor="ctr" wrap="none" lIns="0" rIns="0" tIns="0" bIns="0"/>
+          <a:bodyPr wrap="none" lIns="0" tIns="0" rIns="0" bIns="0" rtlCol="0" anchor="ctr"/>
           <a:lstStyle/>
           <a:p>
             <a:pPr algn="ctr"/>
@@ -8115,6 +9967,7 @@
           <a:lstStyle/>
           <a:p>
             <a:pPr algn="ctr"/>
+            <a:endParaRPr/>
           </a:p>
         </p:txBody>
       </p:sp>
@@ -8159,6 +10012,7 @@
           <a:lstStyle/>
           <a:p>
             <a:pPr algn="ctr"/>
+            <a:endParaRPr/>
           </a:p>
         </p:txBody>
       </p:sp>
@@ -8203,6 +10057,7 @@
           <a:lstStyle/>
           <a:p>
             <a:pPr algn="ctr"/>
+            <a:endParaRPr/>
           </a:p>
         </p:txBody>
       </p:sp>
@@ -8247,6 +10102,7 @@
           <a:lstStyle/>
           <a:p>
             <a:pPr algn="ctr"/>
+            <a:endParaRPr/>
           </a:p>
         </p:txBody>
       </p:sp>
@@ -8267,7 +10123,7 @@
           <a:noFill/>
         </p:spPr>
         <p:txBody>
-          <a:bodyPr wrap="none" anchor="t" lIns="0" rIns="0" tIns="0" bIns="0">
+          <a:bodyPr wrap="none" lIns="0" tIns="0" rIns="0" bIns="0" anchor="t">
             <a:spAutoFit/>
           </a:bodyPr>
           <a:lstStyle/>
@@ -8302,7 +10158,7 @@
           <a:noFill/>
         </p:spPr>
         <p:txBody>
-          <a:bodyPr wrap="square" anchor="t" lIns="0" rIns="0" tIns="0" bIns="0">
+          <a:bodyPr wrap="square" lIns="0" tIns="0" rIns="0" bIns="0" anchor="t">
             <a:spAutoFit/>
           </a:bodyPr>
           <a:lstStyle/>
@@ -8405,7 +10261,7 @@
           <a:noFill/>
         </p:spPr>
         <p:txBody>
-          <a:bodyPr wrap="square" anchor="t" lIns="0" rIns="0" tIns="0" bIns="0">
+          <a:bodyPr wrap="square" lIns="0" tIns="0" rIns="0" bIns="0" anchor="t">
             <a:spAutoFit/>
           </a:bodyPr>
           <a:lstStyle/>
@@ -8475,8 +10331,8 @@
 </p:sld>
 </file>
 
-<file path=ppt/slides/slide7.xml><?xml version="1.0" encoding="utf-8"?>
-<p:sld xmlns:a="http://schemas.openxmlformats.org/drawingml/2006/main" xmlns:p="http://schemas.openxmlformats.org/presentationml/2006/main" xmlns:r="http://schemas.openxmlformats.org/officeDocument/2006/relationships">
+<file path=ppt/slides/slide8.xml><?xml version="1.0" encoding="utf-8"?>
+<p:sld xmlns:a="http://schemas.openxmlformats.org/drawingml/2006/main" xmlns:r="http://schemas.openxmlformats.org/officeDocument/2006/relationships" xmlns:p="http://schemas.openxmlformats.org/presentationml/2006/main">
   <p:cSld>
     <p:spTree>
       <p:nvGrpSpPr>
@@ -8484,7 +10340,14 @@
         <p:cNvGrpSpPr/>
         <p:nvPr/>
       </p:nvGrpSpPr>
-      <p:grpSpPr/>
+      <p:grpSpPr>
+        <a:xfrm>
+          <a:off x="0" y="0"/>
+          <a:ext cx="0" cy="0"/>
+          <a:chOff x="0" y="0"/>
+          <a:chExt cx="0" cy="0"/>
+        </a:xfrm>
+      </p:grpSpPr>
       <p:sp>
         <p:nvSpPr>
           <p:cNvPr id="2" name="Rectangle 1"/>
@@ -8526,6 +10389,7 @@
           <a:lstStyle/>
           <a:p>
             <a:pPr algn="ctr"/>
+            <a:endParaRPr/>
           </a:p>
         </p:txBody>
       </p:sp>
@@ -8546,7 +10410,7 @@
           <a:noFill/>
         </p:spPr>
         <p:txBody>
-          <a:bodyPr wrap="square" anchor="t" lIns="0" rIns="0" tIns="0" bIns="0">
+          <a:bodyPr wrap="square" lIns="0" tIns="0" rIns="0" bIns="0" anchor="t">
             <a:spAutoFit/>
           </a:bodyPr>
           <a:lstStyle/>
@@ -8580,7 +10444,7 @@
           <a:noFill/>
         </p:spPr>
         <p:txBody>
-          <a:bodyPr wrap="square" anchor="t" lIns="0" rIns="0" tIns="0" bIns="0">
+          <a:bodyPr wrap="square" lIns="0" tIns="0" rIns="0" bIns="0" anchor="t">
             <a:spAutoFit/>
           </a:bodyPr>
           <a:lstStyle/>
@@ -8614,7 +10478,7 @@
           <a:noFill/>
         </p:spPr>
         <p:txBody>
-          <a:bodyPr wrap="square" anchor="t" lIns="0" rIns="0" tIns="0" bIns="0">
+          <a:bodyPr wrap="square" lIns="0" tIns="0" rIns="0" bIns="0" anchor="t">
             <a:spAutoFit/>
           </a:bodyPr>
           <a:lstStyle/>
@@ -8668,7 +10532,7 @@
           </a:fontRef>
         </p:style>
         <p:txBody>
-          <a:bodyPr rtlCol="0" anchor="ctr" wrap="none" lIns="0" rIns="0" tIns="0" bIns="0"/>
+          <a:bodyPr wrap="none" lIns="0" tIns="0" rIns="0" bIns="0" rtlCol="0" anchor="ctr"/>
           <a:lstStyle/>
           <a:p>
             <a:pPr algn="ctr"/>
@@ -8733,6 +10597,7 @@
           <a:lstStyle/>
           <a:p>
             <a:pPr algn="ctr"/>
+            <a:endParaRPr/>
           </a:p>
         </p:txBody>
       </p:sp>
@@ -8773,7 +10638,7 @@
           </a:fontRef>
         </p:style>
         <p:txBody>
-          <a:bodyPr rtlCol="0" anchor="ctr" wrap="none" lIns="0" rIns="0" tIns="0" bIns="0"/>
+          <a:bodyPr wrap="none" lIns="0" tIns="0" rIns="0" bIns="0" rtlCol="0" anchor="ctr"/>
           <a:lstStyle/>
           <a:p>
             <a:pPr algn="ctr"/>
@@ -8806,7 +10671,7 @@
           <a:noFill/>
         </p:spPr>
         <p:txBody>
-          <a:bodyPr wrap="square" anchor="t" lIns="0" rIns="0" tIns="0" bIns="0">
+          <a:bodyPr wrap="square" lIns="0" tIns="0" rIns="0" bIns="0" anchor="t">
             <a:spAutoFit/>
           </a:bodyPr>
           <a:lstStyle/>
@@ -8893,6 +10758,7 @@
           <a:lstStyle/>
           <a:p>
             <a:pPr algn="ctr"/>
+            <a:endParaRPr/>
           </a:p>
         </p:txBody>
       </p:sp>
@@ -8933,7 +10799,7 @@
           </a:fontRef>
         </p:style>
         <p:txBody>
-          <a:bodyPr rtlCol="0" anchor="ctr" wrap="none" lIns="0" rIns="0" tIns="0" bIns="0"/>
+          <a:bodyPr wrap="none" lIns="0" tIns="0" rIns="0" bIns="0" rtlCol="0" anchor="ctr"/>
           <a:lstStyle/>
           <a:p>
             <a:pPr algn="ctr"/>
@@ -8966,7 +10832,7 @@
           <a:noFill/>
         </p:spPr>
         <p:txBody>
-          <a:bodyPr wrap="square" anchor="t" lIns="0" rIns="0" tIns="0" bIns="0">
+          <a:bodyPr wrap="square" lIns="0" tIns="0" rIns="0" bIns="0" anchor="t">
             <a:spAutoFit/>
           </a:bodyPr>
           <a:lstStyle/>
@@ -9053,6 +10919,7 @@
           <a:lstStyle/>
           <a:p>
             <a:pPr algn="ctr"/>
+            <a:endParaRPr/>
           </a:p>
         </p:txBody>
       </p:sp>
@@ -9093,7 +10960,7 @@
           </a:fontRef>
         </p:style>
         <p:txBody>
-          <a:bodyPr rtlCol="0" anchor="ctr" wrap="none" lIns="0" rIns="0" tIns="0" bIns="0"/>
+          <a:bodyPr wrap="none" lIns="0" tIns="0" rIns="0" bIns="0" rtlCol="0" anchor="ctr"/>
           <a:lstStyle/>
           <a:p>
             <a:pPr algn="ctr"/>
@@ -9126,7 +10993,7 @@
           <a:noFill/>
         </p:spPr>
         <p:txBody>
-          <a:bodyPr wrap="square" anchor="t" lIns="0" rIns="0" tIns="0" bIns="0">
+          <a:bodyPr wrap="square" lIns="0" tIns="0" rIns="0" bIns="0" anchor="t">
             <a:spAutoFit/>
           </a:bodyPr>
           <a:lstStyle/>
@@ -9213,6 +11080,7 @@
           <a:lstStyle/>
           <a:p>
             <a:pPr algn="ctr"/>
+            <a:endParaRPr/>
           </a:p>
         </p:txBody>
       </p:sp>
@@ -9233,7 +11101,7 @@
           <a:noFill/>
         </p:spPr>
         <p:txBody>
-          <a:bodyPr wrap="square" anchor="ctr" lIns="0" rIns="0" tIns="0" bIns="0">
+          <a:bodyPr wrap="square" lIns="0" tIns="0" rIns="0" bIns="0" anchor="ctr">
             <a:spAutoFit/>
           </a:bodyPr>
           <a:lstStyle/>
@@ -9267,8 +11135,8 @@
 </p:sld>
 </file>
 
-<file path=ppt/slides/slide8.xml><?xml version="1.0" encoding="utf-8"?>
-<p:sld xmlns:a="http://schemas.openxmlformats.org/drawingml/2006/main" xmlns:p="http://schemas.openxmlformats.org/presentationml/2006/main" xmlns:r="http://schemas.openxmlformats.org/officeDocument/2006/relationships">
+<file path=ppt/slides/slide9.xml><?xml version="1.0" encoding="utf-8"?>
+<p:sld xmlns:a="http://schemas.openxmlformats.org/drawingml/2006/main" xmlns:r="http://schemas.openxmlformats.org/officeDocument/2006/relationships" xmlns:p="http://schemas.openxmlformats.org/presentationml/2006/main">
   <p:cSld>
     <p:spTree>
       <p:nvGrpSpPr>
@@ -9276,7 +11144,14 @@
         <p:cNvGrpSpPr/>
         <p:nvPr/>
       </p:nvGrpSpPr>
-      <p:grpSpPr/>
+      <p:grpSpPr>
+        <a:xfrm>
+          <a:off x="0" y="0"/>
+          <a:ext cx="0" cy="0"/>
+          <a:chOff x="0" y="0"/>
+          <a:chExt cx="0" cy="0"/>
+        </a:xfrm>
+      </p:grpSpPr>
       <p:sp>
         <p:nvSpPr>
           <p:cNvPr id="2" name="Rectangle 1"/>
@@ -9318,6 +11193,7 @@
           <a:lstStyle/>
           <a:p>
             <a:pPr algn="ctr"/>
+            <a:endParaRPr/>
           </a:p>
         </p:txBody>
       </p:sp>
@@ -9338,7 +11214,7 @@
           <a:noFill/>
         </p:spPr>
         <p:txBody>
-          <a:bodyPr wrap="square" anchor="t" lIns="0" rIns="0" tIns="0" bIns="0">
+          <a:bodyPr wrap="square" lIns="0" tIns="0" rIns="0" bIns="0" anchor="t">
             <a:spAutoFit/>
           </a:bodyPr>
           <a:lstStyle/>
@@ -9372,7 +11248,7 @@
           <a:noFill/>
         </p:spPr>
         <p:txBody>
-          <a:bodyPr wrap="square" anchor="t" lIns="0" rIns="0" tIns="0" bIns="0">
+          <a:bodyPr wrap="square" lIns="0" tIns="0" rIns="0" bIns="0" anchor="t">
             <a:spAutoFit/>
           </a:bodyPr>
           <a:lstStyle/>
@@ -9406,7 +11282,7 @@
           <a:noFill/>
         </p:spPr>
         <p:txBody>
-          <a:bodyPr wrap="square" anchor="t" lIns="0" rIns="0" tIns="0" bIns="0">
+          <a:bodyPr wrap="square" lIns="0" tIns="0" rIns="0" bIns="0" anchor="t">
             <a:spAutoFit/>
           </a:bodyPr>
           <a:lstStyle/>
@@ -9460,7 +11336,7 @@
           </a:fontRef>
         </p:style>
         <p:txBody>
-          <a:bodyPr rtlCol="0" anchor="ctr" wrap="none" lIns="0" rIns="0" tIns="0" bIns="0"/>
+          <a:bodyPr wrap="none" lIns="0" tIns="0" rIns="0" bIns="0" rtlCol="0" anchor="ctr"/>
           <a:lstStyle/>
           <a:p>
             <a:pPr algn="ctr"/>
@@ -9493,7 +11369,7 @@
           <a:noFill/>
         </p:spPr>
         <p:txBody>
-          <a:bodyPr wrap="square" anchor="t" lIns="0" rIns="0" tIns="0" bIns="0">
+          <a:bodyPr wrap="square" lIns="0" tIns="0" rIns="0" bIns="0" anchor="t">
             <a:spAutoFit/>
           </a:bodyPr>
           <a:lstStyle/>
@@ -9659,6 +11535,7 @@
           <a:lstStyle/>
           <a:p>
             <a:pPr algn="ctr"/>
+            <a:endParaRPr/>
           </a:p>
         </p:txBody>
       </p:sp>
@@ -9679,7 +11556,7 @@
           <a:noFill/>
         </p:spPr>
         <p:txBody>
-          <a:bodyPr wrap="square" anchor="ctr" lIns="0" rIns="0" tIns="0" bIns="0">
+          <a:bodyPr wrap="square" lIns="0" tIns="0" rIns="0" bIns="0" anchor="ctr">
             <a:spAutoFit/>
           </a:bodyPr>
           <a:lstStyle/>
@@ -9746,6 +11623,7 @@
           <a:lstStyle/>
           <a:p>
             <a:pPr algn="ctr"/>
+            <a:endParaRPr/>
           </a:p>
         </p:txBody>
       </p:sp>
@@ -9766,7 +11644,7 @@
           <a:noFill/>
         </p:spPr>
         <p:txBody>
-          <a:bodyPr wrap="square" anchor="ctr" lIns="0" rIns="0" tIns="0" bIns="0">
+          <a:bodyPr wrap="square" lIns="0" tIns="0" rIns="0" bIns="0" anchor="ctr">
             <a:spAutoFit/>
           </a:bodyPr>
           <a:lstStyle/>
@@ -9833,6 +11711,7 @@
           <a:lstStyle/>
           <a:p>
             <a:pPr algn="ctr"/>
+            <a:endParaRPr/>
           </a:p>
         </p:txBody>
       </p:sp>
@@ -9853,7 +11732,7 @@
           <a:noFill/>
         </p:spPr>
         <p:txBody>
-          <a:bodyPr wrap="square" anchor="ctr" lIns="0" rIns="0" tIns="0" bIns="0">
+          <a:bodyPr wrap="square" lIns="0" tIns="0" rIns="0" bIns="0" anchor="ctr">
             <a:spAutoFit/>
           </a:bodyPr>
           <a:lstStyle/>
@@ -9867,625 +11746,6 @@
                 <a:latin typeface="Calibri"/>
               </a:rPr>
               <a:t>Estadística elemental</a:t>
-            </a:r>
-          </a:p>
-        </p:txBody>
-      </p:sp>
-    </p:spTree>
-  </p:cSld>
-  <p:clrMapOvr>
-    <a:masterClrMapping/>
-  </p:clrMapOvr>
-</p:sld>
-</file>
-
-<file path=ppt/slides/slide9.xml><?xml version="1.0" encoding="utf-8"?>
-<p:sld xmlns:a="http://schemas.openxmlformats.org/drawingml/2006/main" xmlns:p="http://schemas.openxmlformats.org/presentationml/2006/main" xmlns:r="http://schemas.openxmlformats.org/officeDocument/2006/relationships">
-  <p:cSld>
-    <p:spTree>
-      <p:nvGrpSpPr>
-        <p:cNvPr id="1" name=""/>
-        <p:cNvGrpSpPr/>
-        <p:nvPr/>
-      </p:nvGrpSpPr>
-      <p:grpSpPr/>
-      <p:sp>
-        <p:nvSpPr>
-          <p:cNvPr id="2" name="Rectangle 1"/>
-          <p:cNvSpPr/>
-          <p:nvPr/>
-        </p:nvSpPr>
-        <p:spPr>
-          <a:xfrm>
-            <a:off x="0" y="0"/>
-            <a:ext cx="12191695" cy="6858000"/>
-          </a:xfrm>
-          <a:prstGeom prst="rect">
-            <a:avLst/>
-          </a:prstGeom>
-          <a:solidFill>
-            <a:srgbClr val="F5EFE4"/>
-          </a:solidFill>
-          <a:ln>
-            <a:noFill/>
-          </a:ln>
-          <a:effectLst/>
-        </p:spPr>
-        <p:style>
-          <a:lnRef idx="1">
-            <a:schemeClr val="accent1"/>
-          </a:lnRef>
-          <a:fillRef idx="3">
-            <a:schemeClr val="accent1"/>
-          </a:fillRef>
-          <a:effectRef idx="2">
-            <a:schemeClr val="accent1"/>
-          </a:effectRef>
-          <a:fontRef idx="minor">
-            <a:schemeClr val="lt1"/>
-          </a:fontRef>
-        </p:style>
-        <p:txBody>
-          <a:bodyPr rtlCol="0" anchor="ctr"/>
-          <a:lstStyle/>
-          <a:p>
-            <a:pPr algn="ctr"/>
-          </a:p>
-        </p:txBody>
-      </p:sp>
-      <p:sp>
-        <p:nvSpPr>
-          <p:cNvPr id="3" name="TextBox 2"/>
-          <p:cNvSpPr txBox="1"/>
-          <p:nvPr/>
-        </p:nvSpPr>
-        <p:spPr>
-          <a:xfrm>
-            <a:off x="640080" y="502920"/>
-            <a:ext cx="10911535" cy="292608"/>
-          </a:xfrm>
-          <a:prstGeom prst="rect">
-            <a:avLst/>
-          </a:prstGeom>
-          <a:noFill/>
-        </p:spPr>
-        <p:txBody>
-          <a:bodyPr wrap="square" anchor="t" lIns="0" rIns="0" tIns="0" bIns="0">
-            <a:spAutoFit/>
-          </a:bodyPr>
-          <a:lstStyle/>
-          <a:p>
-            <a:r>
-              <a:rPr sz="1250" b="1" i="0" spc="160">
-                <a:solidFill>
-                  <a:srgbClr val="9C4422"/>
-                </a:solidFill>
-                <a:latin typeface="Calibri"/>
-              </a:rPr>
-              <a:t>USO DE ASSERT PARA AUTOVERIFICACIÓN SIN DEPENDENCIAS EXTERNAS</a:t>
-            </a:r>
-          </a:p>
-        </p:txBody>
-      </p:sp>
-      <p:sp>
-        <p:nvSpPr>
-          <p:cNvPr id="4" name="TextBox 3"/>
-          <p:cNvSpPr txBox="1"/>
-          <p:nvPr/>
-        </p:nvSpPr>
-        <p:spPr>
-          <a:xfrm>
-            <a:off x="640080" y="786384"/>
-            <a:ext cx="10911535" cy="822960"/>
-          </a:xfrm>
-          <a:prstGeom prst="rect">
-            <a:avLst/>
-          </a:prstGeom>
-          <a:noFill/>
-        </p:spPr>
-        <p:txBody>
-          <a:bodyPr wrap="square" anchor="t" lIns="0" rIns="0" tIns="0" bIns="0">
-            <a:spAutoFit/>
-          </a:bodyPr>
-          <a:lstStyle/>
-          <a:p>
-            <a:r>
-              <a:rPr sz="3000" b="1" i="0">
-                <a:solidFill>
-                  <a:srgbClr val="3D2B1E"/>
-                </a:solidFill>
-                <a:latin typeface="Cambria"/>
-              </a:rPr>
-              <a:t>Mecanismo de autoverificación</a:t>
-            </a:r>
-          </a:p>
-        </p:txBody>
-      </p:sp>
-      <p:sp>
-        <p:nvSpPr>
-          <p:cNvPr id="5" name="TextBox 4"/>
-          <p:cNvSpPr txBox="1"/>
-          <p:nvPr/>
-        </p:nvSpPr>
-        <p:spPr>
-          <a:xfrm>
-            <a:off x="640080" y="6473952"/>
-            <a:ext cx="7772400" cy="274320"/>
-          </a:xfrm>
-          <a:prstGeom prst="rect">
-            <a:avLst/>
-          </a:prstGeom>
-          <a:noFill/>
-        </p:spPr>
-        <p:txBody>
-          <a:bodyPr wrap="square" anchor="t" lIns="0" rIns="0" tIns="0" bIns="0">
-            <a:spAutoFit/>
-          </a:bodyPr>
-          <a:lstStyle/>
-          <a:p>
-            <a:r>
-              <a:rPr sz="1000" b="0" i="1">
-                <a:solidFill>
-                  <a:srgbClr val="6B5F4E"/>
-                </a:solidFill>
-                <a:latin typeface="Calibri"/>
-              </a:rPr>
-              <a:t>Presentación 1 · Fundamentos, Entorno y Diagnóstico</a:t>
-            </a:r>
-          </a:p>
-        </p:txBody>
-      </p:sp>
-      <p:sp>
-        <p:nvSpPr>
-          <p:cNvPr id="6" name="Oval 5"/>
-          <p:cNvSpPr/>
-          <p:nvPr/>
-        </p:nvSpPr>
-        <p:spPr>
-          <a:xfrm>
-            <a:off x="11240719" y="6419088"/>
-            <a:ext cx="310896" cy="310896"/>
-          </a:xfrm>
-          <a:prstGeom prst="ellipse">
-            <a:avLst/>
-          </a:prstGeom>
-          <a:solidFill>
-            <a:srgbClr val="C1592F"/>
-          </a:solidFill>
-          <a:ln>
-            <a:noFill/>
-          </a:ln>
-          <a:effectLst/>
-        </p:spPr>
-        <p:style>
-          <a:lnRef idx="1">
-            <a:schemeClr val="accent1"/>
-          </a:lnRef>
-          <a:fillRef idx="3">
-            <a:schemeClr val="accent1"/>
-          </a:fillRef>
-          <a:effectRef idx="2">
-            <a:schemeClr val="accent1"/>
-          </a:effectRef>
-          <a:fontRef idx="minor">
-            <a:schemeClr val="lt1"/>
-          </a:fontRef>
-        </p:style>
-        <p:txBody>
-          <a:bodyPr rtlCol="0" anchor="ctr" wrap="none" lIns="0" rIns="0" tIns="0" bIns="0"/>
-          <a:lstStyle/>
-          <a:p>
-            <a:pPr algn="ctr"/>
-            <a:r>
-              <a:rPr sz="1100" b="1" i="0">
-                <a:solidFill>
-                  <a:srgbClr val="241911"/>
-                </a:solidFill>
-                <a:latin typeface="Calibri"/>
-              </a:rPr>
-              <a:t>09</a:t>
-            </a:r>
-          </a:p>
-        </p:txBody>
-      </p:sp>
-      <p:sp>
-        <p:nvSpPr>
-          <p:cNvPr id="7" name="Rounded Rectangle 6"/>
-          <p:cNvSpPr/>
-          <p:nvPr/>
-        </p:nvSpPr>
-        <p:spPr>
-          <a:xfrm>
-            <a:off x="640080" y="1828800"/>
-            <a:ext cx="10911535" cy="1417320"/>
-          </a:xfrm>
-          <a:prstGeom prst="roundRect">
-            <a:avLst>
-              <a:gd name="adj" fmla="val 4500"/>
-            </a:avLst>
-          </a:prstGeom>
-          <a:solidFill>
-            <a:srgbClr val="1C140F"/>
-          </a:solidFill>
-          <a:ln>
-            <a:noFill/>
-          </a:ln>
-          <a:effectLst/>
-        </p:spPr>
-        <p:style>
-          <a:lnRef idx="1">
-            <a:schemeClr val="accent1"/>
-          </a:lnRef>
-          <a:fillRef idx="3">
-            <a:schemeClr val="accent1"/>
-          </a:fillRef>
-          <a:effectRef idx="2">
-            <a:schemeClr val="accent1"/>
-          </a:effectRef>
-          <a:fontRef idx="minor">
-            <a:schemeClr val="lt1"/>
-          </a:fontRef>
-        </p:style>
-        <p:txBody>
-          <a:bodyPr rtlCol="0" anchor="ctr"/>
-          <a:lstStyle/>
-          <a:p>
-            <a:pPr algn="ctr"/>
-          </a:p>
-        </p:txBody>
-      </p:sp>
-      <p:sp>
-        <p:nvSpPr>
-          <p:cNvPr id="8" name="Oval 7"/>
-          <p:cNvSpPr/>
-          <p:nvPr/>
-        </p:nvSpPr>
-        <p:spPr>
-          <a:xfrm>
-            <a:off x="804672" y="1975104"/>
-            <a:ext cx="82296" cy="82296"/>
-          </a:xfrm>
-          <a:prstGeom prst="ellipse">
-            <a:avLst/>
-          </a:prstGeom>
-          <a:solidFill>
-            <a:srgbClr val="E06C5B"/>
-          </a:solidFill>
-          <a:ln>
-            <a:noFill/>
-          </a:ln>
-          <a:effectLst/>
-        </p:spPr>
-        <p:style>
-          <a:lnRef idx="1">
-            <a:schemeClr val="accent1"/>
-          </a:lnRef>
-          <a:fillRef idx="3">
-            <a:schemeClr val="accent1"/>
-          </a:fillRef>
-          <a:effectRef idx="2">
-            <a:schemeClr val="accent1"/>
-          </a:effectRef>
-          <a:fontRef idx="minor">
-            <a:schemeClr val="lt1"/>
-          </a:fontRef>
-        </p:style>
-        <p:txBody>
-          <a:bodyPr rtlCol="0" anchor="ctr"/>
-          <a:lstStyle/>
-          <a:p>
-            <a:pPr algn="ctr"/>
-          </a:p>
-        </p:txBody>
-      </p:sp>
-      <p:sp>
-        <p:nvSpPr>
-          <p:cNvPr id="9" name="Oval 8"/>
-          <p:cNvSpPr/>
-          <p:nvPr/>
-        </p:nvSpPr>
-        <p:spPr>
-          <a:xfrm>
-            <a:off x="950976" y="1975104"/>
-            <a:ext cx="82296" cy="82296"/>
-          </a:xfrm>
-          <a:prstGeom prst="ellipse">
-            <a:avLst/>
-          </a:prstGeom>
-          <a:solidFill>
-            <a:srgbClr val="C1592F"/>
-          </a:solidFill>
-          <a:ln>
-            <a:noFill/>
-          </a:ln>
-          <a:effectLst/>
-        </p:spPr>
-        <p:style>
-          <a:lnRef idx="1">
-            <a:schemeClr val="accent1"/>
-          </a:lnRef>
-          <a:fillRef idx="3">
-            <a:schemeClr val="accent1"/>
-          </a:fillRef>
-          <a:effectRef idx="2">
-            <a:schemeClr val="accent1"/>
-          </a:effectRef>
-          <a:fontRef idx="minor">
-            <a:schemeClr val="lt1"/>
-          </a:fontRef>
-        </p:style>
-        <p:txBody>
-          <a:bodyPr rtlCol="0" anchor="ctr"/>
-          <a:lstStyle/>
-          <a:p>
-            <a:pPr algn="ctr"/>
-          </a:p>
-        </p:txBody>
-      </p:sp>
-      <p:sp>
-        <p:nvSpPr>
-          <p:cNvPr id="10" name="Oval 9"/>
-          <p:cNvSpPr/>
-          <p:nvPr/>
-        </p:nvSpPr>
-        <p:spPr>
-          <a:xfrm>
-            <a:off x="1097280" y="1975104"/>
-            <a:ext cx="82296" cy="82296"/>
-          </a:xfrm>
-          <a:prstGeom prst="ellipse">
-            <a:avLst/>
-          </a:prstGeom>
-          <a:solidFill>
-            <a:srgbClr val="5BB47A"/>
-          </a:solidFill>
-          <a:ln>
-            <a:noFill/>
-          </a:ln>
-          <a:effectLst/>
-        </p:spPr>
-        <p:style>
-          <a:lnRef idx="1">
-            <a:schemeClr val="accent1"/>
-          </a:lnRef>
-          <a:fillRef idx="3">
-            <a:schemeClr val="accent1"/>
-          </a:fillRef>
-          <a:effectRef idx="2">
-            <a:schemeClr val="accent1"/>
-          </a:effectRef>
-          <a:fontRef idx="minor">
-            <a:schemeClr val="lt1"/>
-          </a:fontRef>
-        </p:style>
-        <p:txBody>
-          <a:bodyPr rtlCol="0" anchor="ctr"/>
-          <a:lstStyle/>
-          <a:p>
-            <a:pPr algn="ctr"/>
-          </a:p>
-        </p:txBody>
-      </p:sp>
-      <p:sp>
-        <p:nvSpPr>
-          <p:cNvPr id="11" name="TextBox 10"/>
-          <p:cNvSpPr txBox="1"/>
-          <p:nvPr/>
-        </p:nvSpPr>
-        <p:spPr>
-          <a:xfrm>
-            <a:off x="640080" y="1956816"/>
-            <a:ext cx="10637215" cy="201168"/>
-          </a:xfrm>
-          <a:prstGeom prst="rect">
-            <a:avLst/>
-          </a:prstGeom>
-          <a:noFill/>
-        </p:spPr>
-        <p:txBody>
-          <a:bodyPr wrap="none" anchor="t" lIns="0" rIns="0" tIns="0" bIns="0">
-            <a:spAutoFit/>
-          </a:bodyPr>
-          <a:lstStyle/>
-          <a:p>
-            <a:pPr algn="r"/>
-            <a:r>
-              <a:rPr sz="1050" b="0" i="1">
-                <a:solidFill>
-                  <a:srgbClr val="CBBBA8"/>
-                </a:solidFill>
-                <a:latin typeface="Calibri"/>
-              </a:rPr>
-              <a:t>0_Diagnostic.ipynb</a:t>
-            </a:r>
-          </a:p>
-        </p:txBody>
-      </p:sp>
-      <p:sp>
-        <p:nvSpPr>
-          <p:cNvPr id="12" name="TextBox 11"/>
-          <p:cNvSpPr txBox="1"/>
-          <p:nvPr/>
-        </p:nvSpPr>
-        <p:spPr>
-          <a:xfrm>
-            <a:off x="877824" y="2194560"/>
-            <a:ext cx="10436047" cy="905256"/>
-          </a:xfrm>
-          <a:prstGeom prst="rect">
-            <a:avLst/>
-          </a:prstGeom>
-          <a:noFill/>
-        </p:spPr>
-        <p:txBody>
-          <a:bodyPr wrap="square" anchor="t" lIns="0" rIns="0" tIns="0" bIns="0">
-            <a:spAutoFit/>
-          </a:bodyPr>
-          <a:lstStyle/>
-          <a:p>
-            <a:pPr>
-              <a:spcAft>
-                <a:spcPts val="400"/>
-              </a:spcAft>
-            </a:pPr>
-            <a:r>
-              <a:rPr sz="1450" b="0" i="0">
-                <a:solidFill>
-                  <a:srgbClr val="F3ECE2"/>
-                </a:solidFill>
-                <a:latin typeface="Courier New"/>
-              </a:rPr>
-              <a:t>resultado = suma(2, 3)</a:t>
-            </a:r>
-          </a:p>
-          <a:p>
-            <a:pPr>
-              <a:spcAft>
-                <a:spcPts val="400"/>
-              </a:spcAft>
-            </a:pPr>
-            <a:r>
-              <a:rPr sz="1450" b="0" i="0">
-                <a:solidFill>
-                  <a:srgbClr val="F3ECE2"/>
-                </a:solidFill>
-                <a:latin typeface="Courier New"/>
-              </a:rPr>
-              <a:t>assert resultado == 5, "La función suma no retorna el valor esperado"</a:t>
-            </a:r>
-          </a:p>
-        </p:txBody>
-      </p:sp>
-      <p:sp>
-        <p:nvSpPr>
-          <p:cNvPr id="13" name="TextBox 12"/>
-          <p:cNvSpPr txBox="1"/>
-          <p:nvPr/>
-        </p:nvSpPr>
-        <p:spPr>
-          <a:xfrm>
-            <a:off x="640080" y="3520440"/>
-            <a:ext cx="10911535" cy="2468880"/>
-          </a:xfrm>
-          <a:prstGeom prst="rect">
-            <a:avLst/>
-          </a:prstGeom>
-          <a:noFill/>
-        </p:spPr>
-        <p:txBody>
-          <a:bodyPr wrap="square" anchor="t" lIns="0" rIns="0" tIns="0" bIns="0">
-            <a:spAutoFit/>
-          </a:bodyPr>
-          <a:lstStyle/>
-          <a:p>
-            <a:pPr>
-              <a:lnSpc>
-                <a:spcPct val="115000"/>
-              </a:lnSpc>
-              <a:spcAft>
-                <a:spcPts val="1200"/>
-              </a:spcAft>
-            </a:pPr>
-            <a:r>
-              <a:rPr sz="1450" b="1" i="0">
-                <a:solidFill>
-                  <a:srgbClr val="9C4422"/>
-                </a:solidFill>
-                <a:latin typeface="Calibri"/>
-              </a:rPr>
-              <a:t>▸  </a:t>
-            </a:r>
-            <a:r>
-              <a:rPr sz="1450" b="1" i="0">
-                <a:solidFill>
-                  <a:srgbClr val="3D2B1E"/>
-                </a:solidFill>
-                <a:latin typeface="Calibri"/>
-              </a:rPr>
-              <a:t>assert </a:t>
-            </a:r>
-            <a:r>
-              <a:rPr sz="1450" b="0" i="0">
-                <a:solidFill>
-                  <a:srgbClr val="3D2B1E"/>
-                </a:solidFill>
-                <a:latin typeface="Calibri"/>
-              </a:rPr>
-              <a:t> permite validar resultados de forma automática, sin necesidad de un profesor revisando manualmente cada notebook.</a:t>
-            </a:r>
-          </a:p>
-          <a:p>
-            <a:pPr>
-              <a:lnSpc>
-                <a:spcPct val="115000"/>
-              </a:lnSpc>
-              <a:spcAft>
-                <a:spcPts val="1200"/>
-              </a:spcAft>
-            </a:pPr>
-            <a:r>
-              <a:rPr sz="1450" b="1" i="0">
-                <a:solidFill>
-                  <a:srgbClr val="9C4422"/>
-                </a:solidFill>
-                <a:latin typeface="Calibri"/>
-              </a:rPr>
-              <a:t>▸  </a:t>
-            </a:r>
-            <a:r>
-              <a:rPr sz="1450" b="1" i="0">
-                <a:solidFill>
-                  <a:srgbClr val="3D2B1E"/>
-                </a:solidFill>
-                <a:latin typeface="Calibri"/>
-              </a:rPr>
-              <a:t>Si la aserción falla, </a:t>
-            </a:r>
-            <a:r>
-              <a:rPr sz="1450" b="0" i="0">
-                <a:solidFill>
-                  <a:srgbClr val="3D2B1E"/>
-                </a:solidFill>
-                <a:latin typeface="Calibri"/>
-              </a:rPr>
-              <a:t> el notebook detiene la ejecución — señal inmediata de dónde está el error.</a:t>
-            </a:r>
-          </a:p>
-          <a:p>
-            <a:pPr>
-              <a:lnSpc>
-                <a:spcPct val="115000"/>
-              </a:lnSpc>
-              <a:spcAft>
-                <a:spcPts val="1200"/>
-              </a:spcAft>
-            </a:pPr>
-            <a:r>
-              <a:rPr sz="1450" b="1" i="0">
-                <a:solidFill>
-                  <a:srgbClr val="9C4422"/>
-                </a:solidFill>
-                <a:latin typeface="Calibri"/>
-              </a:rPr>
-              <a:t>▸  </a:t>
-            </a:r>
-            <a:r>
-              <a:rPr sz="1450" b="1" i="0">
-                <a:solidFill>
-                  <a:srgbClr val="3D2B1E"/>
-                </a:solidFill>
-                <a:latin typeface="Calibri"/>
-              </a:rPr>
-              <a:t>Se usará el mismo mecanismo </a:t>
-            </a:r>
-            <a:r>
-              <a:rPr sz="1450" b="0" i="0">
-                <a:solidFill>
-                  <a:srgbClr val="3D2B1E"/>
-                </a:solidFill>
-                <a:latin typeface="Calibri"/>
-              </a:rPr>
-              <a:t> en módulos posteriores para validar transformaciones de datos y resultados de modelos.</a:t>
             </a:r>
           </a:p>
         </p:txBody>
